--- a/output/wordlabs-collect-3day.pptx
+++ b/output/wordlabs-collect-3day.pptx
@@ -4240,7 +4240,7 @@
                 <a:ea typeface="Calibri" pitchFamily="34" charset="-122"/>
                 <a:cs typeface="Calibri" pitchFamily="34" charset="-120"/>
               </a:rPr>
-              <a:t>"gather or bring together"</a:t>
+              <a:t>"gather together, bring together"</a:t>
             </a:r>
             <a:endParaRPr lang="en-US" sz="2200" dirty="0"/>
           </a:p>
@@ -5288,7 +5288,7 @@
                 <a:ea typeface="Calibri" pitchFamily="34" charset="-122"/>
                 <a:cs typeface="Calibri" pitchFamily="34" charset="-120"/>
               </a:rPr>
-              <a:t>Word Labs  •  wordlabs.app  •  Root: 'collect' = gather or bring together</a:t>
+              <a:t>Word Labs  •  wordlabs.app  •  Root: 'collect' = gather together, bring together</a:t>
             </a:r>
             <a:endParaRPr lang="en-US" sz="800" dirty="0"/>
           </a:p>
@@ -5928,7 +5928,7 @@
                 <a:ea typeface="Calibri" pitchFamily="34" charset="-122"/>
                 <a:cs typeface="Calibri" pitchFamily="34" charset="-120"/>
               </a:rPr>
-              <a:t>Word Labs  •  wordlabs.app  •  Root: 'collect' = gather or bring together</a:t>
+              <a:t>Word Labs  •  wordlabs.app  •  Root: 'collect' = gather together, bring together</a:t>
             </a:r>
             <a:endParaRPr lang="en-US" sz="800" dirty="0"/>
           </a:p>
@@ -6040,7 +6040,7 @@
                 <a:ea typeface="Calibri" pitchFamily="34" charset="-122"/>
                 <a:cs typeface="Calibri" pitchFamily="34" charset="-120"/>
               </a:rPr>
-              <a:t>The keen </a:t>
+              <a:t>The </a:t>
             </a:r>
             <a:pPr algn="l" indent="0" marL="0">
               <a:buNone/>
@@ -6071,7 +6071,7 @@
                 <a:ea typeface="Calibri" pitchFamily="34" charset="-122"/>
                 <a:cs typeface="Calibri" pitchFamily="34" charset="-120"/>
               </a:rPr>
-              <a:t> displayed her </a:t>
+              <a:t> carefully stored his </a:t>
             </a:r>
             <a:pPr algn="l" indent="0" marL="0">
               <a:buNone/>
@@ -6088,7 +6088,7 @@
                 <a:ea typeface="Calibri" pitchFamily="34" charset="-122"/>
                 <a:cs typeface="Calibri" pitchFamily="34" charset="-120"/>
               </a:rPr>
-              <a:t>collectible</a:t>
+              <a:t>collection</a:t>
             </a:r>
             <a:pPr algn="l" indent="0" marL="0">
               <a:buNone/>
@@ -6102,7 +6102,7 @@
                 <a:ea typeface="Calibri" pitchFamily="34" charset="-122"/>
                 <a:cs typeface="Calibri" pitchFamily="34" charset="-120"/>
               </a:rPr>
-              <a:t> figurines on the shelf.</a:t>
+              <a:t> in labelled boxes.</a:t>
             </a:r>
             <a:endParaRPr lang="en-US" sz="1800" dirty="0"/>
           </a:p>
@@ -6385,7 +6385,7 @@
                 <a:ea typeface="Trebuchet MS" pitchFamily="34" charset="-122"/>
                 <a:cs typeface="Trebuchet MS" pitchFamily="34" charset="-120"/>
               </a:rPr>
-              <a:t>collectible</a:t>
+              <a:t>collection</a:t>
             </a:r>
             <a:endParaRPr lang="en-US" sz="1400" dirty="0"/>
           </a:p>
@@ -6716,7 +6716,7 @@
                 <a:ea typeface="Calibri" pitchFamily="34" charset="-122"/>
                 <a:cs typeface="Calibri" pitchFamily="34" charset="-120"/>
               </a:rPr>
-              <a:t>Word Labs  •  wordlabs.app  •  Root: 'collect' = gather or bring together</a:t>
+              <a:t>Word Labs  •  wordlabs.app  •  Root: 'collect' = gather together, bring together</a:t>
             </a:r>
             <a:endParaRPr lang="en-US" sz="800" dirty="0"/>
           </a:p>
@@ -7543,7 +7543,7 @@
                 <a:ea typeface="Calibri" pitchFamily="34" charset="-122"/>
                 <a:cs typeface="Calibri" pitchFamily="34" charset="-120"/>
               </a:rPr>
-              <a:t>Word Labs  •  wordlabs.app  •  Root: 'collect' = gather or bring together</a:t>
+              <a:t>Word Labs  •  wordlabs.app  •  Root: 'collect' = gather together, bring together</a:t>
             </a:r>
             <a:endParaRPr lang="en-US" sz="800" dirty="0"/>
           </a:p>
@@ -8123,7 +8123,7 @@
                 <a:ea typeface="Calibri" pitchFamily="34" charset="-122"/>
                 <a:cs typeface="Calibri" pitchFamily="34" charset="-120"/>
               </a:rPr>
-              <a:t>person who does</a:t>
+              <a:t>person who does something</a:t>
             </a:r>
             <a:endParaRPr lang="en-US" sz="850" dirty="0"/>
           </a:p>
@@ -8679,7 +8679,7 @@
                 <a:ea typeface="Calibri" pitchFamily="34" charset="-122"/>
                 <a:cs typeface="Calibri" pitchFamily="34" charset="-120"/>
               </a:rPr>
-              <a:t>Word Labs  •  wordlabs.app  •  Root: 'collect' = gather or bring together</a:t>
+              <a:t>Word Labs  •  wordlabs.app  •  Root: 'collect' = gather together, bring together</a:t>
             </a:r>
             <a:endParaRPr lang="en-US" sz="800" dirty="0"/>
           </a:p>
@@ -9259,7 +9259,7 @@
                 <a:ea typeface="Calibri" pitchFamily="34" charset="-122"/>
                 <a:cs typeface="Calibri" pitchFamily="34" charset="-120"/>
               </a:rPr>
-              <a:t>person who does</a:t>
+              <a:t>person who does something</a:t>
             </a:r>
             <a:endParaRPr lang="en-US" sz="850" dirty="0"/>
           </a:p>
@@ -10052,7 +10052,7 @@
                 <a:ea typeface="Calibri" pitchFamily="34" charset="-122"/>
                 <a:cs typeface="Calibri" pitchFamily="34" charset="-120"/>
               </a:rPr>
-              <a:t>Word Labs  •  wordlabs.app  •  Root: 'collect' = gather or bring together</a:t>
+              <a:t>Word Labs  •  wordlabs.app  •  Root: 'collect' = gather together, bring together</a:t>
             </a:r>
             <a:endParaRPr lang="en-US" sz="800" dirty="0"/>
           </a:p>
@@ -10632,7 +10632,7 @@
                 <a:ea typeface="Calibri" pitchFamily="34" charset="-122"/>
                 <a:cs typeface="Calibri" pitchFamily="34" charset="-120"/>
               </a:rPr>
-              <a:t>person who does</a:t>
+              <a:t>person who does something</a:t>
             </a:r>
             <a:endParaRPr lang="en-US" sz="850" dirty="0"/>
           </a:p>
@@ -11926,7 +11926,7 @@
                 <a:ea typeface="Calibri" pitchFamily="34" charset="-122"/>
                 <a:cs typeface="Calibri" pitchFamily="34" charset="-120"/>
               </a:rPr>
-              <a:t>Word Labs  •  wordlabs.app  •  Root: 'collect' = gather or bring together</a:t>
+              <a:t>Word Labs  •  wordlabs.app  •  Root: 'collect' = gather together, bring together</a:t>
             </a:r>
             <a:endParaRPr lang="en-US" sz="800" dirty="0"/>
           </a:p>
@@ -12065,7 +12065,7 @@
                 <a:ea typeface="Trebuchet MS" pitchFamily="34" charset="-122"/>
                 <a:cs typeface="Trebuchet MS" pitchFamily="34" charset="-120"/>
               </a:rPr>
-              <a:t>collectible</a:t>
+              <a:t>collection</a:t>
             </a:r>
             <a:endParaRPr lang="en-US" sz="2800" dirty="0"/>
           </a:p>
@@ -12753,7 +12753,7 @@
                 <a:ea typeface="Calibri" pitchFamily="34" charset="-122"/>
                 <a:cs typeface="Calibri" pitchFamily="34" charset="-120"/>
               </a:rPr>
-              <a:t>Word Labs  •  wordlabs.app  •  Root: 'collect' = gather or bring together</a:t>
+              <a:t>Word Labs  •  wordlabs.app  •  Root: 'collect' = gather together, bring together</a:t>
             </a:r>
             <a:endParaRPr lang="en-US" sz="800" dirty="0"/>
           </a:p>
@@ -12892,7 +12892,7 @@
                 <a:ea typeface="Trebuchet MS" pitchFamily="34" charset="-122"/>
                 <a:cs typeface="Trebuchet MS" pitchFamily="34" charset="-120"/>
               </a:rPr>
-              <a:t>collectible</a:t>
+              <a:t>collection</a:t>
             </a:r>
             <a:endParaRPr lang="en-US" sz="2800" dirty="0"/>
           </a:p>
@@ -13294,7 +13294,7 @@
                 <a:ea typeface="Trebuchet MS" pitchFamily="34" charset="-122"/>
                 <a:cs typeface="Trebuchet MS" pitchFamily="34" charset="-120"/>
               </a:rPr>
-              <a:t>ible</a:t>
+              <a:t>ion</a:t>
             </a:r>
             <a:endParaRPr lang="en-US" sz="1300" dirty="0"/>
           </a:p>
@@ -13333,7 +13333,7 @@
                 <a:ea typeface="Calibri" pitchFamily="34" charset="-122"/>
                 <a:cs typeface="Calibri" pitchFamily="34" charset="-120"/>
               </a:rPr>
-              <a:t>able to be</a:t>
+              <a:t>act or result of</a:t>
             </a:r>
             <a:endParaRPr lang="en-US" sz="850" dirty="0"/>
           </a:p>
@@ -13889,7 +13889,7 @@
                 <a:ea typeface="Calibri" pitchFamily="34" charset="-122"/>
                 <a:cs typeface="Calibri" pitchFamily="34" charset="-120"/>
               </a:rPr>
-              <a:t>Word Labs  •  wordlabs.app  •  Root: 'collect' = gather or bring together</a:t>
+              <a:t>Word Labs  •  wordlabs.app  •  Root: 'collect' = gather together, bring together</a:t>
             </a:r>
             <a:endParaRPr lang="en-US" sz="800" dirty="0"/>
           </a:p>
@@ -14028,7 +14028,7 @@
                 <a:ea typeface="Trebuchet MS" pitchFamily="34" charset="-122"/>
                 <a:cs typeface="Trebuchet MS" pitchFamily="34" charset="-120"/>
               </a:rPr>
-              <a:t>collectible</a:t>
+              <a:t>collection</a:t>
             </a:r>
             <a:endParaRPr lang="en-US" sz="2800" dirty="0"/>
           </a:p>
@@ -14430,7 +14430,7 @@
                 <a:ea typeface="Trebuchet MS" pitchFamily="34" charset="-122"/>
                 <a:cs typeface="Trebuchet MS" pitchFamily="34" charset="-120"/>
               </a:rPr>
-              <a:t>ible</a:t>
+              <a:t>ion</a:t>
             </a:r>
             <a:endParaRPr lang="en-US" sz="1300" dirty="0"/>
           </a:p>
@@ -14469,7 +14469,7 @@
                 <a:ea typeface="Calibri" pitchFamily="34" charset="-122"/>
                 <a:cs typeface="Calibri" pitchFamily="34" charset="-120"/>
               </a:rPr>
-              <a:t>able to be</a:t>
+              <a:t>act or result of</a:t>
             </a:r>
             <a:endParaRPr lang="en-US" sz="850" dirty="0"/>
           </a:p>
@@ -14576,8 +14576,8 @@
         </p:nvSpPr>
         <p:spPr>
           <a:xfrm>
-            <a:off x="1975104" y="3364992"/>
-            <a:ext cx="1554480" cy="475488"/>
+            <a:off x="2313432" y="3364992"/>
+            <a:ext cx="1645920" cy="475488"/>
           </a:xfrm>
           <a:prstGeom prst="rect">
             <a:avLst>
@@ -14603,8 +14603,8 @@
         </p:nvSpPr>
         <p:spPr>
           <a:xfrm>
-            <a:off x="1975104" y="3364992"/>
-            <a:ext cx="1554480" cy="475488"/>
+            <a:off x="2313432" y="3364992"/>
+            <a:ext cx="1645920" cy="475488"/>
           </a:xfrm>
           <a:prstGeom prst="rect">
             <a:avLst/>
@@ -14642,8 +14642,8 @@
         </p:nvSpPr>
         <p:spPr>
           <a:xfrm>
-            <a:off x="3529584" y="3364992"/>
-            <a:ext cx="73152" cy="475488"/>
+            <a:off x="3959352" y="3364992"/>
+            <a:ext cx="411480" cy="475488"/>
           </a:xfrm>
           <a:prstGeom prst="rect">
             <a:avLst/>
@@ -14681,8 +14681,8 @@
         </p:nvSpPr>
         <p:spPr>
           <a:xfrm>
-            <a:off x="3602736" y="3364992"/>
-            <a:ext cx="1554480" cy="475488"/>
+            <a:off x="4370832" y="3364992"/>
+            <a:ext cx="1645920" cy="475488"/>
           </a:xfrm>
           <a:prstGeom prst="rect">
             <a:avLst>
@@ -14708,8 +14708,8 @@
         </p:nvSpPr>
         <p:spPr>
           <a:xfrm>
-            <a:off x="3602736" y="3364992"/>
-            <a:ext cx="1554480" cy="475488"/>
+            <a:off x="4370832" y="3364992"/>
+            <a:ext cx="1645920" cy="475488"/>
           </a:xfrm>
           <a:prstGeom prst="rect">
             <a:avLst/>
@@ -14747,8 +14747,8 @@
         </p:nvSpPr>
         <p:spPr>
           <a:xfrm>
-            <a:off x="5157216" y="3364992"/>
-            <a:ext cx="73152" cy="475488"/>
+            <a:off x="6016752" y="3364992"/>
+            <a:ext cx="411480" cy="475488"/>
           </a:xfrm>
           <a:prstGeom prst="rect">
             <a:avLst/>
@@ -14786,8 +14786,8 @@
         </p:nvSpPr>
         <p:spPr>
           <a:xfrm>
-            <a:off x="5230368" y="3364992"/>
-            <a:ext cx="1554480" cy="475488"/>
+            <a:off x="6428232" y="3364992"/>
+            <a:ext cx="1645920" cy="475488"/>
           </a:xfrm>
           <a:prstGeom prst="rect">
             <a:avLst>
@@ -14813,8 +14813,8 @@
         </p:nvSpPr>
         <p:spPr>
           <a:xfrm>
-            <a:off x="5230368" y="3364992"/>
-            <a:ext cx="1554480" cy="475488"/>
+            <a:off x="6428232" y="3364992"/>
+            <a:ext cx="1645920" cy="475488"/>
           </a:xfrm>
           <a:prstGeom prst="rect">
             <a:avLst/>
@@ -14838,7 +14838,7 @@
                 <a:ea typeface="Trebuchet MS" pitchFamily="34" charset="-122"/>
                 <a:cs typeface="Trebuchet MS" pitchFamily="34" charset="-120"/>
               </a:rPr>
-              <a:t>ti</a:t>
+              <a:t>tion</a:t>
             </a:r>
             <a:endParaRPr lang="en-US" sz="1400" dirty="0"/>
           </a:p>
@@ -14846,119 +14846,80 @@
       </p:sp>
       <p:sp>
         <p:nvSpPr>
-          <p:cNvPr id="37" name="Text 35"/>
-          <p:cNvSpPr/>
-          <p:nvPr/>
-        </p:nvSpPr>
-        <p:spPr>
-          <a:xfrm>
-            <a:off x="6784848" y="3364992"/>
-            <a:ext cx="73152" cy="475488"/>
-          </a:xfrm>
-          <a:prstGeom prst="rect">
-            <a:avLst/>
-          </a:prstGeom>
-          <a:noFill/>
-          <a:ln/>
-        </p:spPr>
-        <p:txBody>
-          <a:bodyPr wrap="square" lIns="0" tIns="0" rIns="0" bIns="0" rtlCol="0" anchor="ctr"/>
-          <a:lstStyle/>
-          <a:p>
-            <a:pPr algn="ctr" indent="0" marL="0">
-              <a:buNone/>
-            </a:pPr>
-            <a:r>
-              <a:rPr lang="en-US" sz="1600" b="1" dirty="0">
-                <a:solidFill>
-                  <a:srgbClr val="0D9488"/>
+          <p:cNvPr id="37" name="Shape 35"/>
+          <p:cNvSpPr/>
+          <p:nvPr/>
+        </p:nvSpPr>
+        <p:spPr>
+          <a:xfrm>
+            <a:off x="365760" y="4096512"/>
+            <a:ext cx="1371600" cy="804672"/>
+          </a:xfrm>
+          <a:prstGeom prst="rect">
+            <a:avLst>
+              <a:gd name="adj" fmla="val 6818"/>
+            </a:avLst>
+          </a:prstGeom>
+          <a:solidFill>
+            <a:srgbClr val="E2E8F0"/>
+          </a:solidFill>
+          <a:ln w="12700">
+            <a:solidFill>
+              <a:srgbClr val="E2E8F0"/>
+            </a:solidFill>
+            <a:prstDash val="solid"/>
+          </a:ln>
+        </p:spPr>
+      </p:sp>
+      <p:sp>
+        <p:nvSpPr>
+          <p:cNvPr id="38" name="Text 36"/>
+          <p:cNvSpPr/>
+          <p:nvPr/>
+        </p:nvSpPr>
+        <p:spPr>
+          <a:xfrm>
+            <a:off x="365760" y="4096512"/>
+            <a:ext cx="1371600" cy="804672"/>
+          </a:xfrm>
+          <a:prstGeom prst="rect">
+            <a:avLst/>
+          </a:prstGeom>
+          <a:noFill/>
+          <a:ln/>
+        </p:spPr>
+        <p:txBody>
+          <a:bodyPr wrap="square" lIns="0" tIns="0" rIns="0" bIns="0" rtlCol="0" anchor="ctr"/>
+          <a:lstStyle/>
+          <a:p>
+            <a:pPr algn="ctr" indent="0" marL="0">
+              <a:buNone/>
+            </a:pPr>
+            <a:r>
+              <a:rPr lang="en-US" sz="1100" b="1" dirty="0">
+                <a:solidFill>
+                  <a:srgbClr val="475569"/>
                 </a:solidFill>
                 <a:latin typeface="Trebuchet MS" pitchFamily="34" charset="0"/>
                 <a:ea typeface="Trebuchet MS" pitchFamily="34" charset="-122"/>
                 <a:cs typeface="Trebuchet MS" pitchFamily="34" charset="-120"/>
               </a:rPr>
-              <a:t>·</a:t>
-            </a:r>
-            <a:endParaRPr lang="en-US" sz="1600" dirty="0"/>
-          </a:p>
-        </p:txBody>
-      </p:sp>
-      <p:sp>
-        <p:nvSpPr>
-          <p:cNvPr id="38" name="Shape 36"/>
-          <p:cNvSpPr/>
-          <p:nvPr/>
-        </p:nvSpPr>
-        <p:spPr>
-          <a:xfrm>
-            <a:off x="6858000" y="3364992"/>
-            <a:ext cx="1554480" cy="475488"/>
-          </a:xfrm>
-          <a:prstGeom prst="rect">
-            <a:avLst>
-              <a:gd name="adj" fmla="val 9615"/>
-            </a:avLst>
-          </a:prstGeom>
-          <a:solidFill>
-            <a:srgbClr val="FFFFFF"/>
-          </a:solidFill>
-          <a:ln w="12700">
-            <a:solidFill>
-              <a:srgbClr val="0D9488"/>
-            </a:solidFill>
-            <a:prstDash val="solid"/>
-          </a:ln>
-        </p:spPr>
-      </p:sp>
-      <p:sp>
-        <p:nvSpPr>
-          <p:cNvPr id="39" name="Text 37"/>
-          <p:cNvSpPr/>
-          <p:nvPr/>
-        </p:nvSpPr>
-        <p:spPr>
-          <a:xfrm>
-            <a:off x="6858000" y="3364992"/>
-            <a:ext cx="1554480" cy="475488"/>
-          </a:xfrm>
-          <a:prstGeom prst="rect">
-            <a:avLst/>
-          </a:prstGeom>
-          <a:noFill/>
-          <a:ln/>
-        </p:spPr>
-        <p:txBody>
-          <a:bodyPr wrap="square" lIns="0" tIns="0" rIns="0" bIns="0" rtlCol="0" anchor="ctr"/>
-          <a:lstStyle/>
-          <a:p>
-            <a:pPr algn="ctr" indent="0" marL="0">
-              <a:buNone/>
-            </a:pPr>
-            <a:r>
-              <a:rPr lang="en-US" sz="1400" b="1" dirty="0">
-                <a:solidFill>
-                  <a:srgbClr val="0D9488"/>
-                </a:solidFill>
-                <a:latin typeface="Trebuchet MS" pitchFamily="34" charset="0"/>
-                <a:ea typeface="Trebuchet MS" pitchFamily="34" charset="-122"/>
-                <a:cs typeface="Trebuchet MS" pitchFamily="34" charset="-120"/>
-              </a:rPr>
-              <a:t>ble</a:t>
-            </a:r>
-            <a:endParaRPr lang="en-US" sz="1400" dirty="0"/>
-          </a:p>
-        </p:txBody>
-      </p:sp>
-      <p:sp>
-        <p:nvSpPr>
-          <p:cNvPr id="40" name="Shape 38"/>
-          <p:cNvSpPr/>
-          <p:nvPr/>
-        </p:nvSpPr>
-        <p:spPr>
-          <a:xfrm>
-            <a:off x="365760" y="4096512"/>
-            <a:ext cx="1371600" cy="804672"/>
+              <a:t>Phonemes</a:t>
+            </a:r>
+            <a:endParaRPr lang="en-US" sz="1100" dirty="0"/>
+          </a:p>
+        </p:txBody>
+      </p:sp>
+      <p:sp>
+        <p:nvSpPr>
+          <p:cNvPr id="39" name="Shape 37"/>
+          <p:cNvSpPr/>
+          <p:nvPr/>
+        </p:nvSpPr>
+        <p:spPr>
+          <a:xfrm>
+            <a:off x="1874520" y="4096512"/>
+            <a:ext cx="6903720" cy="804672"/>
           </a:xfrm>
           <a:prstGeom prst="rect">
             <a:avLst>
@@ -14966,85 +14927,19 @@
             </a:avLst>
           </a:prstGeom>
           <a:solidFill>
-            <a:srgbClr val="E2E8F0"/>
+            <a:srgbClr val="F8FAFC"/>
           </a:solidFill>
           <a:ln w="12700">
             <a:solidFill>
               <a:srgbClr val="E2E8F0"/>
             </a:solidFill>
-            <a:prstDash val="solid"/>
-          </a:ln>
-        </p:spPr>
-      </p:sp>
-      <p:sp>
-        <p:nvSpPr>
-          <p:cNvPr id="41" name="Text 39"/>
-          <p:cNvSpPr/>
-          <p:nvPr/>
-        </p:nvSpPr>
-        <p:spPr>
-          <a:xfrm>
-            <a:off x="365760" y="4096512"/>
-            <a:ext cx="1371600" cy="804672"/>
-          </a:xfrm>
-          <a:prstGeom prst="rect">
-            <a:avLst/>
-          </a:prstGeom>
-          <a:noFill/>
-          <a:ln/>
-        </p:spPr>
-        <p:txBody>
-          <a:bodyPr wrap="square" lIns="0" tIns="0" rIns="0" bIns="0" rtlCol="0" anchor="ctr"/>
-          <a:lstStyle/>
-          <a:p>
-            <a:pPr algn="ctr" indent="0" marL="0">
-              <a:buNone/>
-            </a:pPr>
-            <a:r>
-              <a:rPr lang="en-US" sz="1100" b="1" dirty="0">
-                <a:solidFill>
-                  <a:srgbClr val="475569"/>
-                </a:solidFill>
-                <a:latin typeface="Trebuchet MS" pitchFamily="34" charset="0"/>
-                <a:ea typeface="Trebuchet MS" pitchFamily="34" charset="-122"/>
-                <a:cs typeface="Trebuchet MS" pitchFamily="34" charset="-120"/>
-              </a:rPr>
-              <a:t>Phonemes</a:t>
-            </a:r>
-            <a:endParaRPr lang="en-US" sz="1100" dirty="0"/>
-          </a:p>
-        </p:txBody>
-      </p:sp>
-      <p:sp>
-        <p:nvSpPr>
-          <p:cNvPr id="42" name="Shape 40"/>
-          <p:cNvSpPr/>
-          <p:nvPr/>
-        </p:nvSpPr>
-        <p:spPr>
-          <a:xfrm>
-            <a:off x="1874520" y="4096512"/>
-            <a:ext cx="6903720" cy="804672"/>
-          </a:xfrm>
-          <a:prstGeom prst="rect">
-            <a:avLst>
-              <a:gd name="adj" fmla="val 6818"/>
-            </a:avLst>
-          </a:prstGeom>
-          <a:solidFill>
-            <a:srgbClr val="F8FAFC"/>
-          </a:solidFill>
-          <a:ln w="12700">
-            <a:solidFill>
-              <a:srgbClr val="E2E8F0"/>
-            </a:solidFill>
             <a:prstDash val="dash"/>
           </a:ln>
         </p:spPr>
       </p:sp>
       <p:sp>
         <p:nvSpPr>
-          <p:cNvPr id="43" name="Text 41"/>
+          <p:cNvPr id="40" name="Text 38"/>
           <p:cNvSpPr/>
           <p:nvPr/>
         </p:nvSpPr>
@@ -15276,7 +15171,7 @@
                 <a:ea typeface="Calibri" pitchFamily="34" charset="-122"/>
                 <a:cs typeface="Calibri" pitchFamily="34" charset="-120"/>
               </a:rPr>
-              <a:t>Root 'collect' — gather or bring together</a:t>
+              <a:t>Root 'collect' — gather together, bring together</a:t>
             </a:r>
             <a:endParaRPr lang="en-US" sz="1600" dirty="0"/>
           </a:p>
@@ -15632,7 +15527,7 @@
                 <a:ea typeface="Calibri" pitchFamily="34" charset="-122"/>
                 <a:cs typeface="Calibri" pitchFamily="34" charset="-120"/>
               </a:rPr>
-              <a:t>Word Labs  •  wordlabs.app  •  Root: 'collect' = gather or bring together</a:t>
+              <a:t>Word Labs  •  wordlabs.app  •  Root: 'collect' = gather together, bring together</a:t>
             </a:r>
             <a:endParaRPr lang="en-US" sz="800" dirty="0"/>
           </a:p>
@@ -15771,7 +15666,7 @@
                 <a:ea typeface="Trebuchet MS" pitchFamily="34" charset="-122"/>
                 <a:cs typeface="Trebuchet MS" pitchFamily="34" charset="-120"/>
               </a:rPr>
-              <a:t>collectible</a:t>
+              <a:t>collection</a:t>
             </a:r>
             <a:endParaRPr lang="en-US" sz="2800" dirty="0"/>
           </a:p>
@@ -16173,7 +16068,7 @@
                 <a:ea typeface="Trebuchet MS" pitchFamily="34" charset="-122"/>
                 <a:cs typeface="Trebuchet MS" pitchFamily="34" charset="-120"/>
               </a:rPr>
-              <a:t>ible</a:t>
+              <a:t>ion</a:t>
             </a:r>
             <a:endParaRPr lang="en-US" sz="1300" dirty="0"/>
           </a:p>
@@ -16212,7 +16107,7 @@
                 <a:ea typeface="Calibri" pitchFamily="34" charset="-122"/>
                 <a:cs typeface="Calibri" pitchFamily="34" charset="-120"/>
               </a:rPr>
-              <a:t>able to be</a:t>
+              <a:t>act or result of</a:t>
             </a:r>
             <a:endParaRPr lang="en-US" sz="850" dirty="0"/>
           </a:p>
@@ -16319,8 +16214,8 @@
         </p:nvSpPr>
         <p:spPr>
           <a:xfrm>
-            <a:off x="1975104" y="3364992"/>
-            <a:ext cx="1554480" cy="475488"/>
+            <a:off x="2313432" y="3364992"/>
+            <a:ext cx="1645920" cy="475488"/>
           </a:xfrm>
           <a:prstGeom prst="rect">
             <a:avLst>
@@ -16346,8 +16241,8 @@
         </p:nvSpPr>
         <p:spPr>
           <a:xfrm>
-            <a:off x="1975104" y="3364992"/>
-            <a:ext cx="1554480" cy="475488"/>
+            <a:off x="2313432" y="3364992"/>
+            <a:ext cx="1645920" cy="475488"/>
           </a:xfrm>
           <a:prstGeom prst="rect">
             <a:avLst/>
@@ -16385,8 +16280,8 @@
         </p:nvSpPr>
         <p:spPr>
           <a:xfrm>
-            <a:off x="3529584" y="3364992"/>
-            <a:ext cx="73152" cy="475488"/>
+            <a:off x="3959352" y="3364992"/>
+            <a:ext cx="411480" cy="475488"/>
           </a:xfrm>
           <a:prstGeom prst="rect">
             <a:avLst/>
@@ -16424,8 +16319,8 @@
         </p:nvSpPr>
         <p:spPr>
           <a:xfrm>
-            <a:off x="3602736" y="3364992"/>
-            <a:ext cx="1554480" cy="475488"/>
+            <a:off x="4370832" y="3364992"/>
+            <a:ext cx="1645920" cy="475488"/>
           </a:xfrm>
           <a:prstGeom prst="rect">
             <a:avLst>
@@ -16451,8 +16346,8 @@
         </p:nvSpPr>
         <p:spPr>
           <a:xfrm>
-            <a:off x="3602736" y="3364992"/>
-            <a:ext cx="1554480" cy="475488"/>
+            <a:off x="4370832" y="3364992"/>
+            <a:ext cx="1645920" cy="475488"/>
           </a:xfrm>
           <a:prstGeom prst="rect">
             <a:avLst/>
@@ -16490,8 +16385,8 @@
         </p:nvSpPr>
         <p:spPr>
           <a:xfrm>
-            <a:off x="5157216" y="3364992"/>
-            <a:ext cx="73152" cy="475488"/>
+            <a:off x="6016752" y="3364992"/>
+            <a:ext cx="411480" cy="475488"/>
           </a:xfrm>
           <a:prstGeom prst="rect">
             <a:avLst/>
@@ -16529,8 +16424,8 @@
         </p:nvSpPr>
         <p:spPr>
           <a:xfrm>
-            <a:off x="5230368" y="3364992"/>
-            <a:ext cx="1554480" cy="475488"/>
+            <a:off x="6428232" y="3364992"/>
+            <a:ext cx="1645920" cy="475488"/>
           </a:xfrm>
           <a:prstGeom prst="rect">
             <a:avLst>
@@ -16556,8 +16451,8 @@
         </p:nvSpPr>
         <p:spPr>
           <a:xfrm>
-            <a:off x="5230368" y="3364992"/>
-            <a:ext cx="1554480" cy="475488"/>
+            <a:off x="6428232" y="3364992"/>
+            <a:ext cx="1645920" cy="475488"/>
           </a:xfrm>
           <a:prstGeom prst="rect">
             <a:avLst/>
@@ -16581,7 +16476,7 @@
                 <a:ea typeface="Trebuchet MS" pitchFamily="34" charset="-122"/>
                 <a:cs typeface="Trebuchet MS" pitchFamily="34" charset="-120"/>
               </a:rPr>
-              <a:t>ti</a:t>
+              <a:t>tion</a:t>
             </a:r>
             <a:endParaRPr lang="en-US" sz="1400" dirty="0"/>
           </a:p>
@@ -16589,211 +16484,277 @@
       </p:sp>
       <p:sp>
         <p:nvSpPr>
-          <p:cNvPr id="37" name="Text 35"/>
-          <p:cNvSpPr/>
-          <p:nvPr/>
-        </p:nvSpPr>
-        <p:spPr>
-          <a:xfrm>
-            <a:off x="6784848" y="3364992"/>
-            <a:ext cx="73152" cy="475488"/>
-          </a:xfrm>
-          <a:prstGeom prst="rect">
-            <a:avLst/>
-          </a:prstGeom>
-          <a:noFill/>
-          <a:ln/>
-        </p:spPr>
-        <p:txBody>
-          <a:bodyPr wrap="square" lIns="0" tIns="0" rIns="0" bIns="0" rtlCol="0" anchor="ctr"/>
-          <a:lstStyle/>
-          <a:p>
-            <a:pPr algn="ctr" indent="0" marL="0">
-              <a:buNone/>
-            </a:pPr>
-            <a:r>
-              <a:rPr lang="en-US" sz="1600" b="1" dirty="0">
-                <a:solidFill>
-                  <a:srgbClr val="0D9488"/>
+          <p:cNvPr id="37" name="Shape 35"/>
+          <p:cNvSpPr/>
+          <p:nvPr/>
+        </p:nvSpPr>
+        <p:spPr>
+          <a:xfrm>
+            <a:off x="365760" y="4096512"/>
+            <a:ext cx="1371600" cy="804672"/>
+          </a:xfrm>
+          <a:prstGeom prst="rect">
+            <a:avLst>
+              <a:gd name="adj" fmla="val 6818"/>
+            </a:avLst>
+          </a:prstGeom>
+          <a:solidFill>
+            <a:srgbClr val="E2E8F0"/>
+          </a:solidFill>
+          <a:ln w="12700">
+            <a:solidFill>
+              <a:srgbClr val="E2E8F0"/>
+            </a:solidFill>
+            <a:prstDash val="solid"/>
+          </a:ln>
+        </p:spPr>
+      </p:sp>
+      <p:sp>
+        <p:nvSpPr>
+          <p:cNvPr id="38" name="Text 36"/>
+          <p:cNvSpPr/>
+          <p:nvPr/>
+        </p:nvSpPr>
+        <p:spPr>
+          <a:xfrm>
+            <a:off x="365760" y="4096512"/>
+            <a:ext cx="1371600" cy="804672"/>
+          </a:xfrm>
+          <a:prstGeom prst="rect">
+            <a:avLst/>
+          </a:prstGeom>
+          <a:noFill/>
+          <a:ln/>
+        </p:spPr>
+        <p:txBody>
+          <a:bodyPr wrap="square" lIns="0" tIns="0" rIns="0" bIns="0" rtlCol="0" anchor="ctr"/>
+          <a:lstStyle/>
+          <a:p>
+            <a:pPr algn="ctr" indent="0" marL="0">
+              <a:buNone/>
+            </a:pPr>
+            <a:r>
+              <a:rPr lang="en-US" sz="1100" b="1" dirty="0">
+                <a:solidFill>
+                  <a:srgbClr val="475569"/>
                 </a:solidFill>
                 <a:latin typeface="Trebuchet MS" pitchFamily="34" charset="0"/>
                 <a:ea typeface="Trebuchet MS" pitchFamily="34" charset="-122"/>
                 <a:cs typeface="Trebuchet MS" pitchFamily="34" charset="-120"/>
               </a:rPr>
-              <a:t>·</a:t>
-            </a:r>
-            <a:endParaRPr lang="en-US" sz="1600" dirty="0"/>
-          </a:p>
-        </p:txBody>
-      </p:sp>
-      <p:sp>
-        <p:nvSpPr>
-          <p:cNvPr id="38" name="Shape 36"/>
-          <p:cNvSpPr/>
-          <p:nvPr/>
-        </p:nvSpPr>
-        <p:spPr>
-          <a:xfrm>
-            <a:off x="6858000" y="3364992"/>
-            <a:ext cx="1554480" cy="475488"/>
+              <a:t>Phonemes</a:t>
+            </a:r>
+            <a:endParaRPr lang="en-US" sz="1100" dirty="0"/>
+          </a:p>
+        </p:txBody>
+      </p:sp>
+      <p:sp>
+        <p:nvSpPr>
+          <p:cNvPr id="39" name="Shape 37"/>
+          <p:cNvSpPr/>
+          <p:nvPr/>
+        </p:nvSpPr>
+        <p:spPr>
+          <a:xfrm>
+            <a:off x="1874520" y="4096512"/>
+            <a:ext cx="6903720" cy="804672"/>
           </a:xfrm>
           <a:prstGeom prst="rect">
             <a:avLst>
-              <a:gd name="adj" fmla="val 9615"/>
+              <a:gd name="adj" fmla="val 6818"/>
             </a:avLst>
           </a:prstGeom>
           <a:solidFill>
+            <a:srgbClr val="FCE7F3"/>
+          </a:solidFill>
+          <a:ln w="12700">
+            <a:solidFill>
+              <a:srgbClr val="DB2777"/>
+            </a:solidFill>
+            <a:prstDash val="solid"/>
+          </a:ln>
+        </p:spPr>
+      </p:sp>
+      <p:sp>
+        <p:nvSpPr>
+          <p:cNvPr id="40" name="Shape 38"/>
+          <p:cNvSpPr/>
+          <p:nvPr/>
+        </p:nvSpPr>
+        <p:spPr>
+          <a:xfrm>
+            <a:off x="1951330" y="4169664"/>
+            <a:ext cx="676656" cy="384048"/>
+          </a:xfrm>
+          <a:prstGeom prst="rect">
+            <a:avLst>
+              <a:gd name="adj" fmla="val 9524"/>
+            </a:avLst>
+          </a:prstGeom>
+          <a:solidFill>
             <a:srgbClr val="FFFFFF"/>
           </a:solidFill>
           <a:ln w="12700">
             <a:solidFill>
-              <a:srgbClr val="0D9488"/>
-            </a:solidFill>
-            <a:prstDash val="solid"/>
-          </a:ln>
-        </p:spPr>
-      </p:sp>
-      <p:sp>
-        <p:nvSpPr>
-          <p:cNvPr id="39" name="Text 37"/>
-          <p:cNvSpPr/>
-          <p:nvPr/>
-        </p:nvSpPr>
-        <p:spPr>
-          <a:xfrm>
-            <a:off x="6858000" y="3364992"/>
-            <a:ext cx="1554480" cy="475488"/>
-          </a:xfrm>
-          <a:prstGeom prst="rect">
-            <a:avLst/>
-          </a:prstGeom>
-          <a:noFill/>
-          <a:ln/>
-        </p:spPr>
-        <p:txBody>
-          <a:bodyPr wrap="square" lIns="0" tIns="0" rIns="0" bIns="0" rtlCol="0" anchor="ctr"/>
-          <a:lstStyle/>
-          <a:p>
-            <a:pPr algn="ctr" indent="0" marL="0">
-              <a:buNone/>
-            </a:pPr>
-            <a:r>
-              <a:rPr lang="en-US" sz="1400" b="1" dirty="0">
-                <a:solidFill>
-                  <a:srgbClr val="0D9488"/>
+              <a:srgbClr val="DB2777"/>
+            </a:solidFill>
+            <a:prstDash val="solid"/>
+          </a:ln>
+        </p:spPr>
+      </p:sp>
+      <p:sp>
+        <p:nvSpPr>
+          <p:cNvPr id="41" name="Text 39"/>
+          <p:cNvSpPr/>
+          <p:nvPr/>
+        </p:nvSpPr>
+        <p:spPr>
+          <a:xfrm>
+            <a:off x="1951330" y="4169664"/>
+            <a:ext cx="676656" cy="384048"/>
+          </a:xfrm>
+          <a:prstGeom prst="rect">
+            <a:avLst/>
+          </a:prstGeom>
+          <a:noFill/>
+          <a:ln/>
+        </p:spPr>
+        <p:txBody>
+          <a:bodyPr wrap="square" lIns="0" tIns="0" rIns="0" bIns="0" rtlCol="0" anchor="ctr"/>
+          <a:lstStyle/>
+          <a:p>
+            <a:pPr algn="ctr" indent="0" marL="0">
+              <a:buNone/>
+            </a:pPr>
+            <a:r>
+              <a:rPr lang="en-US" sz="900" b="1" dirty="0">
+                <a:solidFill>
+                  <a:srgbClr val="9D174D"/>
                 </a:solidFill>
                 <a:latin typeface="Trebuchet MS" pitchFamily="34" charset="0"/>
                 <a:ea typeface="Trebuchet MS" pitchFamily="34" charset="-122"/>
                 <a:cs typeface="Trebuchet MS" pitchFamily="34" charset="-120"/>
               </a:rPr>
-              <a:t>ble</a:t>
-            </a:r>
-            <a:endParaRPr lang="en-US" sz="1400" dirty="0"/>
-          </a:p>
-        </p:txBody>
-      </p:sp>
-      <p:sp>
-        <p:nvSpPr>
-          <p:cNvPr id="40" name="Shape 38"/>
-          <p:cNvSpPr/>
-          <p:nvPr/>
-        </p:nvSpPr>
-        <p:spPr>
-          <a:xfrm>
-            <a:off x="365760" y="4096512"/>
-            <a:ext cx="1371600" cy="804672"/>
+              <a:t>c</a:t>
+            </a:r>
+            <a:endParaRPr lang="en-US" sz="900" dirty="0"/>
+          </a:p>
+        </p:txBody>
+      </p:sp>
+      <p:sp>
+        <p:nvSpPr>
+          <p:cNvPr id="42" name="Text 40"/>
+          <p:cNvSpPr/>
+          <p:nvPr/>
+        </p:nvSpPr>
+        <p:spPr>
+          <a:xfrm>
+            <a:off x="1951330" y="4572000"/>
+            <a:ext cx="676656" cy="219456"/>
+          </a:xfrm>
+          <a:prstGeom prst="rect">
+            <a:avLst/>
+          </a:prstGeom>
+          <a:noFill/>
+          <a:ln/>
+        </p:spPr>
+        <p:txBody>
+          <a:bodyPr wrap="square" lIns="0" tIns="0" rIns="0" bIns="0" rtlCol="0" anchor="t"/>
+          <a:lstStyle/>
+          <a:p>
+            <a:pPr algn="ctr" indent="0" marL="0">
+              <a:buNone/>
+            </a:pPr>
+            <a:r>
+              <a:rPr lang="en-US" sz="750" i="1" dirty="0">
+                <a:solidFill>
+                  <a:srgbClr val="94A3B8"/>
+                </a:solidFill>
+                <a:latin typeface="Calibri" pitchFamily="34" charset="0"/>
+                <a:ea typeface="Calibri" pitchFamily="34" charset="-122"/>
+                <a:cs typeface="Calibri" pitchFamily="34" charset="-120"/>
+              </a:rPr>
+              <a:t>/k/</a:t>
+            </a:r>
+            <a:endParaRPr lang="en-US" sz="750" dirty="0"/>
+          </a:p>
+        </p:txBody>
+      </p:sp>
+      <p:sp>
+        <p:nvSpPr>
+          <p:cNvPr id="43" name="Shape 41"/>
+          <p:cNvSpPr/>
+          <p:nvPr/>
+        </p:nvSpPr>
+        <p:spPr>
+          <a:xfrm>
+            <a:off x="2677363" y="4169664"/>
+            <a:ext cx="676656" cy="384048"/>
           </a:xfrm>
           <a:prstGeom prst="rect">
             <a:avLst>
-              <a:gd name="adj" fmla="val 6818"/>
+              <a:gd name="adj" fmla="val 9524"/>
             </a:avLst>
           </a:prstGeom>
           <a:solidFill>
-            <a:srgbClr val="E2E8F0"/>
-          </a:solidFill>
-          <a:ln w="12700">
-            <a:solidFill>
-              <a:srgbClr val="E2E8F0"/>
-            </a:solidFill>
-            <a:prstDash val="solid"/>
-          </a:ln>
-        </p:spPr>
-      </p:sp>
-      <p:sp>
-        <p:nvSpPr>
-          <p:cNvPr id="41" name="Text 39"/>
-          <p:cNvSpPr/>
-          <p:nvPr/>
-        </p:nvSpPr>
-        <p:spPr>
-          <a:xfrm>
-            <a:off x="365760" y="4096512"/>
-            <a:ext cx="1371600" cy="804672"/>
-          </a:xfrm>
-          <a:prstGeom prst="rect">
-            <a:avLst/>
-          </a:prstGeom>
-          <a:noFill/>
-          <a:ln/>
-        </p:spPr>
-        <p:txBody>
-          <a:bodyPr wrap="square" lIns="0" tIns="0" rIns="0" bIns="0" rtlCol="0" anchor="ctr"/>
-          <a:lstStyle/>
-          <a:p>
-            <a:pPr algn="ctr" indent="0" marL="0">
-              <a:buNone/>
-            </a:pPr>
-            <a:r>
-              <a:rPr lang="en-US" sz="1100" b="1" dirty="0">
-                <a:solidFill>
-                  <a:srgbClr val="475569"/>
+            <a:srgbClr val="FFFFFF"/>
+          </a:solidFill>
+          <a:ln w="12700">
+            <a:solidFill>
+              <a:srgbClr val="DB2777"/>
+            </a:solidFill>
+            <a:prstDash val="solid"/>
+          </a:ln>
+        </p:spPr>
+      </p:sp>
+      <p:sp>
+        <p:nvSpPr>
+          <p:cNvPr id="44" name="Text 42"/>
+          <p:cNvSpPr/>
+          <p:nvPr/>
+        </p:nvSpPr>
+        <p:spPr>
+          <a:xfrm>
+            <a:off x="2677363" y="4169664"/>
+            <a:ext cx="676656" cy="384048"/>
+          </a:xfrm>
+          <a:prstGeom prst="rect">
+            <a:avLst/>
+          </a:prstGeom>
+          <a:noFill/>
+          <a:ln/>
+        </p:spPr>
+        <p:txBody>
+          <a:bodyPr wrap="square" lIns="0" tIns="0" rIns="0" bIns="0" rtlCol="0" anchor="ctr"/>
+          <a:lstStyle/>
+          <a:p>
+            <a:pPr algn="ctr" indent="0" marL="0">
+              <a:buNone/>
+            </a:pPr>
+            <a:r>
+              <a:rPr lang="en-US" sz="900" b="1" dirty="0">
+                <a:solidFill>
+                  <a:srgbClr val="9D174D"/>
                 </a:solidFill>
                 <a:latin typeface="Trebuchet MS" pitchFamily="34" charset="0"/>
                 <a:ea typeface="Trebuchet MS" pitchFamily="34" charset="-122"/>
                 <a:cs typeface="Trebuchet MS" pitchFamily="34" charset="-120"/>
               </a:rPr>
-              <a:t>Phonemes</a:t>
-            </a:r>
-            <a:endParaRPr lang="en-US" sz="1100" dirty="0"/>
-          </a:p>
-        </p:txBody>
-      </p:sp>
-      <p:sp>
-        <p:nvSpPr>
-          <p:cNvPr id="42" name="Shape 40"/>
-          <p:cNvSpPr/>
-          <p:nvPr/>
-        </p:nvSpPr>
-        <p:spPr>
-          <a:xfrm>
-            <a:off x="1874520" y="4096512"/>
-            <a:ext cx="6903720" cy="804672"/>
-          </a:xfrm>
-          <a:prstGeom prst="rect">
-            <a:avLst>
-              <a:gd name="adj" fmla="val 6818"/>
-            </a:avLst>
-          </a:prstGeom>
-          <a:solidFill>
-            <a:srgbClr val="FCE7F3"/>
-          </a:solidFill>
-          <a:ln w="12700">
-            <a:solidFill>
-              <a:srgbClr val="DB2777"/>
-            </a:solidFill>
-            <a:prstDash val="solid"/>
-          </a:ln>
-        </p:spPr>
-      </p:sp>
-      <p:sp>
-        <p:nvSpPr>
-          <p:cNvPr id="43" name="Shape 41"/>
-          <p:cNvSpPr/>
-          <p:nvPr/>
-        </p:nvSpPr>
-        <p:spPr>
-          <a:xfrm>
-            <a:off x="1951330" y="4169664"/>
+              <a:t>o</a:t>
+            </a:r>
+            <a:endParaRPr lang="en-US" sz="900" dirty="0"/>
+          </a:p>
+        </p:txBody>
+      </p:sp>
+      <p:sp>
+        <p:nvSpPr>
+          <p:cNvPr id="45" name="Shape 43"/>
+          <p:cNvSpPr/>
+          <p:nvPr/>
+        </p:nvSpPr>
+        <p:spPr>
+          <a:xfrm>
+            <a:off x="3403397" y="4169664"/>
             <a:ext cx="676656" cy="384048"/>
           </a:xfrm>
           <a:prstGeom prst="rect">
@@ -16814,13 +16775,13 @@
       </p:sp>
       <p:sp>
         <p:nvSpPr>
-          <p:cNvPr id="44" name="Text 42"/>
-          <p:cNvSpPr/>
-          <p:nvPr/>
-        </p:nvSpPr>
-        <p:spPr>
-          <a:xfrm>
-            <a:off x="1951330" y="4169664"/>
+          <p:cNvPr id="46" name="Text 44"/>
+          <p:cNvSpPr/>
+          <p:nvPr/>
+        </p:nvSpPr>
+        <p:spPr>
+          <a:xfrm>
+            <a:off x="3403397" y="4169664"/>
             <a:ext cx="676656" cy="384048"/>
           </a:xfrm>
           <a:prstGeom prst="rect">
@@ -16845,6 +16806,138 @@
                 <a:ea typeface="Trebuchet MS" pitchFamily="34" charset="-122"/>
                 <a:cs typeface="Trebuchet MS" pitchFamily="34" charset="-120"/>
               </a:rPr>
+              <a:t>ll</a:t>
+            </a:r>
+            <a:endParaRPr lang="en-US" sz="900" dirty="0"/>
+          </a:p>
+        </p:txBody>
+      </p:sp>
+      <p:sp>
+        <p:nvSpPr>
+          <p:cNvPr id="47" name="Shape 45"/>
+          <p:cNvSpPr/>
+          <p:nvPr/>
+        </p:nvSpPr>
+        <p:spPr>
+          <a:xfrm>
+            <a:off x="4129430" y="4169664"/>
+            <a:ext cx="676656" cy="384048"/>
+          </a:xfrm>
+          <a:prstGeom prst="rect">
+            <a:avLst>
+              <a:gd name="adj" fmla="val 9524"/>
+            </a:avLst>
+          </a:prstGeom>
+          <a:solidFill>
+            <a:srgbClr val="FFFFFF"/>
+          </a:solidFill>
+          <a:ln w="12700">
+            <a:solidFill>
+              <a:srgbClr val="DB2777"/>
+            </a:solidFill>
+            <a:prstDash val="solid"/>
+          </a:ln>
+        </p:spPr>
+      </p:sp>
+      <p:sp>
+        <p:nvSpPr>
+          <p:cNvPr id="48" name="Text 46"/>
+          <p:cNvSpPr/>
+          <p:nvPr/>
+        </p:nvSpPr>
+        <p:spPr>
+          <a:xfrm>
+            <a:off x="4129430" y="4169664"/>
+            <a:ext cx="676656" cy="384048"/>
+          </a:xfrm>
+          <a:prstGeom prst="rect">
+            <a:avLst/>
+          </a:prstGeom>
+          <a:noFill/>
+          <a:ln/>
+        </p:spPr>
+        <p:txBody>
+          <a:bodyPr wrap="square" lIns="0" tIns="0" rIns="0" bIns="0" rtlCol="0" anchor="ctr"/>
+          <a:lstStyle/>
+          <a:p>
+            <a:pPr algn="ctr" indent="0" marL="0">
+              <a:buNone/>
+            </a:pPr>
+            <a:r>
+              <a:rPr lang="en-US" sz="900" b="1" dirty="0">
+                <a:solidFill>
+                  <a:srgbClr val="9D174D"/>
+                </a:solidFill>
+                <a:latin typeface="Trebuchet MS" pitchFamily="34" charset="0"/>
+                <a:ea typeface="Trebuchet MS" pitchFamily="34" charset="-122"/>
+                <a:cs typeface="Trebuchet MS" pitchFamily="34" charset="-120"/>
+              </a:rPr>
+              <a:t>e</a:t>
+            </a:r>
+            <a:endParaRPr lang="en-US" sz="900" dirty="0"/>
+          </a:p>
+        </p:txBody>
+      </p:sp>
+      <p:sp>
+        <p:nvSpPr>
+          <p:cNvPr id="49" name="Shape 47"/>
+          <p:cNvSpPr/>
+          <p:nvPr/>
+        </p:nvSpPr>
+        <p:spPr>
+          <a:xfrm>
+            <a:off x="4855464" y="4169664"/>
+            <a:ext cx="676656" cy="384048"/>
+          </a:xfrm>
+          <a:prstGeom prst="rect">
+            <a:avLst>
+              <a:gd name="adj" fmla="val 9524"/>
+            </a:avLst>
+          </a:prstGeom>
+          <a:solidFill>
+            <a:srgbClr val="FFFFFF"/>
+          </a:solidFill>
+          <a:ln w="12700">
+            <a:solidFill>
+              <a:srgbClr val="DB2777"/>
+            </a:solidFill>
+            <a:prstDash val="solid"/>
+          </a:ln>
+        </p:spPr>
+      </p:sp>
+      <p:sp>
+        <p:nvSpPr>
+          <p:cNvPr id="50" name="Text 48"/>
+          <p:cNvSpPr/>
+          <p:nvPr/>
+        </p:nvSpPr>
+        <p:spPr>
+          <a:xfrm>
+            <a:off x="4855464" y="4169664"/>
+            <a:ext cx="676656" cy="384048"/>
+          </a:xfrm>
+          <a:prstGeom prst="rect">
+            <a:avLst/>
+          </a:prstGeom>
+          <a:noFill/>
+          <a:ln/>
+        </p:spPr>
+        <p:txBody>
+          <a:bodyPr wrap="square" lIns="0" tIns="0" rIns="0" bIns="0" rtlCol="0" anchor="ctr"/>
+          <a:lstStyle/>
+          <a:p>
+            <a:pPr algn="ctr" indent="0" marL="0">
+              <a:buNone/>
+            </a:pPr>
+            <a:r>
+              <a:rPr lang="en-US" sz="900" b="1" dirty="0">
+                <a:solidFill>
+                  <a:srgbClr val="9D174D"/>
+                </a:solidFill>
+                <a:latin typeface="Trebuchet MS" pitchFamily="34" charset="0"/>
+                <a:ea typeface="Trebuchet MS" pitchFamily="34" charset="-122"/>
+                <a:cs typeface="Trebuchet MS" pitchFamily="34" charset="-120"/>
+              </a:rPr>
               <a:t>c</a:t>
             </a:r>
             <a:endParaRPr lang="en-US" sz="900" dirty="0"/>
@@ -16853,13 +16946,13 @@
       </p:sp>
       <p:sp>
         <p:nvSpPr>
-          <p:cNvPr id="45" name="Text 43"/>
-          <p:cNvSpPr/>
-          <p:nvPr/>
-        </p:nvSpPr>
-        <p:spPr>
-          <a:xfrm>
-            <a:off x="1951330" y="4572000"/>
+          <p:cNvPr id="51" name="Text 49"/>
+          <p:cNvSpPr/>
+          <p:nvPr/>
+        </p:nvSpPr>
+        <p:spPr>
+          <a:xfrm>
+            <a:off x="4855464" y="4572000"/>
             <a:ext cx="676656" cy="219456"/>
           </a:xfrm>
           <a:prstGeom prst="rect">
@@ -16892,13 +16985,13 @@
       </p:sp>
       <p:sp>
         <p:nvSpPr>
-          <p:cNvPr id="46" name="Shape 44"/>
-          <p:cNvSpPr/>
-          <p:nvPr/>
-        </p:nvSpPr>
-        <p:spPr>
-          <a:xfrm>
-            <a:off x="2677363" y="4169664"/>
+          <p:cNvPr id="52" name="Shape 50"/>
+          <p:cNvSpPr/>
+          <p:nvPr/>
+        </p:nvSpPr>
+        <p:spPr>
+          <a:xfrm>
+            <a:off x="5581498" y="4169664"/>
             <a:ext cx="676656" cy="384048"/>
           </a:xfrm>
           <a:prstGeom prst="rect">
@@ -16919,13 +17012,13 @@
       </p:sp>
       <p:sp>
         <p:nvSpPr>
-          <p:cNvPr id="47" name="Text 45"/>
-          <p:cNvSpPr/>
-          <p:nvPr/>
-        </p:nvSpPr>
-        <p:spPr>
-          <a:xfrm>
-            <a:off x="2677363" y="4169664"/>
+          <p:cNvPr id="53" name="Text 51"/>
+          <p:cNvSpPr/>
+          <p:nvPr/>
+        </p:nvSpPr>
+        <p:spPr>
+          <a:xfrm>
+            <a:off x="5581498" y="4169664"/>
             <a:ext cx="676656" cy="384048"/>
           </a:xfrm>
           <a:prstGeom prst="rect">
@@ -16950,7 +17043,7 @@
                 <a:ea typeface="Trebuchet MS" pitchFamily="34" charset="-122"/>
                 <a:cs typeface="Trebuchet MS" pitchFamily="34" charset="-120"/>
               </a:rPr>
-              <a:t>o</a:t>
+              <a:t>t</a:t>
             </a:r>
             <a:endParaRPr lang="en-US" sz="900" dirty="0"/>
           </a:p>
@@ -16958,13 +17051,13 @@
       </p:sp>
       <p:sp>
         <p:nvSpPr>
-          <p:cNvPr id="48" name="Shape 46"/>
-          <p:cNvSpPr/>
-          <p:nvPr/>
-        </p:nvSpPr>
-        <p:spPr>
-          <a:xfrm>
-            <a:off x="3403397" y="4169664"/>
+          <p:cNvPr id="54" name="Shape 52"/>
+          <p:cNvSpPr/>
+          <p:nvPr/>
+        </p:nvSpPr>
+        <p:spPr>
+          <a:xfrm>
+            <a:off x="6307531" y="4169664"/>
             <a:ext cx="676656" cy="384048"/>
           </a:xfrm>
           <a:prstGeom prst="rect">
@@ -16985,13 +17078,13 @@
       </p:sp>
       <p:sp>
         <p:nvSpPr>
-          <p:cNvPr id="49" name="Text 47"/>
-          <p:cNvSpPr/>
-          <p:nvPr/>
-        </p:nvSpPr>
-        <p:spPr>
-          <a:xfrm>
-            <a:off x="3403397" y="4169664"/>
+          <p:cNvPr id="55" name="Text 53"/>
+          <p:cNvSpPr/>
+          <p:nvPr/>
+        </p:nvSpPr>
+        <p:spPr>
+          <a:xfrm>
+            <a:off x="6307531" y="4169664"/>
             <a:ext cx="676656" cy="384048"/>
           </a:xfrm>
           <a:prstGeom prst="rect">
@@ -17016,7 +17109,7 @@
                 <a:ea typeface="Trebuchet MS" pitchFamily="34" charset="-122"/>
                 <a:cs typeface="Trebuchet MS" pitchFamily="34" charset="-120"/>
               </a:rPr>
-              <a:t>ll</a:t>
+              <a:t>i</a:t>
             </a:r>
             <a:endParaRPr lang="en-US" sz="900" dirty="0"/>
           </a:p>
@@ -17024,13 +17117,52 @@
       </p:sp>
       <p:sp>
         <p:nvSpPr>
-          <p:cNvPr id="50" name="Shape 48"/>
-          <p:cNvSpPr/>
-          <p:nvPr/>
-        </p:nvSpPr>
-        <p:spPr>
-          <a:xfrm>
-            <a:off x="4129430" y="4169664"/>
+          <p:cNvPr id="56" name="Text 54"/>
+          <p:cNvSpPr/>
+          <p:nvPr/>
+        </p:nvSpPr>
+        <p:spPr>
+          <a:xfrm>
+            <a:off x="6307531" y="4572000"/>
+            <a:ext cx="676656" cy="219456"/>
+          </a:xfrm>
+          <a:prstGeom prst="rect">
+            <a:avLst/>
+          </a:prstGeom>
+          <a:noFill/>
+          <a:ln/>
+        </p:spPr>
+        <p:txBody>
+          <a:bodyPr wrap="square" lIns="0" tIns="0" rIns="0" bIns="0" rtlCol="0" anchor="t"/>
+          <a:lstStyle/>
+          <a:p>
+            <a:pPr algn="ctr" indent="0" marL="0">
+              <a:buNone/>
+            </a:pPr>
+            <a:r>
+              <a:rPr lang="en-US" sz="750" i="1" dirty="0">
+                <a:solidFill>
+                  <a:srgbClr val="94A3B8"/>
+                </a:solidFill>
+                <a:latin typeface="Calibri" pitchFamily="34" charset="0"/>
+                <a:ea typeface="Calibri" pitchFamily="34" charset="-122"/>
+                <a:cs typeface="Calibri" pitchFamily="34" charset="-120"/>
+              </a:rPr>
+              <a:t>/sh/</a:t>
+            </a:r>
+            <a:endParaRPr lang="en-US" sz="750" dirty="0"/>
+          </a:p>
+        </p:txBody>
+      </p:sp>
+      <p:sp>
+        <p:nvSpPr>
+          <p:cNvPr id="57" name="Shape 55"/>
+          <p:cNvSpPr/>
+          <p:nvPr/>
+        </p:nvSpPr>
+        <p:spPr>
+          <a:xfrm>
+            <a:off x="7033565" y="4169664"/>
             <a:ext cx="676656" cy="384048"/>
           </a:xfrm>
           <a:prstGeom prst="rect">
@@ -17051,13 +17183,13 @@
       </p:sp>
       <p:sp>
         <p:nvSpPr>
-          <p:cNvPr id="51" name="Text 49"/>
-          <p:cNvSpPr/>
-          <p:nvPr/>
-        </p:nvSpPr>
-        <p:spPr>
-          <a:xfrm>
-            <a:off x="4129430" y="4169664"/>
+          <p:cNvPr id="58" name="Text 56"/>
+          <p:cNvSpPr/>
+          <p:nvPr/>
+        </p:nvSpPr>
+        <p:spPr>
+          <a:xfrm>
+            <a:off x="7033565" y="4169664"/>
             <a:ext cx="676656" cy="384048"/>
           </a:xfrm>
           <a:prstGeom prst="rect">
@@ -17082,7 +17214,7 @@
                 <a:ea typeface="Trebuchet MS" pitchFamily="34" charset="-122"/>
                 <a:cs typeface="Trebuchet MS" pitchFamily="34" charset="-120"/>
               </a:rPr>
-              <a:t>e</a:t>
+              <a:t>o</a:t>
             </a:r>
             <a:endParaRPr lang="en-US" sz="900" dirty="0"/>
           </a:p>
@@ -17090,13 +17222,13 @@
       </p:sp>
       <p:sp>
         <p:nvSpPr>
-          <p:cNvPr id="52" name="Shape 50"/>
-          <p:cNvSpPr/>
-          <p:nvPr/>
-        </p:nvSpPr>
-        <p:spPr>
-          <a:xfrm>
-            <a:off x="4855464" y="4169664"/>
+          <p:cNvPr id="59" name="Shape 57"/>
+          <p:cNvSpPr/>
+          <p:nvPr/>
+        </p:nvSpPr>
+        <p:spPr>
+          <a:xfrm>
+            <a:off x="7759598" y="4169664"/>
             <a:ext cx="676656" cy="384048"/>
           </a:xfrm>
           <a:prstGeom prst="rect">
@@ -17117,13 +17249,13 @@
       </p:sp>
       <p:sp>
         <p:nvSpPr>
-          <p:cNvPr id="53" name="Text 51"/>
-          <p:cNvSpPr/>
-          <p:nvPr/>
-        </p:nvSpPr>
-        <p:spPr>
-          <a:xfrm>
-            <a:off x="4855464" y="4169664"/>
+          <p:cNvPr id="60" name="Text 58"/>
+          <p:cNvSpPr/>
+          <p:nvPr/>
+        </p:nvSpPr>
+        <p:spPr>
+          <a:xfrm>
+            <a:off x="7759598" y="4169664"/>
             <a:ext cx="676656" cy="384048"/>
           </a:xfrm>
           <a:prstGeom prst="rect">
@@ -17148,310 +17280,7 @@
                 <a:ea typeface="Trebuchet MS" pitchFamily="34" charset="-122"/>
                 <a:cs typeface="Trebuchet MS" pitchFamily="34" charset="-120"/>
               </a:rPr>
-              <a:t>c</a:t>
-            </a:r>
-            <a:endParaRPr lang="en-US" sz="900" dirty="0"/>
-          </a:p>
-        </p:txBody>
-      </p:sp>
-      <p:sp>
-        <p:nvSpPr>
-          <p:cNvPr id="54" name="Text 52"/>
-          <p:cNvSpPr/>
-          <p:nvPr/>
-        </p:nvSpPr>
-        <p:spPr>
-          <a:xfrm>
-            <a:off x="4855464" y="4572000"/>
-            <a:ext cx="676656" cy="219456"/>
-          </a:xfrm>
-          <a:prstGeom prst="rect">
-            <a:avLst/>
-          </a:prstGeom>
-          <a:noFill/>
-          <a:ln/>
-        </p:spPr>
-        <p:txBody>
-          <a:bodyPr wrap="square" lIns="0" tIns="0" rIns="0" bIns="0" rtlCol="0" anchor="t"/>
-          <a:lstStyle/>
-          <a:p>
-            <a:pPr algn="ctr" indent="0" marL="0">
-              <a:buNone/>
-            </a:pPr>
-            <a:r>
-              <a:rPr lang="en-US" sz="750" i="1" dirty="0">
-                <a:solidFill>
-                  <a:srgbClr val="94A3B8"/>
-                </a:solidFill>
-                <a:latin typeface="Calibri" pitchFamily="34" charset="0"/>
-                <a:ea typeface="Calibri" pitchFamily="34" charset="-122"/>
-                <a:cs typeface="Calibri" pitchFamily="34" charset="-120"/>
-              </a:rPr>
-              <a:t>/k/</a:t>
-            </a:r>
-            <a:endParaRPr lang="en-US" sz="750" dirty="0"/>
-          </a:p>
-        </p:txBody>
-      </p:sp>
-      <p:sp>
-        <p:nvSpPr>
-          <p:cNvPr id="55" name="Shape 53"/>
-          <p:cNvSpPr/>
-          <p:nvPr/>
-        </p:nvSpPr>
-        <p:spPr>
-          <a:xfrm>
-            <a:off x="5581498" y="4169664"/>
-            <a:ext cx="676656" cy="384048"/>
-          </a:xfrm>
-          <a:prstGeom prst="rect">
-            <a:avLst>
-              <a:gd name="adj" fmla="val 9524"/>
-            </a:avLst>
-          </a:prstGeom>
-          <a:solidFill>
-            <a:srgbClr val="FFFFFF"/>
-          </a:solidFill>
-          <a:ln w="12700">
-            <a:solidFill>
-              <a:srgbClr val="DB2777"/>
-            </a:solidFill>
-            <a:prstDash val="solid"/>
-          </a:ln>
-        </p:spPr>
-      </p:sp>
-      <p:sp>
-        <p:nvSpPr>
-          <p:cNvPr id="56" name="Text 54"/>
-          <p:cNvSpPr/>
-          <p:nvPr/>
-        </p:nvSpPr>
-        <p:spPr>
-          <a:xfrm>
-            <a:off x="5581498" y="4169664"/>
-            <a:ext cx="676656" cy="384048"/>
-          </a:xfrm>
-          <a:prstGeom prst="rect">
-            <a:avLst/>
-          </a:prstGeom>
-          <a:noFill/>
-          <a:ln/>
-        </p:spPr>
-        <p:txBody>
-          <a:bodyPr wrap="square" lIns="0" tIns="0" rIns="0" bIns="0" rtlCol="0" anchor="ctr"/>
-          <a:lstStyle/>
-          <a:p>
-            <a:pPr algn="ctr" indent="0" marL="0">
-              <a:buNone/>
-            </a:pPr>
-            <a:r>
-              <a:rPr lang="en-US" sz="900" b="1" dirty="0">
-                <a:solidFill>
-                  <a:srgbClr val="9D174D"/>
-                </a:solidFill>
-                <a:latin typeface="Trebuchet MS" pitchFamily="34" charset="0"/>
-                <a:ea typeface="Trebuchet MS" pitchFamily="34" charset="-122"/>
-                <a:cs typeface="Trebuchet MS" pitchFamily="34" charset="-120"/>
-              </a:rPr>
-              <a:t>t</a:t>
-            </a:r>
-            <a:endParaRPr lang="en-US" sz="900" dirty="0"/>
-          </a:p>
-        </p:txBody>
-      </p:sp>
-      <p:sp>
-        <p:nvSpPr>
-          <p:cNvPr id="57" name="Shape 55"/>
-          <p:cNvSpPr/>
-          <p:nvPr/>
-        </p:nvSpPr>
-        <p:spPr>
-          <a:xfrm>
-            <a:off x="6307531" y="4169664"/>
-            <a:ext cx="676656" cy="384048"/>
-          </a:xfrm>
-          <a:prstGeom prst="rect">
-            <a:avLst>
-              <a:gd name="adj" fmla="val 9524"/>
-            </a:avLst>
-          </a:prstGeom>
-          <a:solidFill>
-            <a:srgbClr val="FFFFFF"/>
-          </a:solidFill>
-          <a:ln w="12700">
-            <a:solidFill>
-              <a:srgbClr val="DB2777"/>
-            </a:solidFill>
-            <a:prstDash val="solid"/>
-          </a:ln>
-        </p:spPr>
-      </p:sp>
-      <p:sp>
-        <p:nvSpPr>
-          <p:cNvPr id="58" name="Text 56"/>
-          <p:cNvSpPr/>
-          <p:nvPr/>
-        </p:nvSpPr>
-        <p:spPr>
-          <a:xfrm>
-            <a:off x="6307531" y="4169664"/>
-            <a:ext cx="676656" cy="384048"/>
-          </a:xfrm>
-          <a:prstGeom prst="rect">
-            <a:avLst/>
-          </a:prstGeom>
-          <a:noFill/>
-          <a:ln/>
-        </p:spPr>
-        <p:txBody>
-          <a:bodyPr wrap="square" lIns="0" tIns="0" rIns="0" bIns="0" rtlCol="0" anchor="ctr"/>
-          <a:lstStyle/>
-          <a:p>
-            <a:pPr algn="ctr" indent="0" marL="0">
-              <a:buNone/>
-            </a:pPr>
-            <a:r>
-              <a:rPr lang="en-US" sz="900" b="1" dirty="0">
-                <a:solidFill>
-                  <a:srgbClr val="9D174D"/>
-                </a:solidFill>
-                <a:latin typeface="Trebuchet MS" pitchFamily="34" charset="0"/>
-                <a:ea typeface="Trebuchet MS" pitchFamily="34" charset="-122"/>
-                <a:cs typeface="Trebuchet MS" pitchFamily="34" charset="-120"/>
-              </a:rPr>
-              <a:t>i</a:t>
-            </a:r>
-            <a:endParaRPr lang="en-US" sz="900" dirty="0"/>
-          </a:p>
-        </p:txBody>
-      </p:sp>
-      <p:sp>
-        <p:nvSpPr>
-          <p:cNvPr id="59" name="Shape 57"/>
-          <p:cNvSpPr/>
-          <p:nvPr/>
-        </p:nvSpPr>
-        <p:spPr>
-          <a:xfrm>
-            <a:off x="7033565" y="4169664"/>
-            <a:ext cx="676656" cy="384048"/>
-          </a:xfrm>
-          <a:prstGeom prst="rect">
-            <a:avLst>
-              <a:gd name="adj" fmla="val 9524"/>
-            </a:avLst>
-          </a:prstGeom>
-          <a:solidFill>
-            <a:srgbClr val="FFFFFF"/>
-          </a:solidFill>
-          <a:ln w="12700">
-            <a:solidFill>
-              <a:srgbClr val="DB2777"/>
-            </a:solidFill>
-            <a:prstDash val="solid"/>
-          </a:ln>
-        </p:spPr>
-      </p:sp>
-      <p:sp>
-        <p:nvSpPr>
-          <p:cNvPr id="60" name="Text 58"/>
-          <p:cNvSpPr/>
-          <p:nvPr/>
-        </p:nvSpPr>
-        <p:spPr>
-          <a:xfrm>
-            <a:off x="7033565" y="4169664"/>
-            <a:ext cx="676656" cy="384048"/>
-          </a:xfrm>
-          <a:prstGeom prst="rect">
-            <a:avLst/>
-          </a:prstGeom>
-          <a:noFill/>
-          <a:ln/>
-        </p:spPr>
-        <p:txBody>
-          <a:bodyPr wrap="square" lIns="0" tIns="0" rIns="0" bIns="0" rtlCol="0" anchor="ctr"/>
-          <a:lstStyle/>
-          <a:p>
-            <a:pPr algn="ctr" indent="0" marL="0">
-              <a:buNone/>
-            </a:pPr>
-            <a:r>
-              <a:rPr lang="en-US" sz="900" b="1" dirty="0">
-                <a:solidFill>
-                  <a:srgbClr val="9D174D"/>
-                </a:solidFill>
-                <a:latin typeface="Trebuchet MS" pitchFamily="34" charset="0"/>
-                <a:ea typeface="Trebuchet MS" pitchFamily="34" charset="-122"/>
-                <a:cs typeface="Trebuchet MS" pitchFamily="34" charset="-120"/>
-              </a:rPr>
-              <a:t>b</a:t>
-            </a:r>
-            <a:endParaRPr lang="en-US" sz="900" dirty="0"/>
-          </a:p>
-        </p:txBody>
-      </p:sp>
-      <p:sp>
-        <p:nvSpPr>
-          <p:cNvPr id="61" name="Shape 59"/>
-          <p:cNvSpPr/>
-          <p:nvPr/>
-        </p:nvSpPr>
-        <p:spPr>
-          <a:xfrm>
-            <a:off x="7759598" y="4169664"/>
-            <a:ext cx="676656" cy="384048"/>
-          </a:xfrm>
-          <a:prstGeom prst="rect">
-            <a:avLst>
-              <a:gd name="adj" fmla="val 9524"/>
-            </a:avLst>
-          </a:prstGeom>
-          <a:solidFill>
-            <a:srgbClr val="FFFFFF"/>
-          </a:solidFill>
-          <a:ln w="12700">
-            <a:solidFill>
-              <a:srgbClr val="DB2777"/>
-            </a:solidFill>
-            <a:prstDash val="solid"/>
-          </a:ln>
-        </p:spPr>
-      </p:sp>
-      <p:sp>
-        <p:nvSpPr>
-          <p:cNvPr id="62" name="Text 60"/>
-          <p:cNvSpPr/>
-          <p:nvPr/>
-        </p:nvSpPr>
-        <p:spPr>
-          <a:xfrm>
-            <a:off x="7759598" y="4169664"/>
-            <a:ext cx="676656" cy="384048"/>
-          </a:xfrm>
-          <a:prstGeom prst="rect">
-            <a:avLst/>
-          </a:prstGeom>
-          <a:noFill/>
-          <a:ln/>
-        </p:spPr>
-        <p:txBody>
-          <a:bodyPr wrap="square" lIns="0" tIns="0" rIns="0" bIns="0" rtlCol="0" anchor="ctr"/>
-          <a:lstStyle/>
-          <a:p>
-            <a:pPr algn="ctr" indent="0" marL="0">
-              <a:buNone/>
-            </a:pPr>
-            <a:r>
-              <a:rPr lang="en-US" sz="900" b="1" dirty="0">
-                <a:solidFill>
-                  <a:srgbClr val="9D174D"/>
-                </a:solidFill>
-                <a:latin typeface="Trebuchet MS" pitchFamily="34" charset="0"/>
-                <a:ea typeface="Trebuchet MS" pitchFamily="34" charset="-122"/>
-                <a:cs typeface="Trebuchet MS" pitchFamily="34" charset="-120"/>
-              </a:rPr>
-              <a:t>le</a:t>
+              <a:t>n</a:t>
             </a:r>
             <a:endParaRPr lang="en-US" sz="900" dirty="0"/>
           </a:p>
@@ -18025,7 +17854,7 @@
                 <a:ea typeface="Calibri" pitchFamily="34" charset="-122"/>
                 <a:cs typeface="Calibri" pitchFamily="34" charset="-120"/>
               </a:rPr>
-              <a:t>Word Labs  •  wordlabs.app  •  Root: 'collect' = gather or bring together</a:t>
+              <a:t>Word Labs  •  wordlabs.app  •  Root: 'collect' = gather together, bring together</a:t>
             </a:r>
             <a:endParaRPr lang="en-US" sz="800" dirty="0"/>
           </a:p>
@@ -18359,7 +18188,7 @@
                 <a:ea typeface="Trebuchet MS" pitchFamily="34" charset="-122"/>
                 <a:cs typeface="Trebuchet MS" pitchFamily="34" charset="-120"/>
               </a:rPr>
-              <a:t>2</a:t>
+              <a:t>1</a:t>
             </a:r>
             <a:pPr algn="ctr" indent="0" marL="0">
               <a:buNone/>
@@ -18373,7 +18202,7 @@
                 <a:ea typeface="Trebuchet MS" pitchFamily="34" charset="-122"/>
                 <a:cs typeface="Trebuchet MS" pitchFamily="34" charset="-120"/>
               </a:rPr>
-              <a:t>  punctuation marks</a:t>
+              <a:t>  punctuation mark</a:t>
             </a:r>
             <a:endParaRPr lang="en-US" sz="2800" dirty="0"/>
           </a:p>
@@ -18665,7 +18494,7 @@
                 <a:ea typeface="Calibri" pitchFamily="34" charset="-122"/>
                 <a:cs typeface="Calibri" pitchFamily="34" charset="-120"/>
               </a:rPr>
-              <a:t>Word Labs  •  wordlabs.app  •  Root: 'collect' = gather or bring together</a:t>
+              <a:t>Word Labs  •  wordlabs.app  •  Root: 'collect' = gather together, bring together</a:t>
             </a:r>
             <a:endParaRPr lang="en-US" sz="800" dirty="0"/>
           </a:p>
@@ -18777,7 +18606,7 @@
                 <a:ea typeface="Calibri" pitchFamily="34" charset="-122"/>
                 <a:cs typeface="Calibri" pitchFamily="34" charset="-120"/>
               </a:rPr>
-              <a:t>Her </a:t>
+              <a:t>She had a </a:t>
             </a:r>
             <a:pPr algn="l" indent="0" marL="0">
               <a:buNone/>
@@ -18808,7 +18637,7 @@
                 <a:ea typeface="Calibri" pitchFamily="34" charset="-122"/>
                 <a:cs typeface="Calibri" pitchFamily="34" charset="-120"/>
               </a:rPr>
-              <a:t> of the event was clear; the </a:t>
+              <a:t> of </a:t>
             </a:r>
             <a:pPr algn="l" indent="0" marL="0">
               <a:buNone/>
@@ -18825,7 +18654,7 @@
                 <a:ea typeface="Calibri" pitchFamily="34" charset="-122"/>
                 <a:cs typeface="Calibri" pitchFamily="34" charset="-120"/>
               </a:rPr>
-              <a:t>collective</a:t>
+              <a:t>collectively</a:t>
             </a:r>
             <a:pPr algn="l" indent="0" marL="0">
               <a:buNone/>
@@ -18839,7 +18668,7 @@
                 <a:ea typeface="Calibri" pitchFamily="34" charset="-122"/>
                 <a:cs typeface="Calibri" pitchFamily="34" charset="-120"/>
               </a:rPr>
-              <a:t> effort made the rubbish </a:t>
+              <a:t> gathering shells, but she couldn't </a:t>
             </a:r>
             <a:pPr algn="l" indent="0" marL="0">
               <a:buNone/>
@@ -18856,7 +18685,7 @@
                 <a:ea typeface="Calibri" pitchFamily="34" charset="-122"/>
                 <a:cs typeface="Calibri" pitchFamily="34" charset="-120"/>
               </a:rPr>
-              <a:t>collection</a:t>
+              <a:t>recollect</a:t>
             </a:r>
             <a:pPr algn="l" indent="0" marL="0">
               <a:buNone/>
@@ -18870,7 +18699,7 @@
                 <a:ea typeface="Calibri" pitchFamily="34" charset="-122"/>
                 <a:cs typeface="Calibri" pitchFamily="34" charset="-120"/>
               </a:rPr>
-              <a:t> a great success.</a:t>
+              <a:t> exactly when it happened.</a:t>
             </a:r>
             <a:endParaRPr lang="en-US" sz="1800" dirty="0"/>
           </a:p>
@@ -19153,7 +18982,7 @@
                 <a:ea typeface="Trebuchet MS" pitchFamily="34" charset="-122"/>
                 <a:cs typeface="Trebuchet MS" pitchFamily="34" charset="-120"/>
               </a:rPr>
-              <a:t>collective</a:t>
+              <a:t>collectively</a:t>
             </a:r>
             <a:endParaRPr lang="en-US" sz="1400" dirty="0"/>
           </a:p>
@@ -19281,7 +19110,7 @@
                 <a:ea typeface="Trebuchet MS" pitchFamily="34" charset="-122"/>
                 <a:cs typeface="Trebuchet MS" pitchFamily="34" charset="-120"/>
               </a:rPr>
-              <a:t>collection</a:t>
+              <a:t>recollect</a:t>
             </a:r>
             <a:endParaRPr lang="en-US" sz="1400" dirty="0"/>
           </a:p>
@@ -19612,7 +19441,7 @@
                 <a:ea typeface="Calibri" pitchFamily="34" charset="-122"/>
                 <a:cs typeface="Calibri" pitchFamily="34" charset="-120"/>
               </a:rPr>
-              <a:t>Word Labs  •  wordlabs.app  •  Root: 'collect' = gather or bring together</a:t>
+              <a:t>Word Labs  •  wordlabs.app  •  Root: 'collect' = gather together, bring together</a:t>
             </a:r>
             <a:endParaRPr lang="en-US" sz="800" dirty="0"/>
           </a:p>
@@ -20439,7 +20268,7 @@
                 <a:ea typeface="Calibri" pitchFamily="34" charset="-122"/>
                 <a:cs typeface="Calibri" pitchFamily="34" charset="-120"/>
               </a:rPr>
-              <a:t>Word Labs  •  wordlabs.app  •  Root: 'collect' = gather or bring together</a:t>
+              <a:t>Word Labs  •  wordlabs.app  •  Root: 'collect' = gather together, bring together</a:t>
             </a:r>
             <a:endParaRPr lang="en-US" sz="800" dirty="0"/>
           </a:p>
@@ -20756,7 +20585,7 @@
                 <a:ea typeface="Calibri" pitchFamily="34" charset="-122"/>
                 <a:cs typeface="Calibri" pitchFamily="34" charset="-120"/>
               </a:rPr>
-              <a:t>again</a:t>
+              <a:t>again, back</a:t>
             </a:r>
             <a:endParaRPr lang="en-US" sz="850" dirty="0"/>
           </a:p>
@@ -21687,7 +21516,7 @@
                 <a:ea typeface="Calibri" pitchFamily="34" charset="-122"/>
                 <a:cs typeface="Calibri" pitchFamily="34" charset="-120"/>
               </a:rPr>
-              <a:t>Word Labs  •  wordlabs.app  •  Root: 'collect' = gather or bring together</a:t>
+              <a:t>Word Labs  •  wordlabs.app  •  Root: 'collect' = gather together, bring together</a:t>
             </a:r>
             <a:endParaRPr lang="en-US" sz="800" dirty="0"/>
           </a:p>
@@ -22004,7 +21833,7 @@
                 <a:ea typeface="Calibri" pitchFamily="34" charset="-122"/>
                 <a:cs typeface="Calibri" pitchFamily="34" charset="-120"/>
               </a:rPr>
-              <a:t>again</a:t>
+              <a:t>again, back</a:t>
             </a:r>
             <a:endParaRPr lang="en-US" sz="850" dirty="0"/>
           </a:p>
@@ -22538,7 +22367,7 @@
                 <a:ea typeface="Trebuchet MS" pitchFamily="34" charset="-122"/>
                 <a:cs typeface="Trebuchet MS" pitchFamily="34" charset="-120"/>
               </a:rPr>
-              <a:t>rec</a:t>
+              <a:t>re</a:t>
             </a:r>
             <a:endParaRPr lang="en-US" sz="1400" dirty="0"/>
           </a:p>
@@ -22643,7 +22472,7 @@
                 <a:ea typeface="Trebuchet MS" pitchFamily="34" charset="-122"/>
                 <a:cs typeface="Trebuchet MS" pitchFamily="34" charset="-120"/>
               </a:rPr>
-              <a:t>ol</a:t>
+              <a:t>col</a:t>
             </a:r>
             <a:endParaRPr lang="en-US" sz="1400" dirty="0"/>
           </a:p>
@@ -23277,7 +23106,7 @@
                 <a:ea typeface="Calibri" pitchFamily="34" charset="-122"/>
                 <a:cs typeface="Calibri" pitchFamily="34" charset="-120"/>
               </a:rPr>
-              <a:t>Word Labs  •  wordlabs.app  •  Root: 'collect' = gather or bring together</a:t>
+              <a:t>Word Labs  •  wordlabs.app  •  Root: 'collect' = gather together, bring together</a:t>
             </a:r>
             <a:endParaRPr lang="en-US" sz="800" dirty="0"/>
           </a:p>
@@ -23594,7 +23423,7 @@
                 <a:ea typeface="Calibri" pitchFamily="34" charset="-122"/>
                 <a:cs typeface="Calibri" pitchFamily="34" charset="-120"/>
               </a:rPr>
-              <a:t>again</a:t>
+              <a:t>again, back</a:t>
             </a:r>
             <a:endParaRPr lang="en-US" sz="850" dirty="0"/>
           </a:p>
@@ -24128,7 +23957,7 @@
                 <a:ea typeface="Trebuchet MS" pitchFamily="34" charset="-122"/>
                 <a:cs typeface="Trebuchet MS" pitchFamily="34" charset="-120"/>
               </a:rPr>
-              <a:t>rec</a:t>
+              <a:t>re</a:t>
             </a:r>
             <a:endParaRPr lang="en-US" sz="1400" dirty="0"/>
           </a:p>
@@ -24233,7 +24062,7 @@
                 <a:ea typeface="Trebuchet MS" pitchFamily="34" charset="-122"/>
                 <a:cs typeface="Trebuchet MS" pitchFamily="34" charset="-120"/>
               </a:rPr>
-              <a:t>ol</a:t>
+              <a:t>col</a:t>
             </a:r>
             <a:endParaRPr lang="en-US" sz="1400" dirty="0"/>
           </a:p>
@@ -24550,8 +24379,8 @@
         </p:nvSpPr>
         <p:spPr>
           <a:xfrm>
-            <a:off x="1951828" y="4169664"/>
-            <a:ext cx="603504" cy="384048"/>
+            <a:off x="1952244" y="4169664"/>
+            <a:ext cx="543652" cy="384048"/>
           </a:xfrm>
           <a:prstGeom prst="rect">
             <a:avLst>
@@ -24577,8 +24406,8 @@
         </p:nvSpPr>
         <p:spPr>
           <a:xfrm>
-            <a:off x="1951828" y="4169664"/>
-            <a:ext cx="603504" cy="384048"/>
+            <a:off x="1952244" y="4169664"/>
+            <a:ext cx="543652" cy="384048"/>
           </a:xfrm>
           <a:prstGeom prst="rect">
             <a:avLst/>
@@ -24616,8 +24445,8 @@
         </p:nvSpPr>
         <p:spPr>
           <a:xfrm>
-            <a:off x="2605209" y="4169664"/>
-            <a:ext cx="603504" cy="384048"/>
+            <a:off x="2546188" y="4169664"/>
+            <a:ext cx="543652" cy="384048"/>
           </a:xfrm>
           <a:prstGeom prst="rect">
             <a:avLst>
@@ -24643,8 +24472,8 @@
         </p:nvSpPr>
         <p:spPr>
           <a:xfrm>
-            <a:off x="2605209" y="4169664"/>
-            <a:ext cx="603504" cy="384048"/>
+            <a:off x="2546188" y="4169664"/>
+            <a:ext cx="543652" cy="384048"/>
           </a:xfrm>
           <a:prstGeom prst="rect">
             <a:avLst/>
@@ -24682,8 +24511,8 @@
         </p:nvSpPr>
         <p:spPr>
           <a:xfrm>
-            <a:off x="3258589" y="4169664"/>
-            <a:ext cx="603504" cy="384048"/>
+            <a:off x="3140133" y="4169664"/>
+            <a:ext cx="543652" cy="384048"/>
           </a:xfrm>
           <a:prstGeom prst="rect">
             <a:avLst>
@@ -24709,8 +24538,8 @@
         </p:nvSpPr>
         <p:spPr>
           <a:xfrm>
-            <a:off x="3258589" y="4169664"/>
-            <a:ext cx="603504" cy="384048"/>
+            <a:off x="3140133" y="4169664"/>
+            <a:ext cx="543652" cy="384048"/>
           </a:xfrm>
           <a:prstGeom prst="rect">
             <a:avLst/>
@@ -24748,8 +24577,8 @@
         </p:nvSpPr>
         <p:spPr>
           <a:xfrm>
-            <a:off x="3258589" y="4572000"/>
-            <a:ext cx="603504" cy="219456"/>
+            <a:off x="3140133" y="4572000"/>
+            <a:ext cx="543652" cy="219456"/>
           </a:xfrm>
           <a:prstGeom prst="rect">
             <a:avLst/>
@@ -24787,8 +24616,8 @@
         </p:nvSpPr>
         <p:spPr>
           <a:xfrm>
-            <a:off x="3911969" y="4169664"/>
-            <a:ext cx="603504" cy="384048"/>
+            <a:off x="3734077" y="4169664"/>
+            <a:ext cx="543652" cy="384048"/>
           </a:xfrm>
           <a:prstGeom prst="rect">
             <a:avLst>
@@ -24814,8 +24643,8 @@
         </p:nvSpPr>
         <p:spPr>
           <a:xfrm>
-            <a:off x="3911969" y="4169664"/>
-            <a:ext cx="603504" cy="384048"/>
+            <a:off x="3734077" y="4169664"/>
+            <a:ext cx="543652" cy="384048"/>
           </a:xfrm>
           <a:prstGeom prst="rect">
             <a:avLst/>
@@ -24853,8 +24682,8 @@
         </p:nvSpPr>
         <p:spPr>
           <a:xfrm>
-            <a:off x="4565350" y="4169664"/>
-            <a:ext cx="603504" cy="384048"/>
+            <a:off x="4328021" y="4169664"/>
+            <a:ext cx="543652" cy="384048"/>
           </a:xfrm>
           <a:prstGeom prst="rect">
             <a:avLst>
@@ -24880,8 +24709,8 @@
         </p:nvSpPr>
         <p:spPr>
           <a:xfrm>
-            <a:off x="4565350" y="4169664"/>
-            <a:ext cx="603504" cy="384048"/>
+            <a:off x="4328021" y="4169664"/>
+            <a:ext cx="543652" cy="384048"/>
           </a:xfrm>
           <a:prstGeom prst="rect">
             <a:avLst/>
@@ -24919,8 +24748,8 @@
         </p:nvSpPr>
         <p:spPr>
           <a:xfrm>
-            <a:off x="5218730" y="4169664"/>
-            <a:ext cx="603504" cy="384048"/>
+            <a:off x="4921966" y="4169664"/>
+            <a:ext cx="543652" cy="384048"/>
           </a:xfrm>
           <a:prstGeom prst="rect">
             <a:avLst>
@@ -24946,8 +24775,8 @@
         </p:nvSpPr>
         <p:spPr>
           <a:xfrm>
-            <a:off x="5218730" y="4169664"/>
-            <a:ext cx="603504" cy="384048"/>
+            <a:off x="4921966" y="4169664"/>
+            <a:ext cx="543652" cy="384048"/>
           </a:xfrm>
           <a:prstGeom prst="rect">
             <a:avLst/>
@@ -24985,8 +24814,8 @@
         </p:nvSpPr>
         <p:spPr>
           <a:xfrm>
-            <a:off x="5872111" y="4169664"/>
-            <a:ext cx="603504" cy="384048"/>
+            <a:off x="5515910" y="4169664"/>
+            <a:ext cx="543652" cy="384048"/>
           </a:xfrm>
           <a:prstGeom prst="rect">
             <a:avLst>
@@ -25012,8 +24841,8 @@
         </p:nvSpPr>
         <p:spPr>
           <a:xfrm>
-            <a:off x="5872111" y="4169664"/>
-            <a:ext cx="603504" cy="384048"/>
+            <a:off x="5515910" y="4169664"/>
+            <a:ext cx="543652" cy="384048"/>
           </a:xfrm>
           <a:prstGeom prst="rect">
             <a:avLst/>
@@ -25051,8 +24880,8 @@
         </p:nvSpPr>
         <p:spPr>
           <a:xfrm>
-            <a:off x="5872111" y="4572000"/>
-            <a:ext cx="603504" cy="219456"/>
+            <a:off x="5515910" y="4572000"/>
+            <a:ext cx="543652" cy="219456"/>
           </a:xfrm>
           <a:prstGeom prst="rect">
             <a:avLst/>
@@ -25090,8 +24919,8 @@
         </p:nvSpPr>
         <p:spPr>
           <a:xfrm>
-            <a:off x="6525491" y="4169664"/>
-            <a:ext cx="603504" cy="384048"/>
+            <a:off x="6109855" y="4169664"/>
+            <a:ext cx="543652" cy="384048"/>
           </a:xfrm>
           <a:prstGeom prst="rect">
             <a:avLst>
@@ -25117,8 +24946,8 @@
         </p:nvSpPr>
         <p:spPr>
           <a:xfrm>
-            <a:off x="6525491" y="4169664"/>
-            <a:ext cx="603504" cy="384048"/>
+            <a:off x="6109855" y="4169664"/>
+            <a:ext cx="543652" cy="384048"/>
           </a:xfrm>
           <a:prstGeom prst="rect">
             <a:avLst/>
@@ -25156,8 +24985,8 @@
         </p:nvSpPr>
         <p:spPr>
           <a:xfrm>
-            <a:off x="7178871" y="4169664"/>
-            <a:ext cx="603504" cy="384048"/>
+            <a:off x="6703799" y="4169664"/>
+            <a:ext cx="543652" cy="384048"/>
           </a:xfrm>
           <a:prstGeom prst="rect">
             <a:avLst>
@@ -25183,8 +25012,8 @@
         </p:nvSpPr>
         <p:spPr>
           <a:xfrm>
-            <a:off x="7178871" y="4169664"/>
-            <a:ext cx="603504" cy="384048"/>
+            <a:off x="6703799" y="4169664"/>
+            <a:ext cx="543652" cy="384048"/>
           </a:xfrm>
           <a:prstGeom prst="rect">
             <a:avLst/>
@@ -25208,7 +25037,7 @@
                 <a:ea typeface="Trebuchet MS" pitchFamily="34" charset="-122"/>
                 <a:cs typeface="Trebuchet MS" pitchFamily="34" charset="-120"/>
               </a:rPr>
-              <a:t>io</a:t>
+              <a:t>i</a:t>
             </a:r>
             <a:endParaRPr lang="en-US" sz="900" dirty="0"/>
           </a:p>
@@ -25222,8 +25051,8 @@
         </p:nvSpPr>
         <p:spPr>
           <a:xfrm>
-            <a:off x="7178871" y="4572000"/>
-            <a:ext cx="603504" cy="219456"/>
+            <a:off x="6703799" y="4572000"/>
+            <a:ext cx="543652" cy="219456"/>
           </a:xfrm>
           <a:prstGeom prst="rect">
             <a:avLst/>
@@ -25261,8 +25090,8 @@
         </p:nvSpPr>
         <p:spPr>
           <a:xfrm>
-            <a:off x="7832252" y="4169664"/>
-            <a:ext cx="603504" cy="384048"/>
+            <a:off x="7297743" y="4169664"/>
+            <a:ext cx="543652" cy="384048"/>
           </a:xfrm>
           <a:prstGeom prst="rect">
             <a:avLst>
@@ -25288,8 +25117,74 @@
         </p:nvSpPr>
         <p:spPr>
           <a:xfrm>
-            <a:off x="7832252" y="4169664"/>
-            <a:ext cx="603504" cy="384048"/>
+            <a:off x="7297743" y="4169664"/>
+            <a:ext cx="543652" cy="384048"/>
+          </a:xfrm>
+          <a:prstGeom prst="rect">
+            <a:avLst/>
+          </a:prstGeom>
+          <a:noFill/>
+          <a:ln/>
+        </p:spPr>
+        <p:txBody>
+          <a:bodyPr wrap="square" lIns="0" tIns="0" rIns="0" bIns="0" rtlCol="0" anchor="ctr"/>
+          <a:lstStyle/>
+          <a:p>
+            <a:pPr algn="ctr" indent="0" marL="0">
+              <a:buNone/>
+            </a:pPr>
+            <a:r>
+              <a:rPr lang="en-US" sz="900" b="1" dirty="0">
+                <a:solidFill>
+                  <a:srgbClr val="9D174D"/>
+                </a:solidFill>
+                <a:latin typeface="Trebuchet MS" pitchFamily="34" charset="0"/>
+                <a:ea typeface="Trebuchet MS" pitchFamily="34" charset="-122"/>
+                <a:cs typeface="Trebuchet MS" pitchFamily="34" charset="-120"/>
+              </a:rPr>
+              <a:t>o</a:t>
+            </a:r>
+            <a:endParaRPr lang="en-US" sz="900" dirty="0"/>
+          </a:p>
+        </p:txBody>
+      </p:sp>
+      <p:sp>
+        <p:nvSpPr>
+          <p:cNvPr id="69" name="Shape 67"/>
+          <p:cNvSpPr/>
+          <p:nvPr/>
+        </p:nvSpPr>
+        <p:spPr>
+          <a:xfrm>
+            <a:off x="7891688" y="4169664"/>
+            <a:ext cx="543652" cy="384048"/>
+          </a:xfrm>
+          <a:prstGeom prst="rect">
+            <a:avLst>
+              <a:gd name="adj" fmla="val 9524"/>
+            </a:avLst>
+          </a:prstGeom>
+          <a:solidFill>
+            <a:srgbClr val="FFFFFF"/>
+          </a:solidFill>
+          <a:ln w="12700">
+            <a:solidFill>
+              <a:srgbClr val="DB2777"/>
+            </a:solidFill>
+            <a:prstDash val="solid"/>
+          </a:ln>
+        </p:spPr>
+      </p:sp>
+      <p:sp>
+        <p:nvSpPr>
+          <p:cNvPr id="70" name="Text 68"/>
+          <p:cNvSpPr/>
+          <p:nvPr/>
+        </p:nvSpPr>
+        <p:spPr>
+          <a:xfrm>
+            <a:off x="7891688" y="4169664"/>
+            <a:ext cx="543652" cy="384048"/>
           </a:xfrm>
           <a:prstGeom prst="rect">
             <a:avLst/>
@@ -25605,7 +25500,7 @@
                 <a:ea typeface="Calibri" pitchFamily="34" charset="-122"/>
                 <a:cs typeface="Calibri" pitchFamily="34" charset="-120"/>
               </a:rPr>
-              <a:t>Word Labs  •  wordlabs.app  •  Root: 'collect' = gather or bring together</a:t>
+              <a:t>Word Labs  •  wordlabs.app  •  Root: 'collect' = gather together, bring together</a:t>
             </a:r>
             <a:endParaRPr lang="en-US" sz="800" dirty="0"/>
           </a:p>
@@ -25744,7 +25639,7 @@
                 <a:ea typeface="Trebuchet MS" pitchFamily="34" charset="-122"/>
                 <a:cs typeface="Trebuchet MS" pitchFamily="34" charset="-120"/>
               </a:rPr>
-              <a:t>collective</a:t>
+              <a:t>collectively</a:t>
             </a:r>
             <a:endParaRPr lang="en-US" sz="2800" dirty="0"/>
           </a:p>
@@ -26432,7 +26327,7 @@
                 <a:ea typeface="Calibri" pitchFamily="34" charset="-122"/>
                 <a:cs typeface="Calibri" pitchFamily="34" charset="-120"/>
               </a:rPr>
-              <a:t>Word Labs  •  wordlabs.app  •  Root: 'collect' = gather or bring together</a:t>
+              <a:t>Word Labs  •  wordlabs.app  •  Root: 'collect' = gather together, bring together</a:t>
             </a:r>
             <a:endParaRPr lang="en-US" sz="800" dirty="0"/>
           </a:p>
@@ -26571,7 +26466,7 @@
                 <a:ea typeface="Trebuchet MS" pitchFamily="34" charset="-122"/>
                 <a:cs typeface="Trebuchet MS" pitchFamily="34" charset="-120"/>
               </a:rPr>
-              <a:t>collective</a:t>
+              <a:t>collectively</a:t>
             </a:r>
             <a:endParaRPr lang="en-US" sz="2800" dirty="0"/>
           </a:p>
@@ -26651,8 +26546,8 @@
         </p:nvSpPr>
         <p:spPr>
           <a:xfrm>
-            <a:off x="2221992" y="2258568"/>
-            <a:ext cx="1828800" cy="292608"/>
+            <a:off x="1989734" y="2258568"/>
+            <a:ext cx="1581912" cy="292608"/>
           </a:xfrm>
           <a:prstGeom prst="rect">
             <a:avLst>
@@ -26685,8 +26580,8 @@
         </p:nvSpPr>
         <p:spPr>
           <a:xfrm>
-            <a:off x="2221992" y="2258568"/>
-            <a:ext cx="1828800" cy="292608"/>
+            <a:off x="1989734" y="2258568"/>
+            <a:ext cx="1581912" cy="292608"/>
           </a:xfrm>
           <a:prstGeom prst="rect">
             <a:avLst/>
@@ -26724,8 +26619,8 @@
         </p:nvSpPr>
         <p:spPr>
           <a:xfrm>
-            <a:off x="2221992" y="2569464"/>
-            <a:ext cx="1828800" cy="201168"/>
+            <a:off x="1989734" y="2569464"/>
+            <a:ext cx="1581912" cy="201168"/>
           </a:xfrm>
           <a:prstGeom prst="rect">
             <a:avLst/>
@@ -26763,8 +26658,8 @@
         </p:nvSpPr>
         <p:spPr>
           <a:xfrm>
-            <a:off x="2221992" y="2752344"/>
-            <a:ext cx="1828800" cy="182880"/>
+            <a:off x="1989734" y="2752344"/>
+            <a:ext cx="1581912" cy="182880"/>
           </a:xfrm>
           <a:prstGeom prst="rect">
             <a:avLst/>
@@ -26802,8 +26697,8 @@
         </p:nvSpPr>
         <p:spPr>
           <a:xfrm>
-            <a:off x="4370832" y="2258568"/>
-            <a:ext cx="1828800" cy="292608"/>
+            <a:off x="3659429" y="2258568"/>
+            <a:ext cx="1581912" cy="292608"/>
           </a:xfrm>
           <a:prstGeom prst="rect">
             <a:avLst>
@@ -26836,8 +26731,8 @@
         </p:nvSpPr>
         <p:spPr>
           <a:xfrm>
-            <a:off x="4370832" y="2258568"/>
-            <a:ext cx="1828800" cy="292608"/>
+            <a:off x="3659429" y="2258568"/>
+            <a:ext cx="1581912" cy="292608"/>
           </a:xfrm>
           <a:prstGeom prst="rect">
             <a:avLst/>
@@ -26875,8 +26770,8 @@
         </p:nvSpPr>
         <p:spPr>
           <a:xfrm>
-            <a:off x="4370832" y="2569464"/>
-            <a:ext cx="1828800" cy="201168"/>
+            <a:off x="3659429" y="2569464"/>
+            <a:ext cx="1581912" cy="201168"/>
           </a:xfrm>
           <a:prstGeom prst="rect">
             <a:avLst/>
@@ -26914,8 +26809,8 @@
         </p:nvSpPr>
         <p:spPr>
           <a:xfrm>
-            <a:off x="6519672" y="2258568"/>
-            <a:ext cx="1828800" cy="292608"/>
+            <a:off x="5329123" y="2258568"/>
+            <a:ext cx="1581912" cy="292608"/>
           </a:xfrm>
           <a:prstGeom prst="rect">
             <a:avLst>
@@ -26948,8 +26843,8 @@
         </p:nvSpPr>
         <p:spPr>
           <a:xfrm>
-            <a:off x="6519672" y="2258568"/>
-            <a:ext cx="1828800" cy="292608"/>
+            <a:off x="5329123" y="2258568"/>
+            <a:ext cx="1581912" cy="292608"/>
           </a:xfrm>
           <a:prstGeom prst="rect">
             <a:avLst/>
@@ -26987,8 +26882,8 @@
         </p:nvSpPr>
         <p:spPr>
           <a:xfrm>
-            <a:off x="6519672" y="2569464"/>
-            <a:ext cx="1828800" cy="201168"/>
+            <a:off x="5329123" y="2569464"/>
+            <a:ext cx="1581912" cy="201168"/>
           </a:xfrm>
           <a:prstGeom prst="rect">
             <a:avLst/>
@@ -27026,6 +26921,118 @@
         </p:nvSpPr>
         <p:spPr>
           <a:xfrm>
+            <a:off x="6998818" y="2258568"/>
+            <a:ext cx="1581912" cy="292608"/>
+          </a:xfrm>
+          <a:prstGeom prst="rect">
+            <a:avLst>
+              <a:gd name="adj" fmla="val 25000"/>
+            </a:avLst>
+          </a:prstGeom>
+          <a:solidFill>
+            <a:srgbClr val="FCE7F3"/>
+          </a:solidFill>
+          <a:ln w="19050">
+            <a:solidFill>
+              <a:srgbClr val="DB2777"/>
+            </a:solidFill>
+            <a:prstDash val="solid"/>
+          </a:ln>
+          <a:effectLst>
+            <a:outerShdw sx="100000" sy="100000" kx="0" ky="0" algn="bl" rotWithShape="0" blurRad="101600" dist="38100" dir="8100000">
+              <a:srgbClr val="000000">
+                <a:alpha val="12000"/>
+              </a:srgbClr>
+            </a:outerShdw>
+          </a:effectLst>
+        </p:spPr>
+      </p:sp>
+      <p:sp>
+        <p:nvSpPr>
+          <p:cNvPr id="27" name="Text 25"/>
+          <p:cNvSpPr/>
+          <p:nvPr/>
+        </p:nvSpPr>
+        <p:spPr>
+          <a:xfrm>
+            <a:off x="6998818" y="2258568"/>
+            <a:ext cx="1581912" cy="292608"/>
+          </a:xfrm>
+          <a:prstGeom prst="rect">
+            <a:avLst/>
+          </a:prstGeom>
+          <a:noFill/>
+          <a:ln/>
+        </p:spPr>
+        <p:txBody>
+          <a:bodyPr wrap="square" lIns="0" tIns="0" rIns="0" bIns="0" rtlCol="0" anchor="ctr"/>
+          <a:lstStyle/>
+          <a:p>
+            <a:pPr algn="ctr" indent="0" marL="0">
+              <a:buNone/>
+            </a:pPr>
+            <a:r>
+              <a:rPr lang="en-US" sz="1300" b="1" dirty="0">
+                <a:solidFill>
+                  <a:srgbClr val="9D174D"/>
+                </a:solidFill>
+                <a:latin typeface="Trebuchet MS" pitchFamily="34" charset="0"/>
+                <a:ea typeface="Trebuchet MS" pitchFamily="34" charset="-122"/>
+                <a:cs typeface="Trebuchet MS" pitchFamily="34" charset="-120"/>
+              </a:rPr>
+              <a:t>ly</a:t>
+            </a:r>
+            <a:endParaRPr lang="en-US" sz="1300" dirty="0"/>
+          </a:p>
+        </p:txBody>
+      </p:sp>
+      <p:sp>
+        <p:nvSpPr>
+          <p:cNvPr id="28" name="Text 26"/>
+          <p:cNvSpPr/>
+          <p:nvPr/>
+        </p:nvSpPr>
+        <p:spPr>
+          <a:xfrm>
+            <a:off x="6998818" y="2569464"/>
+            <a:ext cx="1581912" cy="201168"/>
+          </a:xfrm>
+          <a:prstGeom prst="rect">
+            <a:avLst/>
+          </a:prstGeom>
+          <a:noFill/>
+          <a:ln/>
+        </p:spPr>
+        <p:txBody>
+          <a:bodyPr wrap="square" lIns="0" tIns="0" rIns="0" bIns="0" rtlCol="0" anchor="t"/>
+          <a:lstStyle/>
+          <a:p>
+            <a:pPr algn="ctr" indent="0" marL="0">
+              <a:buNone/>
+            </a:pPr>
+            <a:r>
+              <a:rPr lang="en-US" sz="850" dirty="0">
+                <a:solidFill>
+                  <a:srgbClr val="475569"/>
+                </a:solidFill>
+                <a:latin typeface="Calibri" pitchFamily="34" charset="0"/>
+                <a:ea typeface="Calibri" pitchFamily="34" charset="-122"/>
+                <a:cs typeface="Calibri" pitchFamily="34" charset="-120"/>
+              </a:rPr>
+              <a:t>in a certain way</a:t>
+            </a:r>
+            <a:endParaRPr lang="en-US" sz="850" dirty="0"/>
+          </a:p>
+        </p:txBody>
+      </p:sp>
+      <p:sp>
+        <p:nvSpPr>
+          <p:cNvPr id="29" name="Shape 27"/>
+          <p:cNvSpPr/>
+          <p:nvPr/>
+        </p:nvSpPr>
+        <p:spPr>
+          <a:xfrm>
             <a:off x="365760" y="3273552"/>
             <a:ext cx="1371600" cy="658368"/>
           </a:xfrm>
@@ -27047,7 +27054,7 @@
       </p:sp>
       <p:sp>
         <p:nvSpPr>
-          <p:cNvPr id="27" name="Text 25"/>
+          <p:cNvPr id="30" name="Text 28"/>
           <p:cNvSpPr/>
           <p:nvPr/>
         </p:nvSpPr>
@@ -27086,7 +27093,7 @@
       </p:sp>
       <p:sp>
         <p:nvSpPr>
-          <p:cNvPr id="28" name="Shape 26"/>
+          <p:cNvPr id="31" name="Shape 29"/>
           <p:cNvSpPr/>
           <p:nvPr/>
         </p:nvSpPr>
@@ -27113,7 +27120,7 @@
       </p:sp>
       <p:sp>
         <p:nvSpPr>
-          <p:cNvPr id="29" name="Text 27"/>
+          <p:cNvPr id="32" name="Text 30"/>
           <p:cNvSpPr/>
           <p:nvPr/>
         </p:nvSpPr>
@@ -27152,7 +27159,7 @@
       </p:sp>
       <p:sp>
         <p:nvSpPr>
-          <p:cNvPr id="30" name="Shape 28"/>
+          <p:cNvPr id="33" name="Shape 31"/>
           <p:cNvSpPr/>
           <p:nvPr/>
         </p:nvSpPr>
@@ -27179,7 +27186,7 @@
       </p:sp>
       <p:sp>
         <p:nvSpPr>
-          <p:cNvPr id="31" name="Text 29"/>
+          <p:cNvPr id="34" name="Text 32"/>
           <p:cNvSpPr/>
           <p:nvPr/>
         </p:nvSpPr>
@@ -27218,7 +27225,7 @@
       </p:sp>
       <p:sp>
         <p:nvSpPr>
-          <p:cNvPr id="32" name="Shape 30"/>
+          <p:cNvPr id="35" name="Shape 33"/>
           <p:cNvSpPr/>
           <p:nvPr/>
         </p:nvSpPr>
@@ -27245,7 +27252,7 @@
       </p:sp>
       <p:sp>
         <p:nvSpPr>
-          <p:cNvPr id="33" name="Text 31"/>
+          <p:cNvPr id="36" name="Text 34"/>
           <p:cNvSpPr/>
           <p:nvPr/>
         </p:nvSpPr>
@@ -27568,7 +27575,7 @@
                 <a:ea typeface="Calibri" pitchFamily="34" charset="-122"/>
                 <a:cs typeface="Calibri" pitchFamily="34" charset="-120"/>
               </a:rPr>
-              <a:t>Word Labs  •  wordlabs.app  •  Root: 'collect' = gather or bring together</a:t>
+              <a:t>Word Labs  •  wordlabs.app  •  Root: 'collect' = gather together, bring together</a:t>
             </a:r>
             <a:endParaRPr lang="en-US" sz="800" dirty="0"/>
           </a:p>
@@ -27641,7 +27648,7 @@
                 <a:ea typeface="Trebuchet MS" pitchFamily="34" charset="-122"/>
                 <a:cs typeface="Trebuchet MS" pitchFamily="34" charset="-120"/>
               </a:rPr>
-              <a:t>We are learning that the root 'collect' means 'gather or bring together'.</a:t>
+              <a:t>We are learning that the root 'collect' means 'gather together, bring together'.</a:t>
             </a:r>
             <a:endParaRPr lang="en-US" sz="2000" dirty="0"/>
           </a:p>
@@ -28287,7 +28294,7 @@
                 <a:ea typeface="Calibri" pitchFamily="34" charset="-122"/>
                 <a:cs typeface="Calibri" pitchFamily="34" charset="-120"/>
               </a:rPr>
-              <a:t>Word Labs  •  wordlabs.app  •  Root: 'collect' = gather or bring together</a:t>
+              <a:t>Word Labs  •  wordlabs.app  •  Root: 'collect' = gather together, bring together</a:t>
             </a:r>
             <a:endParaRPr lang="en-US" sz="800" dirty="0"/>
           </a:p>
@@ -28426,7 +28433,7 @@
                 <a:ea typeface="Trebuchet MS" pitchFamily="34" charset="-122"/>
                 <a:cs typeface="Trebuchet MS" pitchFamily="34" charset="-120"/>
               </a:rPr>
-              <a:t>collective</a:t>
+              <a:t>collectively</a:t>
             </a:r>
             <a:endParaRPr lang="en-US" sz="2800" dirty="0"/>
           </a:p>
@@ -28506,8 +28513,8 @@
         </p:nvSpPr>
         <p:spPr>
           <a:xfrm>
-            <a:off x="2221992" y="2258568"/>
-            <a:ext cx="1828800" cy="292608"/>
+            <a:off x="1989734" y="2258568"/>
+            <a:ext cx="1581912" cy="292608"/>
           </a:xfrm>
           <a:prstGeom prst="rect">
             <a:avLst>
@@ -28540,8 +28547,8 @@
         </p:nvSpPr>
         <p:spPr>
           <a:xfrm>
-            <a:off x="2221992" y="2258568"/>
-            <a:ext cx="1828800" cy="292608"/>
+            <a:off x="1989734" y="2258568"/>
+            <a:ext cx="1581912" cy="292608"/>
           </a:xfrm>
           <a:prstGeom prst="rect">
             <a:avLst/>
@@ -28579,8 +28586,8 @@
         </p:nvSpPr>
         <p:spPr>
           <a:xfrm>
-            <a:off x="2221992" y="2569464"/>
-            <a:ext cx="1828800" cy="201168"/>
+            <a:off x="1989734" y="2569464"/>
+            <a:ext cx="1581912" cy="201168"/>
           </a:xfrm>
           <a:prstGeom prst="rect">
             <a:avLst/>
@@ -28618,8 +28625,8 @@
         </p:nvSpPr>
         <p:spPr>
           <a:xfrm>
-            <a:off x="2221992" y="2752344"/>
-            <a:ext cx="1828800" cy="182880"/>
+            <a:off x="1989734" y="2752344"/>
+            <a:ext cx="1581912" cy="182880"/>
           </a:xfrm>
           <a:prstGeom prst="rect">
             <a:avLst/>
@@ -28657,8 +28664,8 @@
         </p:nvSpPr>
         <p:spPr>
           <a:xfrm>
-            <a:off x="4370832" y="2258568"/>
-            <a:ext cx="1828800" cy="292608"/>
+            <a:off x="3659429" y="2258568"/>
+            <a:ext cx="1581912" cy="292608"/>
           </a:xfrm>
           <a:prstGeom prst="rect">
             <a:avLst>
@@ -28691,8 +28698,8 @@
         </p:nvSpPr>
         <p:spPr>
           <a:xfrm>
-            <a:off x="4370832" y="2258568"/>
-            <a:ext cx="1828800" cy="292608"/>
+            <a:off x="3659429" y="2258568"/>
+            <a:ext cx="1581912" cy="292608"/>
           </a:xfrm>
           <a:prstGeom prst="rect">
             <a:avLst/>
@@ -28730,8 +28737,8 @@
         </p:nvSpPr>
         <p:spPr>
           <a:xfrm>
-            <a:off x="4370832" y="2569464"/>
-            <a:ext cx="1828800" cy="201168"/>
+            <a:off x="3659429" y="2569464"/>
+            <a:ext cx="1581912" cy="201168"/>
           </a:xfrm>
           <a:prstGeom prst="rect">
             <a:avLst/>
@@ -28769,8 +28776,8 @@
         </p:nvSpPr>
         <p:spPr>
           <a:xfrm>
-            <a:off x="6519672" y="2258568"/>
-            <a:ext cx="1828800" cy="292608"/>
+            <a:off x="5329123" y="2258568"/>
+            <a:ext cx="1581912" cy="292608"/>
           </a:xfrm>
           <a:prstGeom prst="rect">
             <a:avLst>
@@ -28803,8 +28810,8 @@
         </p:nvSpPr>
         <p:spPr>
           <a:xfrm>
-            <a:off x="6519672" y="2258568"/>
-            <a:ext cx="1828800" cy="292608"/>
+            <a:off x="5329123" y="2258568"/>
+            <a:ext cx="1581912" cy="292608"/>
           </a:xfrm>
           <a:prstGeom prst="rect">
             <a:avLst/>
@@ -28842,8 +28849,8 @@
         </p:nvSpPr>
         <p:spPr>
           <a:xfrm>
-            <a:off x="6519672" y="2569464"/>
-            <a:ext cx="1828800" cy="201168"/>
+            <a:off x="5329123" y="2569464"/>
+            <a:ext cx="1581912" cy="201168"/>
           </a:xfrm>
           <a:prstGeom prst="rect">
             <a:avLst/>
@@ -28881,6 +28888,118 @@
         </p:nvSpPr>
         <p:spPr>
           <a:xfrm>
+            <a:off x="6998818" y="2258568"/>
+            <a:ext cx="1581912" cy="292608"/>
+          </a:xfrm>
+          <a:prstGeom prst="rect">
+            <a:avLst>
+              <a:gd name="adj" fmla="val 25000"/>
+            </a:avLst>
+          </a:prstGeom>
+          <a:solidFill>
+            <a:srgbClr val="FCE7F3"/>
+          </a:solidFill>
+          <a:ln w="19050">
+            <a:solidFill>
+              <a:srgbClr val="DB2777"/>
+            </a:solidFill>
+            <a:prstDash val="solid"/>
+          </a:ln>
+          <a:effectLst>
+            <a:outerShdw sx="100000" sy="100000" kx="0" ky="0" algn="bl" rotWithShape="0" blurRad="101600" dist="38100" dir="8100000">
+              <a:srgbClr val="000000">
+                <a:alpha val="12000"/>
+              </a:srgbClr>
+            </a:outerShdw>
+          </a:effectLst>
+        </p:spPr>
+      </p:sp>
+      <p:sp>
+        <p:nvSpPr>
+          <p:cNvPr id="27" name="Text 25"/>
+          <p:cNvSpPr/>
+          <p:nvPr/>
+        </p:nvSpPr>
+        <p:spPr>
+          <a:xfrm>
+            <a:off x="6998818" y="2258568"/>
+            <a:ext cx="1581912" cy="292608"/>
+          </a:xfrm>
+          <a:prstGeom prst="rect">
+            <a:avLst/>
+          </a:prstGeom>
+          <a:noFill/>
+          <a:ln/>
+        </p:spPr>
+        <p:txBody>
+          <a:bodyPr wrap="square" lIns="0" tIns="0" rIns="0" bIns="0" rtlCol="0" anchor="ctr"/>
+          <a:lstStyle/>
+          <a:p>
+            <a:pPr algn="ctr" indent="0" marL="0">
+              <a:buNone/>
+            </a:pPr>
+            <a:r>
+              <a:rPr lang="en-US" sz="1300" b="1" dirty="0">
+                <a:solidFill>
+                  <a:srgbClr val="9D174D"/>
+                </a:solidFill>
+                <a:latin typeface="Trebuchet MS" pitchFamily="34" charset="0"/>
+                <a:ea typeface="Trebuchet MS" pitchFamily="34" charset="-122"/>
+                <a:cs typeface="Trebuchet MS" pitchFamily="34" charset="-120"/>
+              </a:rPr>
+              <a:t>ly</a:t>
+            </a:r>
+            <a:endParaRPr lang="en-US" sz="1300" dirty="0"/>
+          </a:p>
+        </p:txBody>
+      </p:sp>
+      <p:sp>
+        <p:nvSpPr>
+          <p:cNvPr id="28" name="Text 26"/>
+          <p:cNvSpPr/>
+          <p:nvPr/>
+        </p:nvSpPr>
+        <p:spPr>
+          <a:xfrm>
+            <a:off x="6998818" y="2569464"/>
+            <a:ext cx="1581912" cy="201168"/>
+          </a:xfrm>
+          <a:prstGeom prst="rect">
+            <a:avLst/>
+          </a:prstGeom>
+          <a:noFill/>
+          <a:ln/>
+        </p:spPr>
+        <p:txBody>
+          <a:bodyPr wrap="square" lIns="0" tIns="0" rIns="0" bIns="0" rtlCol="0" anchor="t"/>
+          <a:lstStyle/>
+          <a:p>
+            <a:pPr algn="ctr" indent="0" marL="0">
+              <a:buNone/>
+            </a:pPr>
+            <a:r>
+              <a:rPr lang="en-US" sz="850" dirty="0">
+                <a:solidFill>
+                  <a:srgbClr val="475569"/>
+                </a:solidFill>
+                <a:latin typeface="Calibri" pitchFamily="34" charset="0"/>
+                <a:ea typeface="Calibri" pitchFamily="34" charset="-122"/>
+                <a:cs typeface="Calibri" pitchFamily="34" charset="-120"/>
+              </a:rPr>
+              <a:t>in a certain way</a:t>
+            </a:r>
+            <a:endParaRPr lang="en-US" sz="850" dirty="0"/>
+          </a:p>
+        </p:txBody>
+      </p:sp>
+      <p:sp>
+        <p:nvSpPr>
+          <p:cNvPr id="29" name="Shape 27"/>
+          <p:cNvSpPr/>
+          <p:nvPr/>
+        </p:nvSpPr>
+        <p:spPr>
+          <a:xfrm>
             <a:off x="365760" y="3273552"/>
             <a:ext cx="1371600" cy="658368"/>
           </a:xfrm>
@@ -28902,7 +29021,7 @@
       </p:sp>
       <p:sp>
         <p:nvSpPr>
-          <p:cNvPr id="27" name="Text 25"/>
+          <p:cNvPr id="30" name="Text 28"/>
           <p:cNvSpPr/>
           <p:nvPr/>
         </p:nvSpPr>
@@ -28941,7 +29060,7 @@
       </p:sp>
       <p:sp>
         <p:nvSpPr>
-          <p:cNvPr id="28" name="Shape 26"/>
+          <p:cNvPr id="31" name="Shape 29"/>
           <p:cNvSpPr/>
           <p:nvPr/>
         </p:nvSpPr>
@@ -28968,14 +29087,14 @@
       </p:sp>
       <p:sp>
         <p:nvSpPr>
-          <p:cNvPr id="29" name="Shape 27"/>
-          <p:cNvSpPr/>
-          <p:nvPr/>
-        </p:nvSpPr>
-        <p:spPr>
-          <a:xfrm>
-            <a:off x="2313432" y="3364992"/>
-            <a:ext cx="1645920" cy="475488"/>
+          <p:cNvPr id="32" name="Shape 30"/>
+          <p:cNvSpPr/>
+          <p:nvPr/>
+        </p:nvSpPr>
+        <p:spPr>
+          <a:xfrm>
+            <a:off x="1975104" y="3364992"/>
+            <a:ext cx="1554480" cy="475488"/>
           </a:xfrm>
           <a:prstGeom prst="rect">
             <a:avLst>
@@ -28995,14 +29114,14 @@
       </p:sp>
       <p:sp>
         <p:nvSpPr>
-          <p:cNvPr id="30" name="Text 28"/>
-          <p:cNvSpPr/>
-          <p:nvPr/>
-        </p:nvSpPr>
-        <p:spPr>
-          <a:xfrm>
-            <a:off x="2313432" y="3364992"/>
-            <a:ext cx="1645920" cy="475488"/>
+          <p:cNvPr id="33" name="Text 31"/>
+          <p:cNvSpPr/>
+          <p:nvPr/>
+        </p:nvSpPr>
+        <p:spPr>
+          <a:xfrm>
+            <a:off x="1975104" y="3364992"/>
+            <a:ext cx="1554480" cy="475488"/>
           </a:xfrm>
           <a:prstGeom prst="rect">
             <a:avLst/>
@@ -29034,14 +29153,14 @@
       </p:sp>
       <p:sp>
         <p:nvSpPr>
-          <p:cNvPr id="31" name="Text 29"/>
-          <p:cNvSpPr/>
-          <p:nvPr/>
-        </p:nvSpPr>
-        <p:spPr>
-          <a:xfrm>
-            <a:off x="3959352" y="3364992"/>
-            <a:ext cx="411480" cy="475488"/>
+          <p:cNvPr id="34" name="Text 32"/>
+          <p:cNvSpPr/>
+          <p:nvPr/>
+        </p:nvSpPr>
+        <p:spPr>
+          <a:xfrm>
+            <a:off x="3529584" y="3364992"/>
+            <a:ext cx="73152" cy="475488"/>
           </a:xfrm>
           <a:prstGeom prst="rect">
             <a:avLst/>
@@ -29073,14 +29192,14 @@
       </p:sp>
       <p:sp>
         <p:nvSpPr>
-          <p:cNvPr id="32" name="Shape 30"/>
-          <p:cNvSpPr/>
-          <p:nvPr/>
-        </p:nvSpPr>
-        <p:spPr>
-          <a:xfrm>
-            <a:off x="4370832" y="3364992"/>
-            <a:ext cx="1645920" cy="475488"/>
+          <p:cNvPr id="35" name="Shape 33"/>
+          <p:cNvSpPr/>
+          <p:nvPr/>
+        </p:nvSpPr>
+        <p:spPr>
+          <a:xfrm>
+            <a:off x="3602736" y="3364992"/>
+            <a:ext cx="1554480" cy="475488"/>
           </a:xfrm>
           <a:prstGeom prst="rect">
             <a:avLst>
@@ -29100,14 +29219,14 @@
       </p:sp>
       <p:sp>
         <p:nvSpPr>
-          <p:cNvPr id="33" name="Text 31"/>
-          <p:cNvSpPr/>
-          <p:nvPr/>
-        </p:nvSpPr>
-        <p:spPr>
-          <a:xfrm>
-            <a:off x="4370832" y="3364992"/>
-            <a:ext cx="1645920" cy="475488"/>
+          <p:cNvPr id="36" name="Text 34"/>
+          <p:cNvSpPr/>
+          <p:nvPr/>
+        </p:nvSpPr>
+        <p:spPr>
+          <a:xfrm>
+            <a:off x="3602736" y="3364992"/>
+            <a:ext cx="1554480" cy="475488"/>
           </a:xfrm>
           <a:prstGeom prst="rect">
             <a:avLst/>
@@ -29139,14 +29258,14 @@
       </p:sp>
       <p:sp>
         <p:nvSpPr>
-          <p:cNvPr id="34" name="Text 32"/>
-          <p:cNvSpPr/>
-          <p:nvPr/>
-        </p:nvSpPr>
-        <p:spPr>
-          <a:xfrm>
-            <a:off x="6016752" y="3364992"/>
-            <a:ext cx="411480" cy="475488"/>
+          <p:cNvPr id="37" name="Text 35"/>
+          <p:cNvSpPr/>
+          <p:nvPr/>
+        </p:nvSpPr>
+        <p:spPr>
+          <a:xfrm>
+            <a:off x="5157216" y="3364992"/>
+            <a:ext cx="73152" cy="475488"/>
           </a:xfrm>
           <a:prstGeom prst="rect">
             <a:avLst/>
@@ -29178,14 +29297,14 @@
       </p:sp>
       <p:sp>
         <p:nvSpPr>
-          <p:cNvPr id="35" name="Shape 33"/>
-          <p:cNvSpPr/>
-          <p:nvPr/>
-        </p:nvSpPr>
-        <p:spPr>
-          <a:xfrm>
-            <a:off x="6428232" y="3364992"/>
-            <a:ext cx="1645920" cy="475488"/>
+          <p:cNvPr id="38" name="Shape 36"/>
+          <p:cNvSpPr/>
+          <p:nvPr/>
+        </p:nvSpPr>
+        <p:spPr>
+          <a:xfrm>
+            <a:off x="5230368" y="3364992"/>
+            <a:ext cx="1554480" cy="475488"/>
           </a:xfrm>
           <a:prstGeom prst="rect">
             <a:avLst>
@@ -29205,14 +29324,14 @@
       </p:sp>
       <p:sp>
         <p:nvSpPr>
-          <p:cNvPr id="36" name="Text 34"/>
-          <p:cNvSpPr/>
-          <p:nvPr/>
-        </p:nvSpPr>
-        <p:spPr>
-          <a:xfrm>
-            <a:off x="6428232" y="3364992"/>
-            <a:ext cx="1645920" cy="475488"/>
+          <p:cNvPr id="39" name="Text 37"/>
+          <p:cNvSpPr/>
+          <p:nvPr/>
+        </p:nvSpPr>
+        <p:spPr>
+          <a:xfrm>
+            <a:off x="5230368" y="3364992"/>
+            <a:ext cx="1554480" cy="475488"/>
           </a:xfrm>
           <a:prstGeom prst="rect">
             <a:avLst/>
@@ -29244,7 +29363,112 @@
       </p:sp>
       <p:sp>
         <p:nvSpPr>
-          <p:cNvPr id="37" name="Shape 35"/>
+          <p:cNvPr id="40" name="Text 38"/>
+          <p:cNvSpPr/>
+          <p:nvPr/>
+        </p:nvSpPr>
+        <p:spPr>
+          <a:xfrm>
+            <a:off x="6784848" y="3364992"/>
+            <a:ext cx="73152" cy="475488"/>
+          </a:xfrm>
+          <a:prstGeom prst="rect">
+            <a:avLst/>
+          </a:prstGeom>
+          <a:noFill/>
+          <a:ln/>
+        </p:spPr>
+        <p:txBody>
+          <a:bodyPr wrap="square" lIns="0" tIns="0" rIns="0" bIns="0" rtlCol="0" anchor="ctr"/>
+          <a:lstStyle/>
+          <a:p>
+            <a:pPr algn="ctr" indent="0" marL="0">
+              <a:buNone/>
+            </a:pPr>
+            <a:r>
+              <a:rPr lang="en-US" sz="1600" b="1" dirty="0">
+                <a:solidFill>
+                  <a:srgbClr val="0D9488"/>
+                </a:solidFill>
+                <a:latin typeface="Trebuchet MS" pitchFamily="34" charset="0"/>
+                <a:ea typeface="Trebuchet MS" pitchFamily="34" charset="-122"/>
+                <a:cs typeface="Trebuchet MS" pitchFamily="34" charset="-120"/>
+              </a:rPr>
+              <a:t>·</a:t>
+            </a:r>
+            <a:endParaRPr lang="en-US" sz="1600" dirty="0"/>
+          </a:p>
+        </p:txBody>
+      </p:sp>
+      <p:sp>
+        <p:nvSpPr>
+          <p:cNvPr id="41" name="Shape 39"/>
+          <p:cNvSpPr/>
+          <p:nvPr/>
+        </p:nvSpPr>
+        <p:spPr>
+          <a:xfrm>
+            <a:off x="6858000" y="3364992"/>
+            <a:ext cx="1554480" cy="475488"/>
+          </a:xfrm>
+          <a:prstGeom prst="rect">
+            <a:avLst>
+              <a:gd name="adj" fmla="val 9615"/>
+            </a:avLst>
+          </a:prstGeom>
+          <a:solidFill>
+            <a:srgbClr val="FFFFFF"/>
+          </a:solidFill>
+          <a:ln w="12700">
+            <a:solidFill>
+              <a:srgbClr val="0D9488"/>
+            </a:solidFill>
+            <a:prstDash val="solid"/>
+          </a:ln>
+        </p:spPr>
+      </p:sp>
+      <p:sp>
+        <p:nvSpPr>
+          <p:cNvPr id="42" name="Text 40"/>
+          <p:cNvSpPr/>
+          <p:nvPr/>
+        </p:nvSpPr>
+        <p:spPr>
+          <a:xfrm>
+            <a:off x="6858000" y="3364992"/>
+            <a:ext cx="1554480" cy="475488"/>
+          </a:xfrm>
+          <a:prstGeom prst="rect">
+            <a:avLst/>
+          </a:prstGeom>
+          <a:noFill/>
+          <a:ln/>
+        </p:spPr>
+        <p:txBody>
+          <a:bodyPr wrap="square" lIns="0" tIns="0" rIns="0" bIns="0" rtlCol="0" anchor="ctr"/>
+          <a:lstStyle/>
+          <a:p>
+            <a:pPr algn="ctr" indent="0" marL="0">
+              <a:buNone/>
+            </a:pPr>
+            <a:r>
+              <a:rPr lang="en-US" sz="1400" b="1" dirty="0">
+                <a:solidFill>
+                  <a:srgbClr val="0D9488"/>
+                </a:solidFill>
+                <a:latin typeface="Trebuchet MS" pitchFamily="34" charset="0"/>
+                <a:ea typeface="Trebuchet MS" pitchFamily="34" charset="-122"/>
+                <a:cs typeface="Trebuchet MS" pitchFamily="34" charset="-120"/>
+              </a:rPr>
+              <a:t>ly</a:t>
+            </a:r>
+            <a:endParaRPr lang="en-US" sz="1400" dirty="0"/>
+          </a:p>
+        </p:txBody>
+      </p:sp>
+      <p:sp>
+        <p:nvSpPr>
+          <p:cNvPr id="43" name="Shape 41"/>
           <p:cNvSpPr/>
           <p:nvPr/>
         </p:nvSpPr>
@@ -29271,7 +29495,7 @@
       </p:sp>
       <p:sp>
         <p:nvSpPr>
-          <p:cNvPr id="38" name="Text 36"/>
+          <p:cNvPr id="44" name="Text 42"/>
           <p:cNvSpPr/>
           <p:nvPr/>
         </p:nvSpPr>
@@ -29310,7 +29534,7 @@
       </p:sp>
       <p:sp>
         <p:nvSpPr>
-          <p:cNvPr id="39" name="Shape 37"/>
+          <p:cNvPr id="45" name="Shape 43"/>
           <p:cNvSpPr/>
           <p:nvPr/>
         </p:nvSpPr>
@@ -29337,7 +29561,7 @@
       </p:sp>
       <p:sp>
         <p:nvSpPr>
-          <p:cNvPr id="40" name="Text 38"/>
+          <p:cNvPr id="46" name="Text 44"/>
           <p:cNvSpPr/>
           <p:nvPr/>
         </p:nvSpPr>
@@ -29660,7 +29884,7 @@
                 <a:ea typeface="Calibri" pitchFamily="34" charset="-122"/>
                 <a:cs typeface="Calibri" pitchFamily="34" charset="-120"/>
               </a:rPr>
-              <a:t>Word Labs  •  wordlabs.app  •  Root: 'collect' = gather or bring together</a:t>
+              <a:t>Word Labs  •  wordlabs.app  •  Root: 'collect' = gather together, bring together</a:t>
             </a:r>
             <a:endParaRPr lang="en-US" sz="800" dirty="0"/>
           </a:p>
@@ -29799,7 +30023,7 @@
                 <a:ea typeface="Trebuchet MS" pitchFamily="34" charset="-122"/>
                 <a:cs typeface="Trebuchet MS" pitchFamily="34" charset="-120"/>
               </a:rPr>
-              <a:t>collective</a:t>
+              <a:t>collectively</a:t>
             </a:r>
             <a:endParaRPr lang="en-US" sz="2800" dirty="0"/>
           </a:p>
@@ -29879,8 +30103,8 @@
         </p:nvSpPr>
         <p:spPr>
           <a:xfrm>
-            <a:off x="2221992" y="2258568"/>
-            <a:ext cx="1828800" cy="292608"/>
+            <a:off x="1989734" y="2258568"/>
+            <a:ext cx="1581912" cy="292608"/>
           </a:xfrm>
           <a:prstGeom prst="rect">
             <a:avLst>
@@ -29913,8 +30137,8 @@
         </p:nvSpPr>
         <p:spPr>
           <a:xfrm>
-            <a:off x="2221992" y="2258568"/>
-            <a:ext cx="1828800" cy="292608"/>
+            <a:off x="1989734" y="2258568"/>
+            <a:ext cx="1581912" cy="292608"/>
           </a:xfrm>
           <a:prstGeom prst="rect">
             <a:avLst/>
@@ -29952,8 +30176,8 @@
         </p:nvSpPr>
         <p:spPr>
           <a:xfrm>
-            <a:off x="2221992" y="2569464"/>
-            <a:ext cx="1828800" cy="201168"/>
+            <a:off x="1989734" y="2569464"/>
+            <a:ext cx="1581912" cy="201168"/>
           </a:xfrm>
           <a:prstGeom prst="rect">
             <a:avLst/>
@@ -29991,8 +30215,8 @@
         </p:nvSpPr>
         <p:spPr>
           <a:xfrm>
-            <a:off x="2221992" y="2752344"/>
-            <a:ext cx="1828800" cy="182880"/>
+            <a:off x="1989734" y="2752344"/>
+            <a:ext cx="1581912" cy="182880"/>
           </a:xfrm>
           <a:prstGeom prst="rect">
             <a:avLst/>
@@ -30030,8 +30254,8 @@
         </p:nvSpPr>
         <p:spPr>
           <a:xfrm>
-            <a:off x="4370832" y="2258568"/>
-            <a:ext cx="1828800" cy="292608"/>
+            <a:off x="3659429" y="2258568"/>
+            <a:ext cx="1581912" cy="292608"/>
           </a:xfrm>
           <a:prstGeom prst="rect">
             <a:avLst>
@@ -30064,8 +30288,8 @@
         </p:nvSpPr>
         <p:spPr>
           <a:xfrm>
-            <a:off x="4370832" y="2258568"/>
-            <a:ext cx="1828800" cy="292608"/>
+            <a:off x="3659429" y="2258568"/>
+            <a:ext cx="1581912" cy="292608"/>
           </a:xfrm>
           <a:prstGeom prst="rect">
             <a:avLst/>
@@ -30103,8 +30327,8 @@
         </p:nvSpPr>
         <p:spPr>
           <a:xfrm>
-            <a:off x="4370832" y="2569464"/>
-            <a:ext cx="1828800" cy="201168"/>
+            <a:off x="3659429" y="2569464"/>
+            <a:ext cx="1581912" cy="201168"/>
           </a:xfrm>
           <a:prstGeom prst="rect">
             <a:avLst/>
@@ -30142,8 +30366,8 @@
         </p:nvSpPr>
         <p:spPr>
           <a:xfrm>
-            <a:off x="6519672" y="2258568"/>
-            <a:ext cx="1828800" cy="292608"/>
+            <a:off x="5329123" y="2258568"/>
+            <a:ext cx="1581912" cy="292608"/>
           </a:xfrm>
           <a:prstGeom prst="rect">
             <a:avLst>
@@ -30176,8 +30400,8 @@
         </p:nvSpPr>
         <p:spPr>
           <a:xfrm>
-            <a:off x="6519672" y="2258568"/>
-            <a:ext cx="1828800" cy="292608"/>
+            <a:off x="5329123" y="2258568"/>
+            <a:ext cx="1581912" cy="292608"/>
           </a:xfrm>
           <a:prstGeom prst="rect">
             <a:avLst/>
@@ -30215,8 +30439,8 @@
         </p:nvSpPr>
         <p:spPr>
           <a:xfrm>
-            <a:off x="6519672" y="2569464"/>
-            <a:ext cx="1828800" cy="201168"/>
+            <a:off x="5329123" y="2569464"/>
+            <a:ext cx="1581912" cy="201168"/>
           </a:xfrm>
           <a:prstGeom prst="rect">
             <a:avLst/>
@@ -30254,6 +30478,118 @@
         </p:nvSpPr>
         <p:spPr>
           <a:xfrm>
+            <a:off x="6998818" y="2258568"/>
+            <a:ext cx="1581912" cy="292608"/>
+          </a:xfrm>
+          <a:prstGeom prst="rect">
+            <a:avLst>
+              <a:gd name="adj" fmla="val 25000"/>
+            </a:avLst>
+          </a:prstGeom>
+          <a:solidFill>
+            <a:srgbClr val="FCE7F3"/>
+          </a:solidFill>
+          <a:ln w="19050">
+            <a:solidFill>
+              <a:srgbClr val="DB2777"/>
+            </a:solidFill>
+            <a:prstDash val="solid"/>
+          </a:ln>
+          <a:effectLst>
+            <a:outerShdw sx="100000" sy="100000" kx="0" ky="0" algn="bl" rotWithShape="0" blurRad="101600" dist="38100" dir="8100000">
+              <a:srgbClr val="000000">
+                <a:alpha val="12000"/>
+              </a:srgbClr>
+            </a:outerShdw>
+          </a:effectLst>
+        </p:spPr>
+      </p:sp>
+      <p:sp>
+        <p:nvSpPr>
+          <p:cNvPr id="27" name="Text 25"/>
+          <p:cNvSpPr/>
+          <p:nvPr/>
+        </p:nvSpPr>
+        <p:spPr>
+          <a:xfrm>
+            <a:off x="6998818" y="2258568"/>
+            <a:ext cx="1581912" cy="292608"/>
+          </a:xfrm>
+          <a:prstGeom prst="rect">
+            <a:avLst/>
+          </a:prstGeom>
+          <a:noFill/>
+          <a:ln/>
+        </p:spPr>
+        <p:txBody>
+          <a:bodyPr wrap="square" lIns="0" tIns="0" rIns="0" bIns="0" rtlCol="0" anchor="ctr"/>
+          <a:lstStyle/>
+          <a:p>
+            <a:pPr algn="ctr" indent="0" marL="0">
+              <a:buNone/>
+            </a:pPr>
+            <a:r>
+              <a:rPr lang="en-US" sz="1300" b="1" dirty="0">
+                <a:solidFill>
+                  <a:srgbClr val="9D174D"/>
+                </a:solidFill>
+                <a:latin typeface="Trebuchet MS" pitchFamily="34" charset="0"/>
+                <a:ea typeface="Trebuchet MS" pitchFamily="34" charset="-122"/>
+                <a:cs typeface="Trebuchet MS" pitchFamily="34" charset="-120"/>
+              </a:rPr>
+              <a:t>ly</a:t>
+            </a:r>
+            <a:endParaRPr lang="en-US" sz="1300" dirty="0"/>
+          </a:p>
+        </p:txBody>
+      </p:sp>
+      <p:sp>
+        <p:nvSpPr>
+          <p:cNvPr id="28" name="Text 26"/>
+          <p:cNvSpPr/>
+          <p:nvPr/>
+        </p:nvSpPr>
+        <p:spPr>
+          <a:xfrm>
+            <a:off x="6998818" y="2569464"/>
+            <a:ext cx="1581912" cy="201168"/>
+          </a:xfrm>
+          <a:prstGeom prst="rect">
+            <a:avLst/>
+          </a:prstGeom>
+          <a:noFill/>
+          <a:ln/>
+        </p:spPr>
+        <p:txBody>
+          <a:bodyPr wrap="square" lIns="0" tIns="0" rIns="0" bIns="0" rtlCol="0" anchor="t"/>
+          <a:lstStyle/>
+          <a:p>
+            <a:pPr algn="ctr" indent="0" marL="0">
+              <a:buNone/>
+            </a:pPr>
+            <a:r>
+              <a:rPr lang="en-US" sz="850" dirty="0">
+                <a:solidFill>
+                  <a:srgbClr val="475569"/>
+                </a:solidFill>
+                <a:latin typeface="Calibri" pitchFamily="34" charset="0"/>
+                <a:ea typeface="Calibri" pitchFamily="34" charset="-122"/>
+                <a:cs typeface="Calibri" pitchFamily="34" charset="-120"/>
+              </a:rPr>
+              <a:t>in a certain way</a:t>
+            </a:r>
+            <a:endParaRPr lang="en-US" sz="850" dirty="0"/>
+          </a:p>
+        </p:txBody>
+      </p:sp>
+      <p:sp>
+        <p:nvSpPr>
+          <p:cNvPr id="29" name="Shape 27"/>
+          <p:cNvSpPr/>
+          <p:nvPr/>
+        </p:nvSpPr>
+        <p:spPr>
+          <a:xfrm>
             <a:off x="365760" y="3273552"/>
             <a:ext cx="1371600" cy="658368"/>
           </a:xfrm>
@@ -30275,7 +30611,7 @@
       </p:sp>
       <p:sp>
         <p:nvSpPr>
-          <p:cNvPr id="27" name="Text 25"/>
+          <p:cNvPr id="30" name="Text 28"/>
           <p:cNvSpPr/>
           <p:nvPr/>
         </p:nvSpPr>
@@ -30314,7 +30650,7 @@
       </p:sp>
       <p:sp>
         <p:nvSpPr>
-          <p:cNvPr id="28" name="Shape 26"/>
+          <p:cNvPr id="31" name="Shape 29"/>
           <p:cNvSpPr/>
           <p:nvPr/>
         </p:nvSpPr>
@@ -30341,14 +30677,14 @@
       </p:sp>
       <p:sp>
         <p:nvSpPr>
-          <p:cNvPr id="29" name="Shape 27"/>
-          <p:cNvSpPr/>
-          <p:nvPr/>
-        </p:nvSpPr>
-        <p:spPr>
-          <a:xfrm>
-            <a:off x="2313432" y="3364992"/>
-            <a:ext cx="1645920" cy="475488"/>
+          <p:cNvPr id="32" name="Shape 30"/>
+          <p:cNvSpPr/>
+          <p:nvPr/>
+        </p:nvSpPr>
+        <p:spPr>
+          <a:xfrm>
+            <a:off x="1975104" y="3364992"/>
+            <a:ext cx="1554480" cy="475488"/>
           </a:xfrm>
           <a:prstGeom prst="rect">
             <a:avLst>
@@ -30368,14 +30704,14 @@
       </p:sp>
       <p:sp>
         <p:nvSpPr>
-          <p:cNvPr id="30" name="Text 28"/>
-          <p:cNvSpPr/>
-          <p:nvPr/>
-        </p:nvSpPr>
-        <p:spPr>
-          <a:xfrm>
-            <a:off x="2313432" y="3364992"/>
-            <a:ext cx="1645920" cy="475488"/>
+          <p:cNvPr id="33" name="Text 31"/>
+          <p:cNvSpPr/>
+          <p:nvPr/>
+        </p:nvSpPr>
+        <p:spPr>
+          <a:xfrm>
+            <a:off x="1975104" y="3364992"/>
+            <a:ext cx="1554480" cy="475488"/>
           </a:xfrm>
           <a:prstGeom prst="rect">
             <a:avLst/>
@@ -30407,14 +30743,14 @@
       </p:sp>
       <p:sp>
         <p:nvSpPr>
-          <p:cNvPr id="31" name="Text 29"/>
-          <p:cNvSpPr/>
-          <p:nvPr/>
-        </p:nvSpPr>
-        <p:spPr>
-          <a:xfrm>
-            <a:off x="3959352" y="3364992"/>
-            <a:ext cx="411480" cy="475488"/>
+          <p:cNvPr id="34" name="Text 32"/>
+          <p:cNvSpPr/>
+          <p:nvPr/>
+        </p:nvSpPr>
+        <p:spPr>
+          <a:xfrm>
+            <a:off x="3529584" y="3364992"/>
+            <a:ext cx="73152" cy="475488"/>
           </a:xfrm>
           <a:prstGeom prst="rect">
             <a:avLst/>
@@ -30446,14 +30782,14 @@
       </p:sp>
       <p:sp>
         <p:nvSpPr>
-          <p:cNvPr id="32" name="Shape 30"/>
-          <p:cNvSpPr/>
-          <p:nvPr/>
-        </p:nvSpPr>
-        <p:spPr>
-          <a:xfrm>
-            <a:off x="4370832" y="3364992"/>
-            <a:ext cx="1645920" cy="475488"/>
+          <p:cNvPr id="35" name="Shape 33"/>
+          <p:cNvSpPr/>
+          <p:nvPr/>
+        </p:nvSpPr>
+        <p:spPr>
+          <a:xfrm>
+            <a:off x="3602736" y="3364992"/>
+            <a:ext cx="1554480" cy="475488"/>
           </a:xfrm>
           <a:prstGeom prst="rect">
             <a:avLst>
@@ -30473,14 +30809,14 @@
       </p:sp>
       <p:sp>
         <p:nvSpPr>
-          <p:cNvPr id="33" name="Text 31"/>
-          <p:cNvSpPr/>
-          <p:nvPr/>
-        </p:nvSpPr>
-        <p:spPr>
-          <a:xfrm>
-            <a:off x="4370832" y="3364992"/>
-            <a:ext cx="1645920" cy="475488"/>
+          <p:cNvPr id="36" name="Text 34"/>
+          <p:cNvSpPr/>
+          <p:nvPr/>
+        </p:nvSpPr>
+        <p:spPr>
+          <a:xfrm>
+            <a:off x="3602736" y="3364992"/>
+            <a:ext cx="1554480" cy="475488"/>
           </a:xfrm>
           <a:prstGeom prst="rect">
             <a:avLst/>
@@ -30512,14 +30848,14 @@
       </p:sp>
       <p:sp>
         <p:nvSpPr>
-          <p:cNvPr id="34" name="Text 32"/>
-          <p:cNvSpPr/>
-          <p:nvPr/>
-        </p:nvSpPr>
-        <p:spPr>
-          <a:xfrm>
-            <a:off x="6016752" y="3364992"/>
-            <a:ext cx="411480" cy="475488"/>
+          <p:cNvPr id="37" name="Text 35"/>
+          <p:cNvSpPr/>
+          <p:nvPr/>
+        </p:nvSpPr>
+        <p:spPr>
+          <a:xfrm>
+            <a:off x="5157216" y="3364992"/>
+            <a:ext cx="73152" cy="475488"/>
           </a:xfrm>
           <a:prstGeom prst="rect">
             <a:avLst/>
@@ -30551,14 +30887,14 @@
       </p:sp>
       <p:sp>
         <p:nvSpPr>
-          <p:cNvPr id="35" name="Shape 33"/>
-          <p:cNvSpPr/>
-          <p:nvPr/>
-        </p:nvSpPr>
-        <p:spPr>
-          <a:xfrm>
-            <a:off x="6428232" y="3364992"/>
-            <a:ext cx="1645920" cy="475488"/>
+          <p:cNvPr id="38" name="Shape 36"/>
+          <p:cNvSpPr/>
+          <p:nvPr/>
+        </p:nvSpPr>
+        <p:spPr>
+          <a:xfrm>
+            <a:off x="5230368" y="3364992"/>
+            <a:ext cx="1554480" cy="475488"/>
           </a:xfrm>
           <a:prstGeom prst="rect">
             <a:avLst>
@@ -30578,14 +30914,14 @@
       </p:sp>
       <p:sp>
         <p:nvSpPr>
-          <p:cNvPr id="36" name="Text 34"/>
-          <p:cNvSpPr/>
-          <p:nvPr/>
-        </p:nvSpPr>
-        <p:spPr>
-          <a:xfrm>
-            <a:off x="6428232" y="3364992"/>
-            <a:ext cx="1645920" cy="475488"/>
+          <p:cNvPr id="39" name="Text 37"/>
+          <p:cNvSpPr/>
+          <p:nvPr/>
+        </p:nvSpPr>
+        <p:spPr>
+          <a:xfrm>
+            <a:off x="5230368" y="3364992"/>
+            <a:ext cx="1554480" cy="475488"/>
           </a:xfrm>
           <a:prstGeom prst="rect">
             <a:avLst/>
@@ -30617,7 +30953,112 @@
       </p:sp>
       <p:sp>
         <p:nvSpPr>
-          <p:cNvPr id="37" name="Shape 35"/>
+          <p:cNvPr id="40" name="Text 38"/>
+          <p:cNvSpPr/>
+          <p:nvPr/>
+        </p:nvSpPr>
+        <p:spPr>
+          <a:xfrm>
+            <a:off x="6784848" y="3364992"/>
+            <a:ext cx="73152" cy="475488"/>
+          </a:xfrm>
+          <a:prstGeom prst="rect">
+            <a:avLst/>
+          </a:prstGeom>
+          <a:noFill/>
+          <a:ln/>
+        </p:spPr>
+        <p:txBody>
+          <a:bodyPr wrap="square" lIns="0" tIns="0" rIns="0" bIns="0" rtlCol="0" anchor="ctr"/>
+          <a:lstStyle/>
+          <a:p>
+            <a:pPr algn="ctr" indent="0" marL="0">
+              <a:buNone/>
+            </a:pPr>
+            <a:r>
+              <a:rPr lang="en-US" sz="1600" b="1" dirty="0">
+                <a:solidFill>
+                  <a:srgbClr val="0D9488"/>
+                </a:solidFill>
+                <a:latin typeface="Trebuchet MS" pitchFamily="34" charset="0"/>
+                <a:ea typeface="Trebuchet MS" pitchFamily="34" charset="-122"/>
+                <a:cs typeface="Trebuchet MS" pitchFamily="34" charset="-120"/>
+              </a:rPr>
+              <a:t>·</a:t>
+            </a:r>
+            <a:endParaRPr lang="en-US" sz="1600" dirty="0"/>
+          </a:p>
+        </p:txBody>
+      </p:sp>
+      <p:sp>
+        <p:nvSpPr>
+          <p:cNvPr id="41" name="Shape 39"/>
+          <p:cNvSpPr/>
+          <p:nvPr/>
+        </p:nvSpPr>
+        <p:spPr>
+          <a:xfrm>
+            <a:off x="6858000" y="3364992"/>
+            <a:ext cx="1554480" cy="475488"/>
+          </a:xfrm>
+          <a:prstGeom prst="rect">
+            <a:avLst>
+              <a:gd name="adj" fmla="val 9615"/>
+            </a:avLst>
+          </a:prstGeom>
+          <a:solidFill>
+            <a:srgbClr val="FFFFFF"/>
+          </a:solidFill>
+          <a:ln w="12700">
+            <a:solidFill>
+              <a:srgbClr val="0D9488"/>
+            </a:solidFill>
+            <a:prstDash val="solid"/>
+          </a:ln>
+        </p:spPr>
+      </p:sp>
+      <p:sp>
+        <p:nvSpPr>
+          <p:cNvPr id="42" name="Text 40"/>
+          <p:cNvSpPr/>
+          <p:nvPr/>
+        </p:nvSpPr>
+        <p:spPr>
+          <a:xfrm>
+            <a:off x="6858000" y="3364992"/>
+            <a:ext cx="1554480" cy="475488"/>
+          </a:xfrm>
+          <a:prstGeom prst="rect">
+            <a:avLst/>
+          </a:prstGeom>
+          <a:noFill/>
+          <a:ln/>
+        </p:spPr>
+        <p:txBody>
+          <a:bodyPr wrap="square" lIns="0" tIns="0" rIns="0" bIns="0" rtlCol="0" anchor="ctr"/>
+          <a:lstStyle/>
+          <a:p>
+            <a:pPr algn="ctr" indent="0" marL="0">
+              <a:buNone/>
+            </a:pPr>
+            <a:r>
+              <a:rPr lang="en-US" sz="1400" b="1" dirty="0">
+                <a:solidFill>
+                  <a:srgbClr val="0D9488"/>
+                </a:solidFill>
+                <a:latin typeface="Trebuchet MS" pitchFamily="34" charset="0"/>
+                <a:ea typeface="Trebuchet MS" pitchFamily="34" charset="-122"/>
+                <a:cs typeface="Trebuchet MS" pitchFamily="34" charset="-120"/>
+              </a:rPr>
+              <a:t>ly</a:t>
+            </a:r>
+            <a:endParaRPr lang="en-US" sz="1400" dirty="0"/>
+          </a:p>
+        </p:txBody>
+      </p:sp>
+      <p:sp>
+        <p:nvSpPr>
+          <p:cNvPr id="43" name="Shape 41"/>
           <p:cNvSpPr/>
           <p:nvPr/>
         </p:nvSpPr>
@@ -30644,7 +31085,7 @@
       </p:sp>
       <p:sp>
         <p:nvSpPr>
-          <p:cNvPr id="38" name="Text 36"/>
+          <p:cNvPr id="44" name="Text 42"/>
           <p:cNvSpPr/>
           <p:nvPr/>
         </p:nvSpPr>
@@ -30683,7 +31124,7 @@
       </p:sp>
       <p:sp>
         <p:nvSpPr>
-          <p:cNvPr id="39" name="Shape 37"/>
+          <p:cNvPr id="45" name="Shape 43"/>
           <p:cNvSpPr/>
           <p:nvPr/>
         </p:nvSpPr>
@@ -30710,14 +31151,14 @@
       </p:sp>
       <p:sp>
         <p:nvSpPr>
-          <p:cNvPr id="40" name="Shape 38"/>
-          <p:cNvSpPr/>
-          <p:nvPr/>
-        </p:nvSpPr>
-        <p:spPr>
-          <a:xfrm>
-            <a:off x="1951330" y="4169664"/>
-            <a:ext cx="676656" cy="384048"/>
+          <p:cNvPr id="46" name="Shape 44"/>
+          <p:cNvSpPr/>
+          <p:nvPr/>
+        </p:nvSpPr>
+        <p:spPr>
+          <a:xfrm>
+            <a:off x="1952244" y="4169664"/>
+            <a:ext cx="543652" cy="384048"/>
           </a:xfrm>
           <a:prstGeom prst="rect">
             <a:avLst>
@@ -30737,14 +31178,14 @@
       </p:sp>
       <p:sp>
         <p:nvSpPr>
-          <p:cNvPr id="41" name="Text 39"/>
-          <p:cNvSpPr/>
-          <p:nvPr/>
-        </p:nvSpPr>
-        <p:spPr>
-          <a:xfrm>
-            <a:off x="1951330" y="4169664"/>
-            <a:ext cx="676656" cy="384048"/>
+          <p:cNvPr id="47" name="Text 45"/>
+          <p:cNvSpPr/>
+          <p:nvPr/>
+        </p:nvSpPr>
+        <p:spPr>
+          <a:xfrm>
+            <a:off x="1952244" y="4169664"/>
+            <a:ext cx="543652" cy="384048"/>
           </a:xfrm>
           <a:prstGeom prst="rect">
             <a:avLst/>
@@ -30776,14 +31217,14 @@
       </p:sp>
       <p:sp>
         <p:nvSpPr>
-          <p:cNvPr id="42" name="Text 40"/>
-          <p:cNvSpPr/>
-          <p:nvPr/>
-        </p:nvSpPr>
-        <p:spPr>
-          <a:xfrm>
-            <a:off x="1951330" y="4572000"/>
-            <a:ext cx="676656" cy="219456"/>
+          <p:cNvPr id="48" name="Text 46"/>
+          <p:cNvSpPr/>
+          <p:nvPr/>
+        </p:nvSpPr>
+        <p:spPr>
+          <a:xfrm>
+            <a:off x="1952244" y="4572000"/>
+            <a:ext cx="543652" cy="219456"/>
           </a:xfrm>
           <a:prstGeom prst="rect">
             <a:avLst/>
@@ -30815,14 +31256,14 @@
       </p:sp>
       <p:sp>
         <p:nvSpPr>
-          <p:cNvPr id="43" name="Shape 41"/>
-          <p:cNvSpPr/>
-          <p:nvPr/>
-        </p:nvSpPr>
-        <p:spPr>
-          <a:xfrm>
-            <a:off x="2677363" y="4169664"/>
-            <a:ext cx="676656" cy="384048"/>
+          <p:cNvPr id="49" name="Shape 47"/>
+          <p:cNvSpPr/>
+          <p:nvPr/>
+        </p:nvSpPr>
+        <p:spPr>
+          <a:xfrm>
+            <a:off x="2546188" y="4169664"/>
+            <a:ext cx="543652" cy="384048"/>
           </a:xfrm>
           <a:prstGeom prst="rect">
             <a:avLst>
@@ -30842,14 +31283,14 @@
       </p:sp>
       <p:sp>
         <p:nvSpPr>
-          <p:cNvPr id="44" name="Text 42"/>
-          <p:cNvSpPr/>
-          <p:nvPr/>
-        </p:nvSpPr>
-        <p:spPr>
-          <a:xfrm>
-            <a:off x="2677363" y="4169664"/>
-            <a:ext cx="676656" cy="384048"/>
+          <p:cNvPr id="50" name="Text 48"/>
+          <p:cNvSpPr/>
+          <p:nvPr/>
+        </p:nvSpPr>
+        <p:spPr>
+          <a:xfrm>
+            <a:off x="2546188" y="4169664"/>
+            <a:ext cx="543652" cy="384048"/>
           </a:xfrm>
           <a:prstGeom prst="rect">
             <a:avLst/>
@@ -30881,14 +31322,14 @@
       </p:sp>
       <p:sp>
         <p:nvSpPr>
-          <p:cNvPr id="45" name="Shape 43"/>
-          <p:cNvSpPr/>
-          <p:nvPr/>
-        </p:nvSpPr>
-        <p:spPr>
-          <a:xfrm>
-            <a:off x="3403397" y="4169664"/>
-            <a:ext cx="676656" cy="384048"/>
+          <p:cNvPr id="51" name="Shape 49"/>
+          <p:cNvSpPr/>
+          <p:nvPr/>
+        </p:nvSpPr>
+        <p:spPr>
+          <a:xfrm>
+            <a:off x="3140133" y="4169664"/>
+            <a:ext cx="543652" cy="384048"/>
           </a:xfrm>
           <a:prstGeom prst="rect">
             <a:avLst>
@@ -30908,14 +31349,14 @@
       </p:sp>
       <p:sp>
         <p:nvSpPr>
-          <p:cNvPr id="46" name="Text 44"/>
-          <p:cNvSpPr/>
-          <p:nvPr/>
-        </p:nvSpPr>
-        <p:spPr>
-          <a:xfrm>
-            <a:off x="3403397" y="4169664"/>
-            <a:ext cx="676656" cy="384048"/>
+          <p:cNvPr id="52" name="Text 50"/>
+          <p:cNvSpPr/>
+          <p:nvPr/>
+        </p:nvSpPr>
+        <p:spPr>
+          <a:xfrm>
+            <a:off x="3140133" y="4169664"/>
+            <a:ext cx="543652" cy="384048"/>
           </a:xfrm>
           <a:prstGeom prst="rect">
             <a:avLst/>
@@ -30947,14 +31388,14 @@
       </p:sp>
       <p:sp>
         <p:nvSpPr>
-          <p:cNvPr id="47" name="Shape 45"/>
-          <p:cNvSpPr/>
-          <p:nvPr/>
-        </p:nvSpPr>
-        <p:spPr>
-          <a:xfrm>
-            <a:off x="4129430" y="4169664"/>
-            <a:ext cx="676656" cy="384048"/>
+          <p:cNvPr id="53" name="Shape 51"/>
+          <p:cNvSpPr/>
+          <p:nvPr/>
+        </p:nvSpPr>
+        <p:spPr>
+          <a:xfrm>
+            <a:off x="3734077" y="4169664"/>
+            <a:ext cx="543652" cy="384048"/>
           </a:xfrm>
           <a:prstGeom prst="rect">
             <a:avLst>
@@ -30974,14 +31415,14 @@
       </p:sp>
       <p:sp>
         <p:nvSpPr>
-          <p:cNvPr id="48" name="Text 46"/>
-          <p:cNvSpPr/>
-          <p:nvPr/>
-        </p:nvSpPr>
-        <p:spPr>
-          <a:xfrm>
-            <a:off x="4129430" y="4169664"/>
-            <a:ext cx="676656" cy="384048"/>
+          <p:cNvPr id="54" name="Text 52"/>
+          <p:cNvSpPr/>
+          <p:nvPr/>
+        </p:nvSpPr>
+        <p:spPr>
+          <a:xfrm>
+            <a:off x="3734077" y="4169664"/>
+            <a:ext cx="543652" cy="384048"/>
           </a:xfrm>
           <a:prstGeom prst="rect">
             <a:avLst/>
@@ -31013,14 +31454,14 @@
       </p:sp>
       <p:sp>
         <p:nvSpPr>
-          <p:cNvPr id="49" name="Shape 47"/>
-          <p:cNvSpPr/>
-          <p:nvPr/>
-        </p:nvSpPr>
-        <p:spPr>
-          <a:xfrm>
-            <a:off x="4855464" y="4169664"/>
-            <a:ext cx="676656" cy="384048"/>
+          <p:cNvPr id="55" name="Shape 53"/>
+          <p:cNvSpPr/>
+          <p:nvPr/>
+        </p:nvSpPr>
+        <p:spPr>
+          <a:xfrm>
+            <a:off x="4328021" y="4169664"/>
+            <a:ext cx="543652" cy="384048"/>
           </a:xfrm>
           <a:prstGeom prst="rect">
             <a:avLst>
@@ -31040,14 +31481,14 @@
       </p:sp>
       <p:sp>
         <p:nvSpPr>
-          <p:cNvPr id="50" name="Text 48"/>
-          <p:cNvSpPr/>
-          <p:nvPr/>
-        </p:nvSpPr>
-        <p:spPr>
-          <a:xfrm>
-            <a:off x="4855464" y="4169664"/>
-            <a:ext cx="676656" cy="384048"/>
+          <p:cNvPr id="56" name="Text 54"/>
+          <p:cNvSpPr/>
+          <p:nvPr/>
+        </p:nvSpPr>
+        <p:spPr>
+          <a:xfrm>
+            <a:off x="4328021" y="4169664"/>
+            <a:ext cx="543652" cy="384048"/>
           </a:xfrm>
           <a:prstGeom prst="rect">
             <a:avLst/>
@@ -31079,14 +31520,14 @@
       </p:sp>
       <p:sp>
         <p:nvSpPr>
-          <p:cNvPr id="51" name="Text 49"/>
-          <p:cNvSpPr/>
-          <p:nvPr/>
-        </p:nvSpPr>
-        <p:spPr>
-          <a:xfrm>
-            <a:off x="4855464" y="4572000"/>
-            <a:ext cx="676656" cy="219456"/>
+          <p:cNvPr id="57" name="Text 55"/>
+          <p:cNvSpPr/>
+          <p:nvPr/>
+        </p:nvSpPr>
+        <p:spPr>
+          <a:xfrm>
+            <a:off x="4328021" y="4572000"/>
+            <a:ext cx="543652" cy="219456"/>
           </a:xfrm>
           <a:prstGeom prst="rect">
             <a:avLst/>
@@ -31118,14 +31559,14 @@
       </p:sp>
       <p:sp>
         <p:nvSpPr>
-          <p:cNvPr id="52" name="Shape 50"/>
-          <p:cNvSpPr/>
-          <p:nvPr/>
-        </p:nvSpPr>
-        <p:spPr>
-          <a:xfrm>
-            <a:off x="5581498" y="4169664"/>
-            <a:ext cx="676656" cy="384048"/>
+          <p:cNvPr id="58" name="Shape 56"/>
+          <p:cNvSpPr/>
+          <p:nvPr/>
+        </p:nvSpPr>
+        <p:spPr>
+          <a:xfrm>
+            <a:off x="4921966" y="4169664"/>
+            <a:ext cx="543652" cy="384048"/>
           </a:xfrm>
           <a:prstGeom prst="rect">
             <a:avLst>
@@ -31145,14 +31586,14 @@
       </p:sp>
       <p:sp>
         <p:nvSpPr>
-          <p:cNvPr id="53" name="Text 51"/>
-          <p:cNvSpPr/>
-          <p:nvPr/>
-        </p:nvSpPr>
-        <p:spPr>
-          <a:xfrm>
-            <a:off x="5581498" y="4169664"/>
-            <a:ext cx="676656" cy="384048"/>
+          <p:cNvPr id="59" name="Text 57"/>
+          <p:cNvSpPr/>
+          <p:nvPr/>
+        </p:nvSpPr>
+        <p:spPr>
+          <a:xfrm>
+            <a:off x="4921966" y="4169664"/>
+            <a:ext cx="543652" cy="384048"/>
           </a:xfrm>
           <a:prstGeom prst="rect">
             <a:avLst/>
@@ -31184,14 +31625,14 @@
       </p:sp>
       <p:sp>
         <p:nvSpPr>
-          <p:cNvPr id="54" name="Shape 52"/>
-          <p:cNvSpPr/>
-          <p:nvPr/>
-        </p:nvSpPr>
-        <p:spPr>
-          <a:xfrm>
-            <a:off x="6307531" y="4169664"/>
-            <a:ext cx="676656" cy="384048"/>
+          <p:cNvPr id="60" name="Shape 58"/>
+          <p:cNvSpPr/>
+          <p:nvPr/>
+        </p:nvSpPr>
+        <p:spPr>
+          <a:xfrm>
+            <a:off x="5515910" y="4169664"/>
+            <a:ext cx="543652" cy="384048"/>
           </a:xfrm>
           <a:prstGeom prst="rect">
             <a:avLst>
@@ -31211,14 +31652,14 @@
       </p:sp>
       <p:sp>
         <p:nvSpPr>
-          <p:cNvPr id="55" name="Text 53"/>
-          <p:cNvSpPr/>
-          <p:nvPr/>
-        </p:nvSpPr>
-        <p:spPr>
-          <a:xfrm>
-            <a:off x="6307531" y="4169664"/>
-            <a:ext cx="676656" cy="384048"/>
+          <p:cNvPr id="61" name="Text 59"/>
+          <p:cNvSpPr/>
+          <p:nvPr/>
+        </p:nvSpPr>
+        <p:spPr>
+          <a:xfrm>
+            <a:off x="5515910" y="4169664"/>
+            <a:ext cx="543652" cy="384048"/>
           </a:xfrm>
           <a:prstGeom prst="rect">
             <a:avLst/>
@@ -31250,14 +31691,14 @@
       </p:sp>
       <p:sp>
         <p:nvSpPr>
-          <p:cNvPr id="56" name="Shape 54"/>
-          <p:cNvSpPr/>
-          <p:nvPr/>
-        </p:nvSpPr>
-        <p:spPr>
-          <a:xfrm>
-            <a:off x="7033565" y="4169664"/>
-            <a:ext cx="676656" cy="384048"/>
+          <p:cNvPr id="62" name="Shape 60"/>
+          <p:cNvSpPr/>
+          <p:nvPr/>
+        </p:nvSpPr>
+        <p:spPr>
+          <a:xfrm>
+            <a:off x="6109855" y="4169664"/>
+            <a:ext cx="543652" cy="384048"/>
           </a:xfrm>
           <a:prstGeom prst="rect">
             <a:avLst>
@@ -31277,14 +31718,14 @@
       </p:sp>
       <p:sp>
         <p:nvSpPr>
-          <p:cNvPr id="57" name="Text 55"/>
-          <p:cNvSpPr/>
-          <p:nvPr/>
-        </p:nvSpPr>
-        <p:spPr>
-          <a:xfrm>
-            <a:off x="7033565" y="4169664"/>
-            <a:ext cx="676656" cy="384048"/>
+          <p:cNvPr id="63" name="Text 61"/>
+          <p:cNvSpPr/>
+          <p:nvPr/>
+        </p:nvSpPr>
+        <p:spPr>
+          <a:xfrm>
+            <a:off x="6109855" y="4169664"/>
+            <a:ext cx="543652" cy="384048"/>
           </a:xfrm>
           <a:prstGeom prst="rect">
             <a:avLst/>
@@ -31316,14 +31757,14 @@
       </p:sp>
       <p:sp>
         <p:nvSpPr>
-          <p:cNvPr id="58" name="Shape 56"/>
-          <p:cNvSpPr/>
-          <p:nvPr/>
-        </p:nvSpPr>
-        <p:spPr>
-          <a:xfrm>
-            <a:off x="7759598" y="4169664"/>
-            <a:ext cx="676656" cy="384048"/>
+          <p:cNvPr id="64" name="Shape 62"/>
+          <p:cNvSpPr/>
+          <p:nvPr/>
+        </p:nvSpPr>
+        <p:spPr>
+          <a:xfrm>
+            <a:off x="6703799" y="4169664"/>
+            <a:ext cx="543652" cy="384048"/>
           </a:xfrm>
           <a:prstGeom prst="rect">
             <a:avLst>
@@ -31343,14 +31784,14 @@
       </p:sp>
       <p:sp>
         <p:nvSpPr>
-          <p:cNvPr id="59" name="Text 57"/>
-          <p:cNvSpPr/>
-          <p:nvPr/>
-        </p:nvSpPr>
-        <p:spPr>
-          <a:xfrm>
-            <a:off x="7759598" y="4169664"/>
-            <a:ext cx="676656" cy="384048"/>
+          <p:cNvPr id="65" name="Text 63"/>
+          <p:cNvSpPr/>
+          <p:nvPr/>
+        </p:nvSpPr>
+        <p:spPr>
+          <a:xfrm>
+            <a:off x="6703799" y="4169664"/>
+            <a:ext cx="543652" cy="384048"/>
           </a:xfrm>
           <a:prstGeom prst="rect">
             <a:avLst/>
@@ -31375,6 +31816,138 @@
                 <a:cs typeface="Trebuchet MS" pitchFamily="34" charset="-120"/>
               </a:rPr>
               <a:t>e</a:t>
+            </a:r>
+            <a:endParaRPr lang="en-US" sz="900" dirty="0"/>
+          </a:p>
+        </p:txBody>
+      </p:sp>
+      <p:sp>
+        <p:nvSpPr>
+          <p:cNvPr id="66" name="Shape 64"/>
+          <p:cNvSpPr/>
+          <p:nvPr/>
+        </p:nvSpPr>
+        <p:spPr>
+          <a:xfrm>
+            <a:off x="7297743" y="4169664"/>
+            <a:ext cx="543652" cy="384048"/>
+          </a:xfrm>
+          <a:prstGeom prst="rect">
+            <a:avLst>
+              <a:gd name="adj" fmla="val 9524"/>
+            </a:avLst>
+          </a:prstGeom>
+          <a:solidFill>
+            <a:srgbClr val="FFFFFF"/>
+          </a:solidFill>
+          <a:ln w="12700">
+            <a:solidFill>
+              <a:srgbClr val="DB2777"/>
+            </a:solidFill>
+            <a:prstDash val="solid"/>
+          </a:ln>
+        </p:spPr>
+      </p:sp>
+      <p:sp>
+        <p:nvSpPr>
+          <p:cNvPr id="67" name="Text 65"/>
+          <p:cNvSpPr/>
+          <p:nvPr/>
+        </p:nvSpPr>
+        <p:spPr>
+          <a:xfrm>
+            <a:off x="7297743" y="4169664"/>
+            <a:ext cx="543652" cy="384048"/>
+          </a:xfrm>
+          <a:prstGeom prst="rect">
+            <a:avLst/>
+          </a:prstGeom>
+          <a:noFill/>
+          <a:ln/>
+        </p:spPr>
+        <p:txBody>
+          <a:bodyPr wrap="square" lIns="0" tIns="0" rIns="0" bIns="0" rtlCol="0" anchor="ctr"/>
+          <a:lstStyle/>
+          <a:p>
+            <a:pPr algn="ctr" indent="0" marL="0">
+              <a:buNone/>
+            </a:pPr>
+            <a:r>
+              <a:rPr lang="en-US" sz="900" b="1" dirty="0">
+                <a:solidFill>
+                  <a:srgbClr val="9D174D"/>
+                </a:solidFill>
+                <a:latin typeface="Trebuchet MS" pitchFamily="34" charset="0"/>
+                <a:ea typeface="Trebuchet MS" pitchFamily="34" charset="-122"/>
+                <a:cs typeface="Trebuchet MS" pitchFamily="34" charset="-120"/>
+              </a:rPr>
+              <a:t>l</a:t>
+            </a:r>
+            <a:endParaRPr lang="en-US" sz="900" dirty="0"/>
+          </a:p>
+        </p:txBody>
+      </p:sp>
+      <p:sp>
+        <p:nvSpPr>
+          <p:cNvPr id="68" name="Shape 66"/>
+          <p:cNvSpPr/>
+          <p:nvPr/>
+        </p:nvSpPr>
+        <p:spPr>
+          <a:xfrm>
+            <a:off x="7891688" y="4169664"/>
+            <a:ext cx="543652" cy="384048"/>
+          </a:xfrm>
+          <a:prstGeom prst="rect">
+            <a:avLst>
+              <a:gd name="adj" fmla="val 9524"/>
+            </a:avLst>
+          </a:prstGeom>
+          <a:solidFill>
+            <a:srgbClr val="FFFFFF"/>
+          </a:solidFill>
+          <a:ln w="12700">
+            <a:solidFill>
+              <a:srgbClr val="DB2777"/>
+            </a:solidFill>
+            <a:prstDash val="solid"/>
+          </a:ln>
+        </p:spPr>
+      </p:sp>
+      <p:sp>
+        <p:nvSpPr>
+          <p:cNvPr id="69" name="Text 67"/>
+          <p:cNvSpPr/>
+          <p:nvPr/>
+        </p:nvSpPr>
+        <p:spPr>
+          <a:xfrm>
+            <a:off x="7891688" y="4169664"/>
+            <a:ext cx="543652" cy="384048"/>
+          </a:xfrm>
+          <a:prstGeom prst="rect">
+            <a:avLst/>
+          </a:prstGeom>
+          <a:noFill/>
+          <a:ln/>
+        </p:spPr>
+        <p:txBody>
+          <a:bodyPr wrap="square" lIns="0" tIns="0" rIns="0" bIns="0" rtlCol="0" anchor="ctr"/>
+          <a:lstStyle/>
+          <a:p>
+            <a:pPr algn="ctr" indent="0" marL="0">
+              <a:buNone/>
+            </a:pPr>
+            <a:r>
+              <a:rPr lang="en-US" sz="900" b="1" dirty="0">
+                <a:solidFill>
+                  <a:srgbClr val="9D174D"/>
+                </a:solidFill>
+                <a:latin typeface="Trebuchet MS" pitchFamily="34" charset="0"/>
+                <a:ea typeface="Trebuchet MS" pitchFamily="34" charset="-122"/>
+                <a:cs typeface="Trebuchet MS" pitchFamily="34" charset="-120"/>
+              </a:rPr>
+              <a:t>y</a:t>
             </a:r>
             <a:endParaRPr lang="en-US" sz="900" dirty="0"/>
           </a:p>
@@ -31666,7 +32239,7 @@
                 <a:ea typeface="Calibri" pitchFamily="34" charset="-122"/>
                 <a:cs typeface="Calibri" pitchFamily="34" charset="-120"/>
               </a:rPr>
-              <a:t>Word Labs  •  wordlabs.app  •  Root: 'collect' = gather or bring together</a:t>
+              <a:t>Word Labs  •  wordlabs.app  •  Root: 'collect' = gather together, bring together</a:t>
             </a:r>
             <a:endParaRPr lang="en-US" sz="800" dirty="0"/>
           </a:p>
@@ -31805,7 +32378,7 @@
                 <a:ea typeface="Trebuchet MS" pitchFamily="34" charset="-122"/>
                 <a:cs typeface="Trebuchet MS" pitchFamily="34" charset="-120"/>
               </a:rPr>
-              <a:t>collection</a:t>
+              <a:t>recollect</a:t>
             </a:r>
             <a:endParaRPr lang="en-US" sz="2800" dirty="0"/>
           </a:p>
@@ -32493,7 +33066,7 @@
                 <a:ea typeface="Calibri" pitchFamily="34" charset="-122"/>
                 <a:cs typeface="Calibri" pitchFamily="34" charset="-120"/>
               </a:rPr>
-              <a:t>Word Labs  •  wordlabs.app  •  Root: 'collect' = gather or bring together</a:t>
+              <a:t>Word Labs  •  wordlabs.app  •  Root: 'collect' = gather together, bring together</a:t>
             </a:r>
             <a:endParaRPr lang="en-US" sz="800" dirty="0"/>
           </a:p>
@@ -32632,7 +33205,7 @@
                 <a:ea typeface="Trebuchet MS" pitchFamily="34" charset="-122"/>
                 <a:cs typeface="Trebuchet MS" pitchFamily="34" charset="-120"/>
               </a:rPr>
-              <a:t>collection</a:t>
+              <a:t>recollect</a:t>
             </a:r>
             <a:endParaRPr lang="en-US" sz="2800" dirty="0"/>
           </a:p>
@@ -32771,7 +33344,7 @@
                 <a:ea typeface="Trebuchet MS" pitchFamily="34" charset="-122"/>
                 <a:cs typeface="Trebuchet MS" pitchFamily="34" charset="-120"/>
               </a:rPr>
-              <a:t>col</a:t>
+              <a:t>re</a:t>
             </a:r>
             <a:endParaRPr lang="en-US" sz="1300" dirty="0"/>
           </a:p>
@@ -32810,7 +33383,7 @@
                 <a:ea typeface="Calibri" pitchFamily="34" charset="-122"/>
                 <a:cs typeface="Calibri" pitchFamily="34" charset="-120"/>
               </a:rPr>
-              <a:t>together</a:t>
+              <a:t>again, back</a:t>
             </a:r>
             <a:endParaRPr lang="en-US" sz="850" dirty="0"/>
           </a:p>
@@ -32818,46 +33391,7 @@
       </p:sp>
       <p:sp>
         <p:nvSpPr>
-          <p:cNvPr id="19" name="Text 17"/>
-          <p:cNvSpPr/>
-          <p:nvPr/>
-        </p:nvSpPr>
-        <p:spPr>
-          <a:xfrm>
-            <a:off x="2221992" y="2752344"/>
-            <a:ext cx="1828800" cy="182880"/>
-          </a:xfrm>
-          <a:prstGeom prst="rect">
-            <a:avLst/>
-          </a:prstGeom>
-          <a:noFill/>
-          <a:ln/>
-        </p:spPr>
-        <p:txBody>
-          <a:bodyPr wrap="square" lIns="0" tIns="0" rIns="0" bIns="0" rtlCol="0" anchor="t"/>
-          <a:lstStyle/>
-          <a:p>
-            <a:pPr algn="ctr" indent="0" marL="0">
-              <a:buNone/>
-            </a:pPr>
-            <a:r>
-              <a:rPr lang="en-US" sz="700" i="1" dirty="0">
-                <a:solidFill>
-                  <a:srgbClr val="94A3B8"/>
-                </a:solidFill>
-                <a:latin typeface="Calibri" pitchFamily="34" charset="0"/>
-                <a:ea typeface="Calibri" pitchFamily="34" charset="-122"/>
-                <a:cs typeface="Calibri" pitchFamily="34" charset="-120"/>
-              </a:rPr>
-              <a:t>con → col before 'l'</a:t>
-            </a:r>
-            <a:endParaRPr lang="en-US" sz="700" dirty="0"/>
-          </a:p>
-        </p:txBody>
-      </p:sp>
-      <p:sp>
-        <p:nvSpPr>
-          <p:cNvPr id="20" name="Shape 18"/>
+          <p:cNvPr id="19" name="Shape 17"/>
           <p:cNvSpPr/>
           <p:nvPr/>
         </p:nvSpPr>
@@ -32891,7 +33425,7 @@
       </p:sp>
       <p:sp>
         <p:nvSpPr>
-          <p:cNvPr id="21" name="Text 19"/>
+          <p:cNvPr id="20" name="Text 18"/>
           <p:cNvSpPr/>
           <p:nvPr/>
         </p:nvSpPr>
@@ -32922,7 +33456,7 @@
                 <a:ea typeface="Trebuchet MS" pitchFamily="34" charset="-122"/>
                 <a:cs typeface="Trebuchet MS" pitchFamily="34" charset="-120"/>
               </a:rPr>
-              <a:t>lect</a:t>
+              <a:t>col</a:t>
             </a:r>
             <a:endParaRPr lang="en-US" sz="1300" dirty="0"/>
           </a:p>
@@ -32930,7 +33464,7 @@
       </p:sp>
       <p:sp>
         <p:nvSpPr>
-          <p:cNvPr id="22" name="Text 20"/>
+          <p:cNvPr id="21" name="Text 19"/>
           <p:cNvSpPr/>
           <p:nvPr/>
         </p:nvSpPr>
@@ -32961,9 +33495,48 @@
                 <a:ea typeface="Calibri" pitchFamily="34" charset="-122"/>
                 <a:cs typeface="Calibri" pitchFamily="34" charset="-120"/>
               </a:rPr>
-              <a:t>gather</a:t>
+              <a:t>together</a:t>
             </a:r>
             <a:endParaRPr lang="en-US" sz="850" dirty="0"/>
+          </a:p>
+        </p:txBody>
+      </p:sp>
+      <p:sp>
+        <p:nvSpPr>
+          <p:cNvPr id="22" name="Text 20"/>
+          <p:cNvSpPr/>
+          <p:nvPr/>
+        </p:nvSpPr>
+        <p:spPr>
+          <a:xfrm>
+            <a:off x="4370832" y="2752344"/>
+            <a:ext cx="1828800" cy="182880"/>
+          </a:xfrm>
+          <a:prstGeom prst="rect">
+            <a:avLst/>
+          </a:prstGeom>
+          <a:noFill/>
+          <a:ln/>
+        </p:spPr>
+        <p:txBody>
+          <a:bodyPr wrap="square" lIns="0" tIns="0" rIns="0" bIns="0" rtlCol="0" anchor="t"/>
+          <a:lstStyle/>
+          <a:p>
+            <a:pPr algn="ctr" indent="0" marL="0">
+              <a:buNone/>
+            </a:pPr>
+            <a:r>
+              <a:rPr lang="en-US" sz="700" i="1" dirty="0">
+                <a:solidFill>
+                  <a:srgbClr val="94A3B8"/>
+                </a:solidFill>
+                <a:latin typeface="Calibri" pitchFamily="34" charset="0"/>
+                <a:ea typeface="Calibri" pitchFamily="34" charset="-122"/>
+                <a:cs typeface="Calibri" pitchFamily="34" charset="-120"/>
+              </a:rPr>
+              <a:t>con → col before 'l'</a:t>
+            </a:r>
+            <a:endParaRPr lang="en-US" sz="700" dirty="0"/>
           </a:p>
         </p:txBody>
       </p:sp>
@@ -33034,7 +33607,7 @@
                 <a:ea typeface="Trebuchet MS" pitchFamily="34" charset="-122"/>
                 <a:cs typeface="Trebuchet MS" pitchFamily="34" charset="-120"/>
               </a:rPr>
-              <a:t>ion</a:t>
+              <a:t>lect</a:t>
             </a:r>
             <a:endParaRPr lang="en-US" sz="1300" dirty="0"/>
           </a:p>
@@ -33073,7 +33646,7 @@
                 <a:ea typeface="Calibri" pitchFamily="34" charset="-122"/>
                 <a:cs typeface="Calibri" pitchFamily="34" charset="-120"/>
               </a:rPr>
-              <a:t>act or result of</a:t>
+              <a:t>gather</a:t>
             </a:r>
             <a:endParaRPr lang="en-US" sz="850" dirty="0"/>
           </a:p>
@@ -33629,7 +34202,7 @@
                 <a:ea typeface="Calibri" pitchFamily="34" charset="-122"/>
                 <a:cs typeface="Calibri" pitchFamily="34" charset="-120"/>
               </a:rPr>
-              <a:t>Word Labs  •  wordlabs.app  •  Root: 'collect' = gather or bring together</a:t>
+              <a:t>Word Labs  •  wordlabs.app  •  Root: 'collect' = gather together, bring together</a:t>
             </a:r>
             <a:endParaRPr lang="en-US" sz="800" dirty="0"/>
           </a:p>
@@ -33768,7 +34341,7 @@
                 <a:ea typeface="Trebuchet MS" pitchFamily="34" charset="-122"/>
                 <a:cs typeface="Trebuchet MS" pitchFamily="34" charset="-120"/>
               </a:rPr>
-              <a:t>collection</a:t>
+              <a:t>recollect</a:t>
             </a:r>
             <a:endParaRPr lang="en-US" sz="2800" dirty="0"/>
           </a:p>
@@ -33907,7 +34480,7 @@
                 <a:ea typeface="Trebuchet MS" pitchFamily="34" charset="-122"/>
                 <a:cs typeface="Trebuchet MS" pitchFamily="34" charset="-120"/>
               </a:rPr>
-              <a:t>col</a:t>
+              <a:t>re</a:t>
             </a:r>
             <a:endParaRPr lang="en-US" sz="1300" dirty="0"/>
           </a:p>
@@ -33946,7 +34519,7 @@
                 <a:ea typeface="Calibri" pitchFamily="34" charset="-122"/>
                 <a:cs typeface="Calibri" pitchFamily="34" charset="-120"/>
               </a:rPr>
-              <a:t>together</a:t>
+              <a:t>again, back</a:t>
             </a:r>
             <a:endParaRPr lang="en-US" sz="850" dirty="0"/>
           </a:p>
@@ -33954,46 +34527,7 @@
       </p:sp>
       <p:sp>
         <p:nvSpPr>
-          <p:cNvPr id="19" name="Text 17"/>
-          <p:cNvSpPr/>
-          <p:nvPr/>
-        </p:nvSpPr>
-        <p:spPr>
-          <a:xfrm>
-            <a:off x="2221992" y="2752344"/>
-            <a:ext cx="1828800" cy="182880"/>
-          </a:xfrm>
-          <a:prstGeom prst="rect">
-            <a:avLst/>
-          </a:prstGeom>
-          <a:noFill/>
-          <a:ln/>
-        </p:spPr>
-        <p:txBody>
-          <a:bodyPr wrap="square" lIns="0" tIns="0" rIns="0" bIns="0" rtlCol="0" anchor="t"/>
-          <a:lstStyle/>
-          <a:p>
-            <a:pPr algn="ctr" indent="0" marL="0">
-              <a:buNone/>
-            </a:pPr>
-            <a:r>
-              <a:rPr lang="en-US" sz="700" i="1" dirty="0">
-                <a:solidFill>
-                  <a:srgbClr val="94A3B8"/>
-                </a:solidFill>
-                <a:latin typeface="Calibri" pitchFamily="34" charset="0"/>
-                <a:ea typeface="Calibri" pitchFamily="34" charset="-122"/>
-                <a:cs typeface="Calibri" pitchFamily="34" charset="-120"/>
-              </a:rPr>
-              <a:t>con → col before 'l'</a:t>
-            </a:r>
-            <a:endParaRPr lang="en-US" sz="700" dirty="0"/>
-          </a:p>
-        </p:txBody>
-      </p:sp>
-      <p:sp>
-        <p:nvSpPr>
-          <p:cNvPr id="20" name="Shape 18"/>
+          <p:cNvPr id="19" name="Shape 17"/>
           <p:cNvSpPr/>
           <p:nvPr/>
         </p:nvSpPr>
@@ -34027,7 +34561,7 @@
       </p:sp>
       <p:sp>
         <p:nvSpPr>
-          <p:cNvPr id="21" name="Text 19"/>
+          <p:cNvPr id="20" name="Text 18"/>
           <p:cNvSpPr/>
           <p:nvPr/>
         </p:nvSpPr>
@@ -34058,7 +34592,7 @@
                 <a:ea typeface="Trebuchet MS" pitchFamily="34" charset="-122"/>
                 <a:cs typeface="Trebuchet MS" pitchFamily="34" charset="-120"/>
               </a:rPr>
-              <a:t>lect</a:t>
+              <a:t>col</a:t>
             </a:r>
             <a:endParaRPr lang="en-US" sz="1300" dirty="0"/>
           </a:p>
@@ -34066,7 +34600,7 @@
       </p:sp>
       <p:sp>
         <p:nvSpPr>
-          <p:cNvPr id="22" name="Text 20"/>
+          <p:cNvPr id="21" name="Text 19"/>
           <p:cNvSpPr/>
           <p:nvPr/>
         </p:nvSpPr>
@@ -34097,9 +34631,48 @@
                 <a:ea typeface="Calibri" pitchFamily="34" charset="-122"/>
                 <a:cs typeface="Calibri" pitchFamily="34" charset="-120"/>
               </a:rPr>
-              <a:t>gather</a:t>
+              <a:t>together</a:t>
             </a:r>
             <a:endParaRPr lang="en-US" sz="850" dirty="0"/>
+          </a:p>
+        </p:txBody>
+      </p:sp>
+      <p:sp>
+        <p:nvSpPr>
+          <p:cNvPr id="22" name="Text 20"/>
+          <p:cNvSpPr/>
+          <p:nvPr/>
+        </p:nvSpPr>
+        <p:spPr>
+          <a:xfrm>
+            <a:off x="4370832" y="2752344"/>
+            <a:ext cx="1828800" cy="182880"/>
+          </a:xfrm>
+          <a:prstGeom prst="rect">
+            <a:avLst/>
+          </a:prstGeom>
+          <a:noFill/>
+          <a:ln/>
+        </p:spPr>
+        <p:txBody>
+          <a:bodyPr wrap="square" lIns="0" tIns="0" rIns="0" bIns="0" rtlCol="0" anchor="t"/>
+          <a:lstStyle/>
+          <a:p>
+            <a:pPr algn="ctr" indent="0" marL="0">
+              <a:buNone/>
+            </a:pPr>
+            <a:r>
+              <a:rPr lang="en-US" sz="700" i="1" dirty="0">
+                <a:solidFill>
+                  <a:srgbClr val="94A3B8"/>
+                </a:solidFill>
+                <a:latin typeface="Calibri" pitchFamily="34" charset="0"/>
+                <a:ea typeface="Calibri" pitchFamily="34" charset="-122"/>
+                <a:cs typeface="Calibri" pitchFamily="34" charset="-120"/>
+              </a:rPr>
+              <a:t>con → col before 'l'</a:t>
+            </a:r>
+            <a:endParaRPr lang="en-US" sz="700" dirty="0"/>
           </a:p>
         </p:txBody>
       </p:sp>
@@ -34170,7 +34743,7 @@
                 <a:ea typeface="Trebuchet MS" pitchFamily="34" charset="-122"/>
                 <a:cs typeface="Trebuchet MS" pitchFamily="34" charset="-120"/>
               </a:rPr>
-              <a:t>ion</a:t>
+              <a:t>lect</a:t>
             </a:r>
             <a:endParaRPr lang="en-US" sz="1300" dirty="0"/>
           </a:p>
@@ -34209,7 +34782,7 @@
                 <a:ea typeface="Calibri" pitchFamily="34" charset="-122"/>
                 <a:cs typeface="Calibri" pitchFamily="34" charset="-120"/>
               </a:rPr>
-              <a:t>act or result of</a:t>
+              <a:t>gather</a:t>
             </a:r>
             <a:endParaRPr lang="en-US" sz="850" dirty="0"/>
           </a:p>
@@ -34368,7 +34941,7 @@
                 <a:ea typeface="Trebuchet MS" pitchFamily="34" charset="-122"/>
                 <a:cs typeface="Trebuchet MS" pitchFamily="34" charset="-120"/>
               </a:rPr>
-              <a:t>col</a:t>
+              <a:t>re</a:t>
             </a:r>
             <a:endParaRPr lang="en-US" sz="1400" dirty="0"/>
           </a:p>
@@ -34473,7 +35046,7 @@
                 <a:ea typeface="Trebuchet MS" pitchFamily="34" charset="-122"/>
                 <a:cs typeface="Trebuchet MS" pitchFamily="34" charset="-120"/>
               </a:rPr>
-              <a:t>lec</a:t>
+              <a:t>col</a:t>
             </a:r>
             <a:endParaRPr lang="en-US" sz="1400" dirty="0"/>
           </a:p>
@@ -34578,7 +35151,7 @@
                 <a:ea typeface="Trebuchet MS" pitchFamily="34" charset="-122"/>
                 <a:cs typeface="Trebuchet MS" pitchFamily="34" charset="-120"/>
               </a:rPr>
-              <a:t>tion</a:t>
+              <a:t>lect</a:t>
             </a:r>
             <a:endParaRPr lang="en-US" sz="1400" dirty="0"/>
           </a:p>
@@ -35002,7 +35575,7 @@
                 <a:ea typeface="Calibri" pitchFamily="34" charset="-122"/>
                 <a:cs typeface="Calibri" pitchFamily="34" charset="-120"/>
               </a:rPr>
-              <a:t>Word Labs  •  wordlabs.app  •  Root: 'collect' = gather or bring together</a:t>
+              <a:t>Word Labs  •  wordlabs.app  •  Root: 'collect' = gather together, bring together</a:t>
             </a:r>
             <a:endParaRPr lang="en-US" sz="800" dirty="0"/>
           </a:p>
@@ -35141,7 +35714,7 @@
                 <a:ea typeface="Trebuchet MS" pitchFamily="34" charset="-122"/>
                 <a:cs typeface="Trebuchet MS" pitchFamily="34" charset="-120"/>
               </a:rPr>
-              <a:t>collection</a:t>
+              <a:t>recollect</a:t>
             </a:r>
             <a:endParaRPr lang="en-US" sz="2800" dirty="0"/>
           </a:p>
@@ -35280,7 +35853,7 @@
                 <a:ea typeface="Trebuchet MS" pitchFamily="34" charset="-122"/>
                 <a:cs typeface="Trebuchet MS" pitchFamily="34" charset="-120"/>
               </a:rPr>
-              <a:t>col</a:t>
+              <a:t>re</a:t>
             </a:r>
             <a:endParaRPr lang="en-US" sz="1300" dirty="0"/>
           </a:p>
@@ -35319,7 +35892,7 @@
                 <a:ea typeface="Calibri" pitchFamily="34" charset="-122"/>
                 <a:cs typeface="Calibri" pitchFamily="34" charset="-120"/>
               </a:rPr>
-              <a:t>together</a:t>
+              <a:t>again, back</a:t>
             </a:r>
             <a:endParaRPr lang="en-US" sz="850" dirty="0"/>
           </a:p>
@@ -35327,46 +35900,7 @@
       </p:sp>
       <p:sp>
         <p:nvSpPr>
-          <p:cNvPr id="19" name="Text 17"/>
-          <p:cNvSpPr/>
-          <p:nvPr/>
-        </p:nvSpPr>
-        <p:spPr>
-          <a:xfrm>
-            <a:off x="2221992" y="2752344"/>
-            <a:ext cx="1828800" cy="182880"/>
-          </a:xfrm>
-          <a:prstGeom prst="rect">
-            <a:avLst/>
-          </a:prstGeom>
-          <a:noFill/>
-          <a:ln/>
-        </p:spPr>
-        <p:txBody>
-          <a:bodyPr wrap="square" lIns="0" tIns="0" rIns="0" bIns="0" rtlCol="0" anchor="t"/>
-          <a:lstStyle/>
-          <a:p>
-            <a:pPr algn="ctr" indent="0" marL="0">
-              <a:buNone/>
-            </a:pPr>
-            <a:r>
-              <a:rPr lang="en-US" sz="700" i="1" dirty="0">
-                <a:solidFill>
-                  <a:srgbClr val="94A3B8"/>
-                </a:solidFill>
-                <a:latin typeface="Calibri" pitchFamily="34" charset="0"/>
-                <a:ea typeface="Calibri" pitchFamily="34" charset="-122"/>
-                <a:cs typeface="Calibri" pitchFamily="34" charset="-120"/>
-              </a:rPr>
-              <a:t>con → col before 'l'</a:t>
-            </a:r>
-            <a:endParaRPr lang="en-US" sz="700" dirty="0"/>
-          </a:p>
-        </p:txBody>
-      </p:sp>
-      <p:sp>
-        <p:nvSpPr>
-          <p:cNvPr id="20" name="Shape 18"/>
+          <p:cNvPr id="19" name="Shape 17"/>
           <p:cNvSpPr/>
           <p:nvPr/>
         </p:nvSpPr>
@@ -35400,7 +35934,7 @@
       </p:sp>
       <p:sp>
         <p:nvSpPr>
-          <p:cNvPr id="21" name="Text 19"/>
+          <p:cNvPr id="20" name="Text 18"/>
           <p:cNvSpPr/>
           <p:nvPr/>
         </p:nvSpPr>
@@ -35431,7 +35965,7 @@
                 <a:ea typeface="Trebuchet MS" pitchFamily="34" charset="-122"/>
                 <a:cs typeface="Trebuchet MS" pitchFamily="34" charset="-120"/>
               </a:rPr>
-              <a:t>lect</a:t>
+              <a:t>col</a:t>
             </a:r>
             <a:endParaRPr lang="en-US" sz="1300" dirty="0"/>
           </a:p>
@@ -35439,7 +35973,7 @@
       </p:sp>
       <p:sp>
         <p:nvSpPr>
-          <p:cNvPr id="22" name="Text 20"/>
+          <p:cNvPr id="21" name="Text 19"/>
           <p:cNvSpPr/>
           <p:nvPr/>
         </p:nvSpPr>
@@ -35470,9 +36004,48 @@
                 <a:ea typeface="Calibri" pitchFamily="34" charset="-122"/>
                 <a:cs typeface="Calibri" pitchFamily="34" charset="-120"/>
               </a:rPr>
-              <a:t>gather</a:t>
+              <a:t>together</a:t>
             </a:r>
             <a:endParaRPr lang="en-US" sz="850" dirty="0"/>
+          </a:p>
+        </p:txBody>
+      </p:sp>
+      <p:sp>
+        <p:nvSpPr>
+          <p:cNvPr id="22" name="Text 20"/>
+          <p:cNvSpPr/>
+          <p:nvPr/>
+        </p:nvSpPr>
+        <p:spPr>
+          <a:xfrm>
+            <a:off x="4370832" y="2752344"/>
+            <a:ext cx="1828800" cy="182880"/>
+          </a:xfrm>
+          <a:prstGeom prst="rect">
+            <a:avLst/>
+          </a:prstGeom>
+          <a:noFill/>
+          <a:ln/>
+        </p:spPr>
+        <p:txBody>
+          <a:bodyPr wrap="square" lIns="0" tIns="0" rIns="0" bIns="0" rtlCol="0" anchor="t"/>
+          <a:lstStyle/>
+          <a:p>
+            <a:pPr algn="ctr" indent="0" marL="0">
+              <a:buNone/>
+            </a:pPr>
+            <a:r>
+              <a:rPr lang="en-US" sz="700" i="1" dirty="0">
+                <a:solidFill>
+                  <a:srgbClr val="94A3B8"/>
+                </a:solidFill>
+                <a:latin typeface="Calibri" pitchFamily="34" charset="0"/>
+                <a:ea typeface="Calibri" pitchFamily="34" charset="-122"/>
+                <a:cs typeface="Calibri" pitchFamily="34" charset="-120"/>
+              </a:rPr>
+              <a:t>con → col before 'l'</a:t>
+            </a:r>
+            <a:endParaRPr lang="en-US" sz="700" dirty="0"/>
           </a:p>
         </p:txBody>
       </p:sp>
@@ -35543,7 +36116,7 @@
                 <a:ea typeface="Trebuchet MS" pitchFamily="34" charset="-122"/>
                 <a:cs typeface="Trebuchet MS" pitchFamily="34" charset="-120"/>
               </a:rPr>
-              <a:t>ion</a:t>
+              <a:t>lect</a:t>
             </a:r>
             <a:endParaRPr lang="en-US" sz="1300" dirty="0"/>
           </a:p>
@@ -35582,7 +36155,7 @@
                 <a:ea typeface="Calibri" pitchFamily="34" charset="-122"/>
                 <a:cs typeface="Calibri" pitchFamily="34" charset="-120"/>
               </a:rPr>
-              <a:t>act or result of</a:t>
+              <a:t>gather</a:t>
             </a:r>
             <a:endParaRPr lang="en-US" sz="850" dirty="0"/>
           </a:p>
@@ -35741,7 +36314,7 @@
                 <a:ea typeface="Trebuchet MS" pitchFamily="34" charset="-122"/>
                 <a:cs typeface="Trebuchet MS" pitchFamily="34" charset="-120"/>
               </a:rPr>
-              <a:t>col</a:t>
+              <a:t>re</a:t>
             </a:r>
             <a:endParaRPr lang="en-US" sz="1400" dirty="0"/>
           </a:p>
@@ -35846,7 +36419,7 @@
                 <a:ea typeface="Trebuchet MS" pitchFamily="34" charset="-122"/>
                 <a:cs typeface="Trebuchet MS" pitchFamily="34" charset="-120"/>
               </a:rPr>
-              <a:t>lec</a:t>
+              <a:t>col</a:t>
             </a:r>
             <a:endParaRPr lang="en-US" sz="1400" dirty="0"/>
           </a:p>
@@ -35951,7 +36524,7 @@
                 <a:ea typeface="Trebuchet MS" pitchFamily="34" charset="-122"/>
                 <a:cs typeface="Trebuchet MS" pitchFamily="34" charset="-120"/>
               </a:rPr>
-              <a:t>tion</a:t>
+              <a:t>lect</a:t>
             </a:r>
             <a:endParaRPr lang="en-US" sz="1400" dirty="0"/>
           </a:p>
@@ -36110,6 +36683,138 @@
                 <a:ea typeface="Trebuchet MS" pitchFamily="34" charset="-122"/>
                 <a:cs typeface="Trebuchet MS" pitchFamily="34" charset="-120"/>
               </a:rPr>
+              <a:t>r</a:t>
+            </a:r>
+            <a:endParaRPr lang="en-US" sz="900" dirty="0"/>
+          </a:p>
+        </p:txBody>
+      </p:sp>
+      <p:sp>
+        <p:nvSpPr>
+          <p:cNvPr id="42" name="Shape 40"/>
+          <p:cNvSpPr/>
+          <p:nvPr/>
+        </p:nvSpPr>
+        <p:spPr>
+          <a:xfrm>
+            <a:off x="2831592" y="4169664"/>
+            <a:ext cx="685800" cy="384048"/>
+          </a:xfrm>
+          <a:prstGeom prst="rect">
+            <a:avLst>
+              <a:gd name="adj" fmla="val 9524"/>
+            </a:avLst>
+          </a:prstGeom>
+          <a:solidFill>
+            <a:srgbClr val="FFFFFF"/>
+          </a:solidFill>
+          <a:ln w="12700">
+            <a:solidFill>
+              <a:srgbClr val="DB2777"/>
+            </a:solidFill>
+            <a:prstDash val="solid"/>
+          </a:ln>
+        </p:spPr>
+      </p:sp>
+      <p:sp>
+        <p:nvSpPr>
+          <p:cNvPr id="43" name="Text 41"/>
+          <p:cNvSpPr/>
+          <p:nvPr/>
+        </p:nvSpPr>
+        <p:spPr>
+          <a:xfrm>
+            <a:off x="2831592" y="4169664"/>
+            <a:ext cx="685800" cy="384048"/>
+          </a:xfrm>
+          <a:prstGeom prst="rect">
+            <a:avLst/>
+          </a:prstGeom>
+          <a:noFill/>
+          <a:ln/>
+        </p:spPr>
+        <p:txBody>
+          <a:bodyPr wrap="square" lIns="0" tIns="0" rIns="0" bIns="0" rtlCol="0" anchor="ctr"/>
+          <a:lstStyle/>
+          <a:p>
+            <a:pPr algn="ctr" indent="0" marL="0">
+              <a:buNone/>
+            </a:pPr>
+            <a:r>
+              <a:rPr lang="en-US" sz="900" b="1" dirty="0">
+                <a:solidFill>
+                  <a:srgbClr val="9D174D"/>
+                </a:solidFill>
+                <a:latin typeface="Trebuchet MS" pitchFamily="34" charset="0"/>
+                <a:ea typeface="Trebuchet MS" pitchFamily="34" charset="-122"/>
+                <a:cs typeface="Trebuchet MS" pitchFamily="34" charset="-120"/>
+              </a:rPr>
+              <a:t>e</a:t>
+            </a:r>
+            <a:endParaRPr lang="en-US" sz="900" dirty="0"/>
+          </a:p>
+        </p:txBody>
+      </p:sp>
+      <p:sp>
+        <p:nvSpPr>
+          <p:cNvPr id="44" name="Shape 42"/>
+          <p:cNvSpPr/>
+          <p:nvPr/>
+        </p:nvSpPr>
+        <p:spPr>
+          <a:xfrm>
+            <a:off x="3639312" y="4169664"/>
+            <a:ext cx="685800" cy="384048"/>
+          </a:xfrm>
+          <a:prstGeom prst="rect">
+            <a:avLst>
+              <a:gd name="adj" fmla="val 9524"/>
+            </a:avLst>
+          </a:prstGeom>
+          <a:solidFill>
+            <a:srgbClr val="FFFFFF"/>
+          </a:solidFill>
+          <a:ln w="12700">
+            <a:solidFill>
+              <a:srgbClr val="DB2777"/>
+            </a:solidFill>
+            <a:prstDash val="solid"/>
+          </a:ln>
+        </p:spPr>
+      </p:sp>
+      <p:sp>
+        <p:nvSpPr>
+          <p:cNvPr id="45" name="Text 43"/>
+          <p:cNvSpPr/>
+          <p:nvPr/>
+        </p:nvSpPr>
+        <p:spPr>
+          <a:xfrm>
+            <a:off x="3639312" y="4169664"/>
+            <a:ext cx="685800" cy="384048"/>
+          </a:xfrm>
+          <a:prstGeom prst="rect">
+            <a:avLst/>
+          </a:prstGeom>
+          <a:noFill/>
+          <a:ln/>
+        </p:spPr>
+        <p:txBody>
+          <a:bodyPr wrap="square" lIns="0" tIns="0" rIns="0" bIns="0" rtlCol="0" anchor="ctr"/>
+          <a:lstStyle/>
+          <a:p>
+            <a:pPr algn="ctr" indent="0" marL="0">
+              <a:buNone/>
+            </a:pPr>
+            <a:r>
+              <a:rPr lang="en-US" sz="900" b="1" dirty="0">
+                <a:solidFill>
+                  <a:srgbClr val="9D174D"/>
+                </a:solidFill>
+                <a:latin typeface="Trebuchet MS" pitchFamily="34" charset="0"/>
+                <a:ea typeface="Trebuchet MS" pitchFamily="34" charset="-122"/>
+                <a:cs typeface="Trebuchet MS" pitchFamily="34" charset="-120"/>
+              </a:rPr>
               <a:t>c</a:t>
             </a:r>
             <a:endParaRPr lang="en-US" sz="900" dirty="0"/>
@@ -36118,13 +36823,13 @@
       </p:sp>
       <p:sp>
         <p:nvSpPr>
-          <p:cNvPr id="42" name="Text 40"/>
-          <p:cNvSpPr/>
-          <p:nvPr/>
-        </p:nvSpPr>
-        <p:spPr>
-          <a:xfrm>
-            <a:off x="2023872" y="4572000"/>
+          <p:cNvPr id="46" name="Text 44"/>
+          <p:cNvSpPr/>
+          <p:nvPr/>
+        </p:nvSpPr>
+        <p:spPr>
+          <a:xfrm>
+            <a:off x="3639312" y="4572000"/>
             <a:ext cx="685800" cy="219456"/>
           </a:xfrm>
           <a:prstGeom prst="rect">
@@ -36157,13 +36862,13 @@
       </p:sp>
       <p:sp>
         <p:nvSpPr>
-          <p:cNvPr id="43" name="Shape 41"/>
-          <p:cNvSpPr/>
-          <p:nvPr/>
-        </p:nvSpPr>
-        <p:spPr>
-          <a:xfrm>
-            <a:off x="2831592" y="4169664"/>
+          <p:cNvPr id="47" name="Shape 45"/>
+          <p:cNvSpPr/>
+          <p:nvPr/>
+        </p:nvSpPr>
+        <p:spPr>
+          <a:xfrm>
+            <a:off x="4447032" y="4169664"/>
             <a:ext cx="685800" cy="384048"/>
           </a:xfrm>
           <a:prstGeom prst="rect">
@@ -36184,13 +36889,13 @@
       </p:sp>
       <p:sp>
         <p:nvSpPr>
-          <p:cNvPr id="44" name="Text 42"/>
-          <p:cNvSpPr/>
-          <p:nvPr/>
-        </p:nvSpPr>
-        <p:spPr>
-          <a:xfrm>
-            <a:off x="2831592" y="4169664"/>
+          <p:cNvPr id="48" name="Text 46"/>
+          <p:cNvSpPr/>
+          <p:nvPr/>
+        </p:nvSpPr>
+        <p:spPr>
+          <a:xfrm>
+            <a:off x="4447032" y="4169664"/>
             <a:ext cx="685800" cy="384048"/>
           </a:xfrm>
           <a:prstGeom prst="rect">
@@ -36223,13 +36928,13 @@
       </p:sp>
       <p:sp>
         <p:nvSpPr>
-          <p:cNvPr id="45" name="Shape 43"/>
-          <p:cNvSpPr/>
-          <p:nvPr/>
-        </p:nvSpPr>
-        <p:spPr>
-          <a:xfrm>
-            <a:off x="3639312" y="4169664"/>
+          <p:cNvPr id="49" name="Shape 47"/>
+          <p:cNvSpPr/>
+          <p:nvPr/>
+        </p:nvSpPr>
+        <p:spPr>
+          <a:xfrm>
+            <a:off x="5254752" y="4169664"/>
             <a:ext cx="685800" cy="384048"/>
           </a:xfrm>
           <a:prstGeom prst="rect">
@@ -36250,13 +36955,13 @@
       </p:sp>
       <p:sp>
         <p:nvSpPr>
-          <p:cNvPr id="46" name="Text 44"/>
-          <p:cNvSpPr/>
-          <p:nvPr/>
-        </p:nvSpPr>
-        <p:spPr>
-          <a:xfrm>
-            <a:off x="3639312" y="4169664"/>
+          <p:cNvPr id="50" name="Text 48"/>
+          <p:cNvSpPr/>
+          <p:nvPr/>
+        </p:nvSpPr>
+        <p:spPr>
+          <a:xfrm>
+            <a:off x="5254752" y="4169664"/>
             <a:ext cx="685800" cy="384048"/>
           </a:xfrm>
           <a:prstGeom prst="rect">
@@ -36289,13 +36994,13 @@
       </p:sp>
       <p:sp>
         <p:nvSpPr>
-          <p:cNvPr id="47" name="Shape 45"/>
-          <p:cNvSpPr/>
-          <p:nvPr/>
-        </p:nvSpPr>
-        <p:spPr>
-          <a:xfrm>
-            <a:off x="4447032" y="4169664"/>
+          <p:cNvPr id="51" name="Shape 49"/>
+          <p:cNvSpPr/>
+          <p:nvPr/>
+        </p:nvSpPr>
+        <p:spPr>
+          <a:xfrm>
+            <a:off x="6062472" y="4169664"/>
             <a:ext cx="685800" cy="384048"/>
           </a:xfrm>
           <a:prstGeom prst="rect">
@@ -36316,13 +37021,13 @@
       </p:sp>
       <p:sp>
         <p:nvSpPr>
-          <p:cNvPr id="48" name="Text 46"/>
-          <p:cNvSpPr/>
-          <p:nvPr/>
-        </p:nvSpPr>
-        <p:spPr>
-          <a:xfrm>
-            <a:off x="4447032" y="4169664"/>
+          <p:cNvPr id="52" name="Text 50"/>
+          <p:cNvSpPr/>
+          <p:nvPr/>
+        </p:nvSpPr>
+        <p:spPr>
+          <a:xfrm>
+            <a:off x="6062472" y="4169664"/>
             <a:ext cx="685800" cy="384048"/>
           </a:xfrm>
           <a:prstGeom prst="rect">
@@ -36355,13 +37060,13 @@
       </p:sp>
       <p:sp>
         <p:nvSpPr>
-          <p:cNvPr id="49" name="Shape 47"/>
-          <p:cNvSpPr/>
-          <p:nvPr/>
-        </p:nvSpPr>
-        <p:spPr>
-          <a:xfrm>
-            <a:off x="5254752" y="4169664"/>
+          <p:cNvPr id="53" name="Shape 51"/>
+          <p:cNvSpPr/>
+          <p:nvPr/>
+        </p:nvSpPr>
+        <p:spPr>
+          <a:xfrm>
+            <a:off x="6870192" y="4169664"/>
             <a:ext cx="685800" cy="384048"/>
           </a:xfrm>
           <a:prstGeom prst="rect">
@@ -36382,13 +37087,13 @@
       </p:sp>
       <p:sp>
         <p:nvSpPr>
-          <p:cNvPr id="50" name="Text 48"/>
-          <p:cNvSpPr/>
-          <p:nvPr/>
-        </p:nvSpPr>
-        <p:spPr>
-          <a:xfrm>
-            <a:off x="5254752" y="4169664"/>
+          <p:cNvPr id="54" name="Text 52"/>
+          <p:cNvSpPr/>
+          <p:nvPr/>
+        </p:nvSpPr>
+        <p:spPr>
+          <a:xfrm>
+            <a:off x="6870192" y="4169664"/>
             <a:ext cx="685800" cy="384048"/>
           </a:xfrm>
           <a:prstGeom prst="rect">
@@ -36421,13 +37126,13 @@
       </p:sp>
       <p:sp>
         <p:nvSpPr>
-          <p:cNvPr id="51" name="Text 49"/>
-          <p:cNvSpPr/>
-          <p:nvPr/>
-        </p:nvSpPr>
-        <p:spPr>
-          <a:xfrm>
-            <a:off x="5254752" y="4572000"/>
+          <p:cNvPr id="55" name="Text 53"/>
+          <p:cNvSpPr/>
+          <p:nvPr/>
+        </p:nvSpPr>
+        <p:spPr>
+          <a:xfrm>
+            <a:off x="6870192" y="4572000"/>
             <a:ext cx="685800" cy="219456"/>
           </a:xfrm>
           <a:prstGeom prst="rect">
@@ -36460,13 +37165,13 @@
       </p:sp>
       <p:sp>
         <p:nvSpPr>
-          <p:cNvPr id="52" name="Shape 50"/>
-          <p:cNvSpPr/>
-          <p:nvPr/>
-        </p:nvSpPr>
-        <p:spPr>
-          <a:xfrm>
-            <a:off x="6062472" y="4169664"/>
+          <p:cNvPr id="56" name="Shape 54"/>
+          <p:cNvSpPr/>
+          <p:nvPr/>
+        </p:nvSpPr>
+        <p:spPr>
+          <a:xfrm>
+            <a:off x="7677912" y="4169664"/>
             <a:ext cx="685800" cy="384048"/>
           </a:xfrm>
           <a:prstGeom prst="rect">
@@ -36487,13 +37192,13 @@
       </p:sp>
       <p:sp>
         <p:nvSpPr>
-          <p:cNvPr id="53" name="Text 51"/>
-          <p:cNvSpPr/>
-          <p:nvPr/>
-        </p:nvSpPr>
-        <p:spPr>
-          <a:xfrm>
-            <a:off x="6062472" y="4169664"/>
+          <p:cNvPr id="57" name="Text 55"/>
+          <p:cNvSpPr/>
+          <p:nvPr/>
+        </p:nvSpPr>
+        <p:spPr>
+          <a:xfrm>
+            <a:off x="7677912" y="4169664"/>
             <a:ext cx="685800" cy="384048"/>
           </a:xfrm>
           <a:prstGeom prst="rect">
@@ -36519,177 +37224,6 @@
                 <a:cs typeface="Trebuchet MS" pitchFamily="34" charset="-120"/>
               </a:rPr>
               <a:t>t</a:t>
-            </a:r>
-            <a:endParaRPr lang="en-US" sz="900" dirty="0"/>
-          </a:p>
-        </p:txBody>
-      </p:sp>
-      <p:sp>
-        <p:nvSpPr>
-          <p:cNvPr id="54" name="Shape 52"/>
-          <p:cNvSpPr/>
-          <p:nvPr/>
-        </p:nvSpPr>
-        <p:spPr>
-          <a:xfrm>
-            <a:off x="6870192" y="4169664"/>
-            <a:ext cx="685800" cy="384048"/>
-          </a:xfrm>
-          <a:prstGeom prst="rect">
-            <a:avLst>
-              <a:gd name="adj" fmla="val 9524"/>
-            </a:avLst>
-          </a:prstGeom>
-          <a:solidFill>
-            <a:srgbClr val="FFFFFF"/>
-          </a:solidFill>
-          <a:ln w="12700">
-            <a:solidFill>
-              <a:srgbClr val="DB2777"/>
-            </a:solidFill>
-            <a:prstDash val="solid"/>
-          </a:ln>
-        </p:spPr>
-      </p:sp>
-      <p:sp>
-        <p:nvSpPr>
-          <p:cNvPr id="55" name="Text 53"/>
-          <p:cNvSpPr/>
-          <p:nvPr/>
-        </p:nvSpPr>
-        <p:spPr>
-          <a:xfrm>
-            <a:off x="6870192" y="4169664"/>
-            <a:ext cx="685800" cy="384048"/>
-          </a:xfrm>
-          <a:prstGeom prst="rect">
-            <a:avLst/>
-          </a:prstGeom>
-          <a:noFill/>
-          <a:ln/>
-        </p:spPr>
-        <p:txBody>
-          <a:bodyPr wrap="square" lIns="0" tIns="0" rIns="0" bIns="0" rtlCol="0" anchor="ctr"/>
-          <a:lstStyle/>
-          <a:p>
-            <a:pPr algn="ctr" indent="0" marL="0">
-              <a:buNone/>
-            </a:pPr>
-            <a:r>
-              <a:rPr lang="en-US" sz="900" b="1" dirty="0">
-                <a:solidFill>
-                  <a:srgbClr val="9D174D"/>
-                </a:solidFill>
-                <a:latin typeface="Trebuchet MS" pitchFamily="34" charset="0"/>
-                <a:ea typeface="Trebuchet MS" pitchFamily="34" charset="-122"/>
-                <a:cs typeface="Trebuchet MS" pitchFamily="34" charset="-120"/>
-              </a:rPr>
-              <a:t>io</a:t>
-            </a:r>
-            <a:endParaRPr lang="en-US" sz="900" dirty="0"/>
-          </a:p>
-        </p:txBody>
-      </p:sp>
-      <p:sp>
-        <p:nvSpPr>
-          <p:cNvPr id="56" name="Text 54"/>
-          <p:cNvSpPr/>
-          <p:nvPr/>
-        </p:nvSpPr>
-        <p:spPr>
-          <a:xfrm>
-            <a:off x="6870192" y="4572000"/>
-            <a:ext cx="685800" cy="219456"/>
-          </a:xfrm>
-          <a:prstGeom prst="rect">
-            <a:avLst/>
-          </a:prstGeom>
-          <a:noFill/>
-          <a:ln/>
-        </p:spPr>
-        <p:txBody>
-          <a:bodyPr wrap="square" lIns="0" tIns="0" rIns="0" bIns="0" rtlCol="0" anchor="t"/>
-          <a:lstStyle/>
-          <a:p>
-            <a:pPr algn="ctr" indent="0" marL="0">
-              <a:buNone/>
-            </a:pPr>
-            <a:r>
-              <a:rPr lang="en-US" sz="750" i="1" dirty="0">
-                <a:solidFill>
-                  <a:srgbClr val="94A3B8"/>
-                </a:solidFill>
-                <a:latin typeface="Calibri" pitchFamily="34" charset="0"/>
-                <a:ea typeface="Calibri" pitchFamily="34" charset="-122"/>
-                <a:cs typeface="Calibri" pitchFamily="34" charset="-120"/>
-              </a:rPr>
-              <a:t>/sh/</a:t>
-            </a:r>
-            <a:endParaRPr lang="en-US" sz="750" dirty="0"/>
-          </a:p>
-        </p:txBody>
-      </p:sp>
-      <p:sp>
-        <p:nvSpPr>
-          <p:cNvPr id="57" name="Shape 55"/>
-          <p:cNvSpPr/>
-          <p:nvPr/>
-        </p:nvSpPr>
-        <p:spPr>
-          <a:xfrm>
-            <a:off x="7677912" y="4169664"/>
-            <a:ext cx="685800" cy="384048"/>
-          </a:xfrm>
-          <a:prstGeom prst="rect">
-            <a:avLst>
-              <a:gd name="adj" fmla="val 9524"/>
-            </a:avLst>
-          </a:prstGeom>
-          <a:solidFill>
-            <a:srgbClr val="FFFFFF"/>
-          </a:solidFill>
-          <a:ln w="12700">
-            <a:solidFill>
-              <a:srgbClr val="DB2777"/>
-            </a:solidFill>
-            <a:prstDash val="solid"/>
-          </a:ln>
-        </p:spPr>
-      </p:sp>
-      <p:sp>
-        <p:nvSpPr>
-          <p:cNvPr id="58" name="Text 56"/>
-          <p:cNvSpPr/>
-          <p:nvPr/>
-        </p:nvSpPr>
-        <p:spPr>
-          <a:xfrm>
-            <a:off x="7677912" y="4169664"/>
-            <a:ext cx="685800" cy="384048"/>
-          </a:xfrm>
-          <a:prstGeom prst="rect">
-            <a:avLst/>
-          </a:prstGeom>
-          <a:noFill/>
-          <a:ln/>
-        </p:spPr>
-        <p:txBody>
-          <a:bodyPr wrap="square" lIns="0" tIns="0" rIns="0" bIns="0" rtlCol="0" anchor="ctr"/>
-          <a:lstStyle/>
-          <a:p>
-            <a:pPr algn="ctr" indent="0" marL="0">
-              <a:buNone/>
-            </a:pPr>
-            <a:r>
-              <a:rPr lang="en-US" sz="900" b="1" dirty="0">
-                <a:solidFill>
-                  <a:srgbClr val="9D174D"/>
-                </a:solidFill>
-                <a:latin typeface="Trebuchet MS" pitchFamily="34" charset="0"/>
-                <a:ea typeface="Trebuchet MS" pitchFamily="34" charset="-122"/>
-                <a:cs typeface="Trebuchet MS" pitchFamily="34" charset="-120"/>
-              </a:rPr>
-              <a:t>n</a:t>
             </a:r>
             <a:endParaRPr lang="en-US" sz="900" dirty="0"/>
           </a:p>
@@ -36981,7 +37515,7 @@
                 <a:ea typeface="Calibri" pitchFamily="34" charset="-122"/>
                 <a:cs typeface="Calibri" pitchFamily="34" charset="-120"/>
               </a:rPr>
-              <a:t>Word Labs  •  wordlabs.app  •  Root: 'collect' = gather or bring together</a:t>
+              <a:t>Word Labs  •  wordlabs.app  •  Root: 'collect' = gather together, bring together</a:t>
             </a:r>
             <a:endParaRPr lang="en-US" sz="800" dirty="0"/>
           </a:p>
@@ -38150,7 +38684,7 @@
                 <a:ea typeface="Calibri" pitchFamily="34" charset="-122"/>
                 <a:cs typeface="Calibri" pitchFamily="34" charset="-120"/>
               </a:rPr>
-              <a:t>Word Labs  •  wordlabs.app  •  Root: 'collect' = gather or bring together</a:t>
+              <a:t>Word Labs  •  wordlabs.app  •  Root: 'collect' = gather together, bring together</a:t>
             </a:r>
             <a:endParaRPr lang="en-US" sz="800" dirty="0"/>
           </a:p>
@@ -38451,7 +38985,7 @@
                 <a:ea typeface="Trebuchet MS" pitchFamily="34" charset="-122"/>
                 <a:cs typeface="Trebuchet MS" pitchFamily="34" charset="-120"/>
               </a:rPr>
-              <a:t>col-</a:t>
+              <a:t>re-</a:t>
             </a:r>
             <a:endParaRPr lang="en-US" sz="1300" dirty="0"/>
           </a:p>
@@ -38643,7 +39177,7 @@
                 <a:ea typeface="Trebuchet MS" pitchFamily="34" charset="-122"/>
                 <a:cs typeface="Trebuchet MS" pitchFamily="34" charset="-120"/>
               </a:rPr>
-              <a:t>re-</a:t>
+              <a:t>pre-</a:t>
             </a:r>
             <a:endParaRPr lang="en-US" sz="1300" dirty="0"/>
           </a:p>
@@ -38732,7 +39266,7 @@
                 <a:ea typeface="Trebuchet MS" pitchFamily="34" charset="-122"/>
                 <a:cs typeface="Trebuchet MS" pitchFamily="34" charset="-120"/>
               </a:rPr>
-              <a:t>-or</a:t>
+              <a:t>-ive</a:t>
             </a:r>
             <a:endParaRPr lang="en-US" sz="1300" dirty="0"/>
           </a:p>
@@ -38796,7 +39330,7 @@
                 <a:ea typeface="Trebuchet MS" pitchFamily="34" charset="-122"/>
                 <a:cs typeface="Trebuchet MS" pitchFamily="34" charset="-120"/>
               </a:rPr>
-              <a:t>pre-</a:t>
+              <a:t>col-</a:t>
             </a:r>
             <a:endParaRPr lang="en-US" sz="1300" dirty="0"/>
           </a:p>
@@ -38885,7 +39419,7 @@
                 <a:ea typeface="Trebuchet MS" pitchFamily="34" charset="-122"/>
                 <a:cs typeface="Trebuchet MS" pitchFamily="34" charset="-120"/>
               </a:rPr>
-              <a:t>-ive</a:t>
+              <a:t>-or</a:t>
             </a:r>
             <a:endParaRPr lang="en-US" sz="1300" dirty="0"/>
           </a:p>
@@ -38949,7 +39483,7 @@
                 <a:ea typeface="Trebuchet MS" pitchFamily="34" charset="-122"/>
                 <a:cs typeface="Trebuchet MS" pitchFamily="34" charset="-120"/>
               </a:rPr>
-              <a:t>de-</a:t>
+              <a:t>con-</a:t>
             </a:r>
             <a:endParaRPr lang="en-US" sz="1300" dirty="0"/>
           </a:p>
@@ -39038,7 +39572,7 @@
                 <a:ea typeface="Trebuchet MS" pitchFamily="34" charset="-122"/>
                 <a:cs typeface="Trebuchet MS" pitchFamily="34" charset="-120"/>
               </a:rPr>
-              <a:t>-ible</a:t>
+              <a:t>-ed</a:t>
             </a:r>
             <a:endParaRPr lang="en-US" sz="1300" dirty="0"/>
           </a:p>
@@ -39102,7 +39636,7 @@
                 <a:ea typeface="Trebuchet MS" pitchFamily="34" charset="-122"/>
                 <a:cs typeface="Trebuchet MS" pitchFamily="34" charset="-120"/>
               </a:rPr>
-              <a:t>se-</a:t>
+              <a:t>de-</a:t>
             </a:r>
             <a:endParaRPr lang="en-US" sz="1300" dirty="0"/>
           </a:p>
@@ -39191,7 +39725,7 @@
                 <a:ea typeface="Trebuchet MS" pitchFamily="34" charset="-122"/>
                 <a:cs typeface="Trebuchet MS" pitchFamily="34" charset="-120"/>
               </a:rPr>
-              <a:t>-ed</a:t>
+              <a:t>-ing</a:t>
             </a:r>
             <a:endParaRPr lang="en-US" sz="1300" dirty="0"/>
           </a:p>
@@ -39428,7 +39962,7 @@
                 <a:ea typeface="Trebuchet MS" pitchFamily="34" charset="-122"/>
                 <a:cs typeface="Trebuchet MS" pitchFamily="34" charset="-120"/>
               </a:rPr>
-              <a:t>collector</a:t>
+              <a:t>collective</a:t>
             </a:r>
             <a:endParaRPr lang="en-US" sz="1200" dirty="0"/>
           </a:p>
@@ -39494,7 +40028,7 @@
                 <a:ea typeface="Trebuchet MS" pitchFamily="34" charset="-122"/>
                 <a:cs typeface="Trebuchet MS" pitchFamily="34" charset="-120"/>
               </a:rPr>
-              <a:t>collective</a:t>
+              <a:t>collector</a:t>
             </a:r>
             <a:endParaRPr lang="en-US" sz="1200" dirty="0"/>
           </a:p>
@@ -39626,7 +40160,7 @@
                 <a:ea typeface="Trebuchet MS" pitchFamily="34" charset="-122"/>
                 <a:cs typeface="Trebuchet MS" pitchFamily="34" charset="-120"/>
               </a:rPr>
-              <a:t>collectible</a:t>
+              <a:t>collecting</a:t>
             </a:r>
             <a:endParaRPr lang="en-US" sz="1200" dirty="0"/>
           </a:p>
@@ -40050,7 +40584,7 @@
                 <a:ea typeface="Calibri" pitchFamily="34" charset="-122"/>
                 <a:cs typeface="Calibri" pitchFamily="34" charset="-120"/>
               </a:rPr>
-              <a:t>Word Labs  •  wordlabs.app  •  Root: 'collect' = gather or bring together</a:t>
+              <a:t>Word Labs  •  wordlabs.app  •  Root: 'collect' = gather together, bring together</a:t>
             </a:r>
             <a:endParaRPr lang="en-US" sz="800" dirty="0"/>
           </a:p>
@@ -40214,7 +40748,7 @@
                 <a:ea typeface="Calibri" pitchFamily="34" charset="-122"/>
                 <a:cs typeface="Calibri" pitchFamily="34" charset="-120"/>
               </a:rPr>
-              <a:t>The core part of a word carrying its basic meaning. For example, 'collect' means 'gather or bring together'.</a:t>
+              <a:t>The core part of a word carrying its basic meaning. For example, 'collect' means 'gather together, bring together'.</a:t>
             </a:r>
             <a:endParaRPr lang="en-US" sz="1350" dirty="0"/>
           </a:p>
@@ -40834,7 +41368,7 @@
                 <a:ea typeface="Calibri" pitchFamily="34" charset="-122"/>
                 <a:cs typeface="Calibri" pitchFamily="34" charset="-120"/>
               </a:rPr>
-              <a:t>Word Labs  •  wordlabs.app  •  Root: 'collect' = gather or bring together</a:t>
+              <a:t>Word Labs  •  wordlabs.app  •  Root: 'collect' = gather together, bring together</a:t>
             </a:r>
             <a:endParaRPr lang="en-US" sz="800" dirty="0"/>
           </a:p>
@@ -40946,7 +41480,7 @@
                 <a:ea typeface="Calibri" pitchFamily="34" charset="-122"/>
                 <a:cs typeface="Calibri" pitchFamily="34" charset="-120"/>
               </a:rPr>
-              <a:t>1.  The root 'collect' comes from Latin and means to gather or bring together.</a:t>
+              <a:t>1.  The root 'collect' means to separate or divide things apart.</a:t>
             </a:r>
             <a:endParaRPr lang="en-US" sz="1300" dirty="0"/>
           </a:p>
@@ -40969,11 +41503,11 @@
             </a:avLst>
           </a:prstGeom>
           <a:solidFill>
-            <a:srgbClr val="DCFCE7"/>
-          </a:solidFill>
-          <a:ln w="12700">
-            <a:solidFill>
-              <a:srgbClr val="16A34A"/>
+            <a:srgbClr val="FEE2E2"/>
+          </a:solidFill>
+          <a:ln w="12700">
+            <a:solidFill>
+              <a:srgbClr val="DC2626"/>
             </a:solidFill>
             <a:prstDash val="solid"/>
           </a:ln>
@@ -41006,13 +41540,13 @@
             <a:r>
               <a:rPr lang="en-US" sz="1100" b="1" dirty="0">
                 <a:solidFill>
-                  <a:srgbClr val="16A34A"/>
+                  <a:srgbClr val="DC2626"/>
                 </a:solidFill>
                 <a:latin typeface="Trebuchet MS" pitchFamily="34" charset="0"/>
                 <a:ea typeface="Trebuchet MS" pitchFamily="34" charset="-122"/>
                 <a:cs typeface="Trebuchet MS" pitchFamily="34" charset="-120"/>
               </a:rPr>
-              <a:t>TRUE</a:t>
+              <a:t>FALSE</a:t>
             </a:r>
             <a:endParaRPr lang="en-US" sz="1100" dirty="0"/>
           </a:p>
@@ -41085,7 +41619,7 @@
                 <a:ea typeface="Calibri" pitchFamily="34" charset="-122"/>
                 <a:cs typeface="Calibri" pitchFamily="34" charset="-120"/>
               </a:rPr>
-              <a:t>2.  A 'collector' is someone who throws things away.</a:t>
+              <a:t>2.  The prefix 're' in 'recollect' means again or back.</a:t>
             </a:r>
             <a:endParaRPr lang="en-US" sz="1300" dirty="0"/>
           </a:p>
@@ -41108,11 +41642,11 @@
             </a:avLst>
           </a:prstGeom>
           <a:solidFill>
-            <a:srgbClr val="FEE2E2"/>
-          </a:solidFill>
-          <a:ln w="12700">
-            <a:solidFill>
-              <a:srgbClr val="DC2626"/>
+            <a:srgbClr val="DCFCE7"/>
+          </a:solidFill>
+          <a:ln w="12700">
+            <a:solidFill>
+              <a:srgbClr val="16A34A"/>
             </a:solidFill>
             <a:prstDash val="solid"/>
           </a:ln>
@@ -41145,13 +41679,13 @@
             <a:r>
               <a:rPr lang="en-US" sz="1100" b="1" dirty="0">
                 <a:solidFill>
-                  <a:srgbClr val="DC2626"/>
+                  <a:srgbClr val="16A34A"/>
                 </a:solidFill>
                 <a:latin typeface="Trebuchet MS" pitchFamily="34" charset="0"/>
                 <a:ea typeface="Trebuchet MS" pitchFamily="34" charset="-122"/>
                 <a:cs typeface="Trebuchet MS" pitchFamily="34" charset="-120"/>
               </a:rPr>
-              <a:t>FALSE</a:t>
+              <a:t>TRUE</a:t>
             </a:r>
             <a:endParaRPr lang="en-US" sz="1100" dirty="0"/>
           </a:p>
@@ -41224,7 +41758,7 @@
                 <a:ea typeface="Calibri" pitchFamily="34" charset="-122"/>
                 <a:cs typeface="Calibri" pitchFamily="34" charset="-120"/>
               </a:rPr>
-              <a:t>3.  The word 'recollect' uses the prefix 're-', meaning again, so it means to remember or gather a thought again.</a:t>
+              <a:t>3.  The root 'collect' comes from Latin.</a:t>
             </a:r>
             <a:endParaRPr lang="en-US" sz="1300" dirty="0"/>
           </a:p>
@@ -41363,7 +41897,7 @@
                 <a:ea typeface="Calibri" pitchFamily="34" charset="-122"/>
                 <a:cs typeface="Calibri" pitchFamily="34" charset="-120"/>
               </a:rPr>
-              <a:t>4.  A 'collection' is a group of things that have been gathered together.</a:t>
+              <a:t>4.  A 'collection' is a group of gathered things.</a:t>
             </a:r>
             <a:endParaRPr lang="en-US" sz="1300" dirty="0"/>
           </a:p>
@@ -41502,7 +42036,7 @@
                 <a:ea typeface="Calibri" pitchFamily="34" charset="-122"/>
                 <a:cs typeface="Calibri" pitchFamily="34" charset="-120"/>
               </a:rPr>
-              <a:t>5.  The suffix '-ible' in 'collectible' means 'without' or 'not'.</a:t>
+              <a:t>5.  The word 'collector' means to forget something.</a:t>
             </a:r>
             <a:endParaRPr lang="en-US" sz="1300" dirty="0"/>
           </a:p>
@@ -41860,7 +42394,7 @@
                 <a:ea typeface="Calibri" pitchFamily="34" charset="-122"/>
                 <a:cs typeface="Calibri" pitchFamily="34" charset="-120"/>
               </a:rPr>
-              <a:t>Word Labs  •  wordlabs.app  •  Root: 'collect' = gather or bring together</a:t>
+              <a:t>Word Labs  •  wordlabs.app  •  Root: 'collect' = gather together, bring together</a:t>
             </a:r>
             <a:endParaRPr lang="en-US" sz="800" dirty="0"/>
           </a:p>
@@ -41997,7 +42531,7 @@
                 <a:ea typeface="Trebuchet MS" pitchFamily="34" charset="-122"/>
                 <a:cs typeface="Trebuchet MS" pitchFamily="34" charset="-120"/>
               </a:rPr>
-              <a:t>gather or bring together</a:t>
+              <a:t>gather together, bring together</a:t>
             </a:r>
             <a:endParaRPr lang="en-US" sz="2000" dirty="0"/>
           </a:p>
@@ -42273,7 +42807,7 @@
                 <a:ea typeface="Trebuchet MS" pitchFamily="34" charset="-122"/>
                 <a:cs typeface="Trebuchet MS" pitchFamily="34" charset="-120"/>
               </a:rPr>
-              <a:t>collector</a:t>
+              <a:t>collective</a:t>
             </a:r>
             <a:endParaRPr lang="en-US" sz="1300" dirty="0"/>
           </a:p>
@@ -42339,7 +42873,7 @@
                 <a:ea typeface="Trebuchet MS" pitchFamily="34" charset="-122"/>
                 <a:cs typeface="Trebuchet MS" pitchFamily="34" charset="-120"/>
               </a:rPr>
-              <a:t>collective</a:t>
+              <a:t>collector</a:t>
             </a:r>
             <a:endParaRPr lang="en-US" sz="1300" dirty="0"/>
           </a:p>
@@ -42471,7 +43005,7 @@
                 <a:ea typeface="Trebuchet MS" pitchFamily="34" charset="-122"/>
                 <a:cs typeface="Trebuchet MS" pitchFamily="34" charset="-120"/>
               </a:rPr>
-              <a:t>collectible</a:t>
+              <a:t>collecting</a:t>
             </a:r>
             <a:endParaRPr lang="en-US" sz="1300" dirty="0"/>
           </a:p>
@@ -42829,7 +43363,7 @@
                 <a:ea typeface="Calibri" pitchFamily="34" charset="-122"/>
                 <a:cs typeface="Calibri" pitchFamily="34" charset="-120"/>
               </a:rPr>
-              <a:t>Word Labs  •  wordlabs.app  •  Root: 'collect' = gather or bring together</a:t>
+              <a:t>Word Labs  •  wordlabs.app  •  Root: 'collect' = gather together, bring together</a:t>
             </a:r>
             <a:endParaRPr lang="en-US" sz="800" dirty="0"/>
           </a:p>
@@ -43130,7 +43664,7 @@
                 <a:ea typeface="Trebuchet MS" pitchFamily="34" charset="-122"/>
                 <a:cs typeface="Trebuchet MS" pitchFamily="34" charset="-120"/>
               </a:rPr>
-              <a:t>col-</a:t>
+              <a:t>re-</a:t>
             </a:r>
             <a:endParaRPr lang="en-US" sz="1300" dirty="0"/>
           </a:p>
@@ -43322,7 +43856,7 @@
                 <a:ea typeface="Trebuchet MS" pitchFamily="34" charset="-122"/>
                 <a:cs typeface="Trebuchet MS" pitchFamily="34" charset="-120"/>
               </a:rPr>
-              <a:t>re-</a:t>
+              <a:t>pre-</a:t>
             </a:r>
             <a:endParaRPr lang="en-US" sz="1300" dirty="0"/>
           </a:p>
@@ -43411,7 +43945,7 @@
                 <a:ea typeface="Trebuchet MS" pitchFamily="34" charset="-122"/>
                 <a:cs typeface="Trebuchet MS" pitchFamily="34" charset="-120"/>
               </a:rPr>
-              <a:t>-or</a:t>
+              <a:t>-ive</a:t>
             </a:r>
             <a:endParaRPr lang="en-US" sz="1300" dirty="0"/>
           </a:p>
@@ -43475,7 +44009,7 @@
                 <a:ea typeface="Trebuchet MS" pitchFamily="34" charset="-122"/>
                 <a:cs typeface="Trebuchet MS" pitchFamily="34" charset="-120"/>
               </a:rPr>
-              <a:t>pre-</a:t>
+              <a:t>col-</a:t>
             </a:r>
             <a:endParaRPr lang="en-US" sz="1300" dirty="0"/>
           </a:p>
@@ -43564,7 +44098,7 @@
                 <a:ea typeface="Trebuchet MS" pitchFamily="34" charset="-122"/>
                 <a:cs typeface="Trebuchet MS" pitchFamily="34" charset="-120"/>
               </a:rPr>
-              <a:t>-ive</a:t>
+              <a:t>-or</a:t>
             </a:r>
             <a:endParaRPr lang="en-US" sz="1300" dirty="0"/>
           </a:p>
@@ -43628,7 +44162,7 @@
                 <a:ea typeface="Trebuchet MS" pitchFamily="34" charset="-122"/>
                 <a:cs typeface="Trebuchet MS" pitchFamily="34" charset="-120"/>
               </a:rPr>
-              <a:t>de-</a:t>
+              <a:t>con-</a:t>
             </a:r>
             <a:endParaRPr lang="en-US" sz="1300" dirty="0"/>
           </a:p>
@@ -43717,7 +44251,7 @@
                 <a:ea typeface="Trebuchet MS" pitchFamily="34" charset="-122"/>
                 <a:cs typeface="Trebuchet MS" pitchFamily="34" charset="-120"/>
               </a:rPr>
-              <a:t>-ible</a:t>
+              <a:t>-ed</a:t>
             </a:r>
             <a:endParaRPr lang="en-US" sz="1300" dirty="0"/>
           </a:p>
@@ -43781,7 +44315,7 @@
                 <a:ea typeface="Trebuchet MS" pitchFamily="34" charset="-122"/>
                 <a:cs typeface="Trebuchet MS" pitchFamily="34" charset="-120"/>
               </a:rPr>
-              <a:t>se-</a:t>
+              <a:t>de-</a:t>
             </a:r>
             <a:endParaRPr lang="en-US" sz="1300" dirty="0"/>
           </a:p>
@@ -43870,7 +44404,7 @@
                 <a:ea typeface="Trebuchet MS" pitchFamily="34" charset="-122"/>
                 <a:cs typeface="Trebuchet MS" pitchFamily="34" charset="-120"/>
               </a:rPr>
-              <a:t>-ed</a:t>
+              <a:t>-ing</a:t>
             </a:r>
             <a:endParaRPr lang="en-US" sz="1300" dirty="0"/>
           </a:p>
@@ -43924,7 +44458,7 @@
         <p:spPr>
           <a:xfrm>
             <a:off x="1508760" y="4178808"/>
-            <a:ext cx="950976" cy="420624"/>
+            <a:ext cx="822960" cy="420624"/>
           </a:xfrm>
           <a:prstGeom prst="rect">
             <a:avLst>
@@ -43958,7 +44492,7 @@
         <p:spPr>
           <a:xfrm>
             <a:off x="1508760" y="4178808"/>
-            <a:ext cx="950976" cy="420624"/>
+            <a:ext cx="822960" cy="420624"/>
           </a:xfrm>
           <a:prstGeom prst="rect">
             <a:avLst/>
@@ -43982,7 +44516,7 @@
                 <a:ea typeface="Trebuchet MS" pitchFamily="34" charset="-122"/>
                 <a:cs typeface="Trebuchet MS" pitchFamily="34" charset="-120"/>
               </a:rPr>
-              <a:t>col-</a:t>
+              <a:t>re-</a:t>
             </a:r>
             <a:endParaRPr lang="en-US" sz="1300" dirty="0"/>
           </a:p>
@@ -43996,7 +44530,7 @@
         </p:nvSpPr>
         <p:spPr>
           <a:xfrm>
-            <a:off x="2487168" y="4178808"/>
+            <a:off x="2359152" y="4178808"/>
             <a:ext cx="320040" cy="420624"/>
           </a:xfrm>
           <a:prstGeom prst="rect">
@@ -44035,7 +44569,7 @@
         </p:nvSpPr>
         <p:spPr>
           <a:xfrm>
-            <a:off x="2834640" y="4178808"/>
+            <a:off x="2706624" y="4178808"/>
             <a:ext cx="1682496" cy="420624"/>
           </a:xfrm>
           <a:prstGeom prst="rect">
@@ -44069,7 +44603,7 @@
         </p:nvSpPr>
         <p:spPr>
           <a:xfrm>
-            <a:off x="2834640" y="4178808"/>
+            <a:off x="2706624" y="4178808"/>
             <a:ext cx="1682496" cy="420624"/>
           </a:xfrm>
           <a:prstGeom prst="rect">
@@ -44108,7 +44642,7 @@
         </p:nvSpPr>
         <p:spPr>
           <a:xfrm>
-            <a:off x="4544568" y="4178808"/>
+            <a:off x="4416552" y="4178808"/>
             <a:ext cx="320040" cy="420624"/>
           </a:xfrm>
           <a:prstGeom prst="rect">
@@ -44147,7 +44681,7 @@
         </p:nvSpPr>
         <p:spPr>
           <a:xfrm>
-            <a:off x="4892040" y="4178808"/>
+            <a:off x="4764024" y="4178808"/>
             <a:ext cx="950976" cy="420624"/>
           </a:xfrm>
           <a:prstGeom prst="rect">
@@ -44181,7 +44715,7 @@
         </p:nvSpPr>
         <p:spPr>
           <a:xfrm>
-            <a:off x="4892040" y="4178808"/>
+            <a:off x="4764024" y="4178808"/>
             <a:ext cx="950976" cy="420624"/>
           </a:xfrm>
           <a:prstGeom prst="rect">
@@ -44220,7 +44754,7 @@
         </p:nvSpPr>
         <p:spPr>
           <a:xfrm>
-            <a:off x="5916168" y="4178808"/>
+            <a:off x="5788152" y="4178808"/>
             <a:ext cx="365760" cy="420624"/>
           </a:xfrm>
           <a:prstGeom prst="rect">
@@ -44259,7 +44793,7 @@
         </p:nvSpPr>
         <p:spPr>
           <a:xfrm>
-            <a:off x="6327648" y="4178808"/>
+            <a:off x="6199632" y="4178808"/>
             <a:ext cx="2194560" cy="420624"/>
           </a:xfrm>
           <a:prstGeom prst="rect">
@@ -44286,7 +44820,7 @@
         </p:nvSpPr>
         <p:spPr>
           <a:xfrm>
-            <a:off x="6327648" y="4178808"/>
+            <a:off x="6199632" y="4178808"/>
             <a:ext cx="2194560" cy="420624"/>
           </a:xfrm>
           <a:prstGeom prst="rect">
@@ -44603,7 +45137,7 @@
                 <a:ea typeface="Calibri" pitchFamily="34" charset="-122"/>
                 <a:cs typeface="Calibri" pitchFamily="34" charset="-120"/>
               </a:rPr>
-              <a:t>Word Labs  •  wordlabs.app  •  Root: 'collect' = gather or bring together</a:t>
+              <a:t>Word Labs  •  wordlabs.app  •  Root: 'collect' = gather together, bring together</a:t>
             </a:r>
             <a:endParaRPr lang="en-US" sz="800" dirty="0"/>
           </a:p>
@@ -44781,7 +45315,7 @@
                 <a:ea typeface="Calibri" pitchFamily="34" charset="-122"/>
                 <a:cs typeface="Calibri" pitchFamily="34" charset="-120"/>
               </a:rPr>
-              <a:t>To remember or bring a memory back into your mind.</a:t>
+              <a:t>To remember something from the past.</a:t>
             </a:r>
             <a:endParaRPr lang="en-US" sz="1200" dirty="0"/>
           </a:p>
@@ -44920,7 +45454,7 @@
                 <a:ea typeface="Calibri" pitchFamily="34" charset="-122"/>
                 <a:cs typeface="Calibri" pitchFamily="34" charset="-120"/>
               </a:rPr>
-              <a:t>A group of people or things acting or belonging together.</a:t>
+              <a:t>A person who gathers and keeps certain things, like a coin collector.</a:t>
             </a:r>
             <a:endParaRPr lang="en-US" sz="1200" dirty="0"/>
           </a:p>
@@ -44993,7 +45527,7 @@
                 <a:ea typeface="Trebuchet MS" pitchFamily="34" charset="-122"/>
                 <a:cs typeface="Trebuchet MS" pitchFamily="34" charset="-120"/>
               </a:rPr>
-              <a:t>collector</a:t>
+              <a:t>collective</a:t>
             </a:r>
             <a:endParaRPr lang="en-US" sz="1200" dirty="0"/>
           </a:p>
@@ -45059,7 +45593,7 @@
                 <a:ea typeface="Calibri" pitchFamily="34" charset="-122"/>
                 <a:cs typeface="Calibri" pitchFamily="34" charset="-120"/>
               </a:rPr>
-              <a:t>An item that people like to gather and keep because it is interesting or valuable.</a:t>
+              <a:t>The action of gathering things together over time.</a:t>
             </a:r>
             <a:endParaRPr lang="en-US" sz="1200" dirty="0"/>
           </a:p>
@@ -45132,7 +45666,7 @@
                 <a:ea typeface="Trebuchet MS" pitchFamily="34" charset="-122"/>
                 <a:cs typeface="Trebuchet MS" pitchFamily="34" charset="-120"/>
               </a:rPr>
-              <a:t>collective</a:t>
+              <a:t>collector</a:t>
             </a:r>
             <a:endParaRPr lang="en-US" sz="1200" dirty="0"/>
           </a:p>
@@ -45198,7 +45732,7 @@
                 <a:ea typeface="Calibri" pitchFamily="34" charset="-122"/>
                 <a:cs typeface="Calibri" pitchFamily="34" charset="-120"/>
               </a:rPr>
-              <a:t>Having gathered things together; also means staying calm and in control.</a:t>
+              <a:t>Stayed calm and in control, or having been gathered together.</a:t>
             </a:r>
             <a:endParaRPr lang="en-US" sz="1200" dirty="0"/>
           </a:p>
@@ -45410,7 +45944,7 @@
                 <a:ea typeface="Trebuchet MS" pitchFamily="34" charset="-122"/>
                 <a:cs typeface="Trebuchet MS" pitchFamily="34" charset="-120"/>
               </a:rPr>
-              <a:t>collectible</a:t>
+              <a:t>collecting</a:t>
             </a:r>
             <a:endParaRPr lang="en-US" sz="1200" dirty="0"/>
           </a:p>
@@ -45476,7 +46010,7 @@
                 <a:ea typeface="Calibri" pitchFamily="34" charset="-122"/>
                 <a:cs typeface="Calibri" pitchFamily="34" charset="-120"/>
               </a:rPr>
-              <a:t>A person who gathers and keeps particular things, like coins or cards.</a:t>
+              <a:t>Done by a group of people all working together.</a:t>
             </a:r>
             <a:endParaRPr lang="en-US" sz="1200" dirty="0"/>
           </a:p>
@@ -45907,7 +46441,7 @@
                 <a:ea typeface="Calibri" pitchFamily="34" charset="-122"/>
                 <a:cs typeface="Calibri" pitchFamily="34" charset="-120"/>
               </a:rPr>
-              <a:t>Word Labs  •  wordlabs.app  •  Root: 'collect' = gather or bring together</a:t>
+              <a:t>Word Labs  •  wordlabs.app  •  Root: 'collect' = gather together, bring together</a:t>
             </a:r>
             <a:endParaRPr lang="en-US" sz="800" dirty="0"/>
           </a:p>
@@ -46110,7 +46644,7 @@
                 <a:ea typeface="Calibri" pitchFamily="34" charset="-122"/>
                 <a:cs typeface="Calibri" pitchFamily="34" charset="-120"/>
               </a:rPr>
-              <a:t>The students decided to start a collection of native Australian insects for their science project.</a:t>
+              <a:t>The students worked together on a collective project to clean up the school garden.</a:t>
             </a:r>
             <a:endParaRPr lang="en-US" sz="1500" dirty="0"/>
           </a:p>
@@ -46274,7 +46808,7 @@
                 <a:ea typeface="Calibri" pitchFamily="34" charset="-122"/>
                 <a:cs typeface="Calibri" pitchFamily="34" charset="-120"/>
               </a:rPr>
-              <a:t>Our class collector brought in over fifty different coins from around the world to share with everyone.</a:t>
+              <a:t>My grandmother has a wonderful collection of vintage teacups on her shelf.</a:t>
             </a:r>
             <a:endParaRPr lang="en-US" sz="1500" dirty="0"/>
           </a:p>
@@ -46438,7 +46972,7 @@
                 <a:ea typeface="Calibri" pitchFamily="34" charset="-122"/>
                 <a:cs typeface="Calibri" pitchFamily="34" charset="-120"/>
               </a:rPr>
-              <a:t>She had a very collected manner when she presented her recollection of the school camp to the class.</a:t>
+              <a:t>Can you recollect where you left your lunchbox this morning?</a:t>
             </a:r>
             <a:endParaRPr lang="en-US" sz="1500" dirty="0"/>
           </a:p>
